--- a/automation/ecoco_客服週報_第35週_0824~0830.pptx
+++ b/automation/ecoco_客服週報_第35週_0824~0830.pptx
@@ -8091,7 +8091,7 @@
                           <a:ea typeface="Noto Sans TC Black" pitchFamily="34" charset="-122"/>
                           <a:cs typeface="Noto Sans TC Black" pitchFamily="34" charset="-120"/>
                         </a:rPr>
-                        <a:t>－</a:t>
+                        <a:t>F</a:t>
                       </a:r>
                       <a:endParaRPr lang="en-US" sz="1300" dirty="0">
                         <a:latin typeface="Noto Sans TC Black" charset="0"/>
@@ -8159,7 +8159,7 @@
                           <a:ea typeface="Noto Sans TC Medium" pitchFamily="34" charset="-122"/>
                           <a:cs typeface="Noto Sans TC Medium" pitchFamily="34" charset="-120"/>
                         </a:rPr>
-                        <a:t>－</a:t>
+                        <a:t>第 528 名</a:t>
                       </a:r>
                       <a:endParaRPr lang="en-US" sz="1050" dirty="0">
                         <a:latin typeface="Noto Sans TC Medium" charset="0"/>
@@ -8227,7 +8227,7 @@
                           <a:ea typeface="Noto Sans TC Medium" pitchFamily="34" charset="-122"/>
                           <a:cs typeface="Noto Sans TC Medium" pitchFamily="34" charset="-120"/>
                         </a:rPr>
-                        <a:t>臺中</a:t>
+                        <a:t>新北</a:t>
                       </a:r>
                       <a:endParaRPr lang="en-US" sz="1100" dirty="0">
                         <a:latin typeface="Noto Sans TC Medium" charset="0"/>
@@ -8295,7 +8295,7 @@
                           <a:ea typeface="Noto Sans TC Bold" pitchFamily="34" charset="-122"/>
                           <a:cs typeface="Noto Sans TC Bold" pitchFamily="34" charset="-120"/>
                         </a:rPr>
-                        <a:t>總太東光好室站</a:t>
+                        <a:t>衛生福利部雙和醫院第一醫療大樓站</a:t>
                       </a:r>
                       <a:endParaRPr lang="en-US" sz="1100" dirty="0">
                         <a:latin typeface="Noto Sans TC Bold" charset="0"/>
@@ -8607,7 +8607,7 @@
                           <a:ea typeface="Noto Sans TC Black" pitchFamily="34" charset="-122"/>
                           <a:cs typeface="Noto Sans TC Black" pitchFamily="34" charset="-120"/>
                         </a:rPr>
-                        <a:t>－</a:t>
+                        <a:t>F</a:t>
                       </a:r>
                       <a:endParaRPr lang="en-US" sz="1300" dirty="0">
                         <a:latin typeface="Noto Sans TC Black" charset="0"/>
@@ -8675,7 +8675,7 @@
                           <a:ea typeface="Noto Sans TC Medium" pitchFamily="34" charset="-122"/>
                           <a:cs typeface="Noto Sans TC Medium" pitchFamily="34" charset="-120"/>
                         </a:rPr>
-                        <a:t>－</a:t>
+                        <a:t>第 529 名</a:t>
                       </a:r>
                       <a:endParaRPr lang="en-US" sz="1050" dirty="0">
                         <a:latin typeface="Noto Sans TC Medium" charset="0"/>
@@ -8743,7 +8743,7 @@
                           <a:ea typeface="Noto Sans TC Medium" pitchFamily="34" charset="-122"/>
                           <a:cs typeface="Noto Sans TC Medium" pitchFamily="34" charset="-120"/>
                         </a:rPr>
-                        <a:t>臺中</a:t>
+                        <a:t>新北</a:t>
                       </a:r>
                       <a:endParaRPr lang="en-US" sz="1100" dirty="0">
                         <a:latin typeface="Noto Sans TC Medium" charset="0"/>
@@ -8811,7 +8811,7 @@
                           <a:ea typeface="Noto Sans TC Bold" pitchFamily="34" charset="-122"/>
                           <a:cs typeface="Noto Sans TC Bold" pitchFamily="34" charset="-120"/>
                         </a:rPr>
-                        <a:t>總太松竹好室站</a:t>
+                        <a:t>南山高中大中一樓站</a:t>
                       </a:r>
                       <a:endParaRPr lang="en-US" sz="1100" dirty="0">
                         <a:latin typeface="Noto Sans TC Bold" charset="0"/>
@@ -9123,7 +9123,7 @@
                           <a:ea typeface="Noto Sans TC Black" pitchFamily="34" charset="-122"/>
                           <a:cs typeface="Noto Sans TC Black" pitchFamily="34" charset="-120"/>
                         </a:rPr>
-                        <a:t>－</a:t>
+                        <a:t>F</a:t>
                       </a:r>
                       <a:endParaRPr lang="en-US" sz="1300" dirty="0">
                         <a:latin typeface="Noto Sans TC Black" charset="0"/>
@@ -9191,7 +9191,7 @@
                           <a:ea typeface="Noto Sans TC Medium" pitchFamily="34" charset="-122"/>
                           <a:cs typeface="Noto Sans TC Medium" pitchFamily="34" charset="-120"/>
                         </a:rPr>
-                        <a:t>－</a:t>
+                        <a:t>第 531 名</a:t>
                       </a:r>
                       <a:endParaRPr lang="en-US" sz="1050" dirty="0">
                         <a:latin typeface="Noto Sans TC Medium" charset="0"/>
@@ -9259,7 +9259,7 @@
                           <a:ea typeface="Noto Sans TC Medium" pitchFamily="34" charset="-122"/>
                           <a:cs typeface="Noto Sans TC Medium" pitchFamily="34" charset="-120"/>
                         </a:rPr>
-                        <a:t>苗栗</a:t>
+                        <a:t>新北</a:t>
                       </a:r>
                       <a:endParaRPr lang="en-US" sz="1100" dirty="0">
                         <a:latin typeface="Noto Sans TC Medium" charset="0"/>
@@ -9327,7 +9327,7 @@
                           <a:ea typeface="Noto Sans TC Bold" pitchFamily="34" charset="-122"/>
                           <a:cs typeface="Noto Sans TC Bold" pitchFamily="34" charset="-120"/>
                         </a:rPr>
-                        <a:t>頭屋明德社區站</a:t>
+                        <a:t>南山高中大中一樓站</a:t>
                       </a:r>
                       <a:endParaRPr lang="en-US" sz="1100" dirty="0">
                         <a:latin typeface="Noto Sans TC Bold" charset="0"/>
@@ -9775,7 +9775,7 @@
                           <a:ea typeface="Noto Sans TC Medium" pitchFamily="34" charset="-122"/>
                           <a:cs typeface="Noto Sans TC Medium" pitchFamily="34" charset="-120"/>
                         </a:rPr>
-                        <a:t>南投</a:t>
+                        <a:t>新北</a:t>
                       </a:r>
                       <a:endParaRPr lang="en-US" sz="1100" dirty="0">
                         <a:latin typeface="Noto Sans TC Medium" charset="0"/>
@@ -9843,7 +9843,7 @@
                           <a:ea typeface="Noto Sans TC Bold" pitchFamily="34" charset="-122"/>
                           <a:cs typeface="Noto Sans TC Bold" pitchFamily="34" charset="-120"/>
                         </a:rPr>
-                        <a:t>南投東華醫院站</a:t>
+                        <a:t>衛生福利部雙和醫院第一醫療大樓站</a:t>
                       </a:r>
                       <a:endParaRPr lang="en-US" sz="1100" dirty="0">
                         <a:latin typeface="Noto Sans TC Bold" charset="0"/>
@@ -10155,7 +10155,7 @@
                           <a:ea typeface="Noto Sans TC Black" pitchFamily="34" charset="-122"/>
                           <a:cs typeface="Noto Sans TC Black" pitchFamily="34" charset="-120"/>
                         </a:rPr>
-                        <a:t>－</a:t>
+                        <a:t>F</a:t>
                       </a:r>
                       <a:endParaRPr lang="en-US" sz="1300" dirty="0">
                         <a:latin typeface="Noto Sans TC Black" charset="0"/>
@@ -10223,7 +10223,7 @@
                           <a:ea typeface="Noto Sans TC Medium" pitchFamily="34" charset="-122"/>
                           <a:cs typeface="Noto Sans TC Medium" pitchFamily="34" charset="-120"/>
                         </a:rPr>
-                        <a:t>－</a:t>
+                        <a:t>第 513 名</a:t>
                       </a:r>
                       <a:endParaRPr lang="en-US" sz="1050" dirty="0">
                         <a:latin typeface="Noto Sans TC Medium" charset="0"/>
@@ -10291,7 +10291,7 @@
                           <a:ea typeface="Noto Sans TC Medium" pitchFamily="34" charset="-122"/>
                           <a:cs typeface="Noto Sans TC Medium" pitchFamily="34" charset="-120"/>
                         </a:rPr>
-                        <a:t>彰化</a:t>
+                        <a:t>高雄</a:t>
                       </a:r>
                       <a:endParaRPr lang="en-US" sz="1100" dirty="0">
                         <a:latin typeface="Noto Sans TC Medium" charset="0"/>
@@ -10359,7 +10359,7 @@
                           <a:ea typeface="Noto Sans TC Bold" pitchFamily="34" charset="-122"/>
                           <a:cs typeface="Noto Sans TC Bold" pitchFamily="34" charset="-120"/>
                         </a:rPr>
-                        <a:t>員林常春醫院站</a:t>
+                        <a:t>全聯福利中心三民十全三店站</a:t>
                       </a:r>
                       <a:endParaRPr lang="en-US" sz="1100" dirty="0">
                         <a:latin typeface="Noto Sans TC Bold" charset="0"/>
@@ -10533,7 +10533,7 @@
                           <a:ea typeface="Noto Sans TC Bold" pitchFamily="34" charset="-122"/>
                           <a:cs typeface="Noto Sans TC Bold" pitchFamily="34" charset="-120"/>
                         </a:rPr>
-                        <a:t>0</a:t>
+                        <a:t>112</a:t>
                       </a:r>
                       <a:endParaRPr lang="en-US" sz="1200" dirty="0">
                         <a:latin typeface="Noto Sans TC Bold" charset="0"/>
@@ -10671,7 +10671,7 @@
                           <a:ea typeface="Noto Sans TC Black" pitchFamily="34" charset="-122"/>
                           <a:cs typeface="Noto Sans TC Black" pitchFamily="34" charset="-120"/>
                         </a:rPr>
-                        <a:t>－</a:t>
+                        <a:t>F</a:t>
                       </a:r>
                       <a:endParaRPr lang="en-US" sz="1300" dirty="0">
                         <a:latin typeface="Noto Sans TC Black" charset="0"/>
@@ -10739,7 +10739,7 @@
                           <a:ea typeface="Noto Sans TC Medium" pitchFamily="34" charset="-122"/>
                           <a:cs typeface="Noto Sans TC Medium" pitchFamily="34" charset="-120"/>
                         </a:rPr>
-                        <a:t>－</a:t>
+                        <a:t>第 512 名</a:t>
                       </a:r>
                       <a:endParaRPr lang="en-US" sz="1050" dirty="0">
                         <a:latin typeface="Noto Sans TC Medium" charset="0"/>
@@ -10807,7 +10807,7 @@
                           <a:ea typeface="Noto Sans TC Medium" pitchFamily="34" charset="-122"/>
                           <a:cs typeface="Noto Sans TC Medium" pitchFamily="34" charset="-120"/>
                         </a:rPr>
-                        <a:t>彰化</a:t>
+                        <a:t>高雄</a:t>
                       </a:r>
                       <a:endParaRPr lang="en-US" sz="1100" dirty="0">
                         <a:latin typeface="Noto Sans TC Medium" charset="0"/>
@@ -10875,7 +10875,7 @@
                           <a:ea typeface="Noto Sans TC Bold" pitchFamily="34" charset="-122"/>
                           <a:cs typeface="Noto Sans TC Bold" pitchFamily="34" charset="-120"/>
                         </a:rPr>
-                        <a:t>員林宏仁醫院站</a:t>
+                        <a:t>全聯福利中心小港宏平店站</a:t>
                       </a:r>
                       <a:endParaRPr lang="en-US" sz="1100" dirty="0">
                         <a:latin typeface="Noto Sans TC Bold" charset="0"/>
@@ -11049,7 +11049,7 @@
                           <a:ea typeface="Noto Sans TC Bold" pitchFamily="34" charset="-122"/>
                           <a:cs typeface="Noto Sans TC Bold" pitchFamily="34" charset="-120"/>
                         </a:rPr>
-                        <a:t>0</a:t>
+                        <a:t>823</a:t>
                       </a:r>
                       <a:endParaRPr lang="en-US" sz="1200" dirty="0">
                         <a:latin typeface="Noto Sans TC Bold" charset="0"/>
@@ -11187,7 +11187,7 @@
                           <a:ea typeface="Noto Sans TC Black" pitchFamily="34" charset="-122"/>
                           <a:cs typeface="Noto Sans TC Black" pitchFamily="34" charset="-120"/>
                         </a:rPr>
-                        <a:t>－</a:t>
+                        <a:t>F</a:t>
                       </a:r>
                       <a:endParaRPr lang="en-US" sz="1300" dirty="0">
                         <a:latin typeface="Noto Sans TC Black" charset="0"/>
@@ -11255,7 +11255,7 @@
                           <a:ea typeface="Noto Sans TC Medium" pitchFamily="34" charset="-122"/>
                           <a:cs typeface="Noto Sans TC Medium" pitchFamily="34" charset="-120"/>
                         </a:rPr>
-                        <a:t>－</a:t>
+                        <a:t>第 516 名</a:t>
                       </a:r>
                       <a:endParaRPr lang="en-US" sz="1050" dirty="0">
                         <a:latin typeface="Noto Sans TC Medium" charset="0"/>
@@ -11323,7 +11323,7 @@
                           <a:ea typeface="Noto Sans TC Medium" pitchFamily="34" charset="-122"/>
                           <a:cs typeface="Noto Sans TC Medium" pitchFamily="34" charset="-120"/>
                         </a:rPr>
-                        <a:t>新竹</a:t>
+                        <a:t>臺南</a:t>
                       </a:r>
                       <a:endParaRPr lang="en-US" sz="1100" dirty="0">
                         <a:latin typeface="Noto Sans TC Medium" charset="0"/>
@@ -11391,7 +11391,7 @@
                           <a:ea typeface="Noto Sans TC Bold" pitchFamily="34" charset="-122"/>
                           <a:cs typeface="Noto Sans TC Bold" pitchFamily="34" charset="-120"/>
                         </a:rPr>
-                        <a:t>新東陽關西服務區站</a:t>
+                        <a:t>成功大學光復第二宿舍站</a:t>
                       </a:r>
                       <a:endParaRPr lang="en-US" sz="1100" dirty="0">
                         <a:latin typeface="Noto Sans TC Bold" charset="0"/>
@@ -11565,7 +11565,7 @@
                           <a:ea typeface="Noto Sans TC Bold" pitchFamily="34" charset="-122"/>
                           <a:cs typeface="Noto Sans TC Bold" pitchFamily="34" charset="-120"/>
                         </a:rPr>
-                        <a:t>0</a:t>
+                        <a:t>934</a:t>
                       </a:r>
                       <a:endParaRPr lang="en-US" sz="1200" dirty="0">
                         <a:latin typeface="Noto Sans TC Bold" charset="0"/>
@@ -11771,7 +11771,7 @@
                           <a:ea typeface="Noto Sans TC Medium" pitchFamily="34" charset="-122"/>
                           <a:cs typeface="Noto Sans TC Medium" pitchFamily="34" charset="-120"/>
                         </a:rPr>
-                        <a:t>第 523 名</a:t>
+                        <a:t>第 515 名</a:t>
                       </a:r>
                       <a:endParaRPr lang="en-US" sz="1050" dirty="0">
                         <a:latin typeface="Noto Sans TC Medium" charset="0"/>
@@ -11839,7 +11839,7 @@
                           <a:ea typeface="Noto Sans TC Medium" pitchFamily="34" charset="-122"/>
                           <a:cs typeface="Noto Sans TC Medium" pitchFamily="34" charset="-120"/>
                         </a:rPr>
-                        <a:t>臺南</a:t>
+                        <a:t>屏東</a:t>
                       </a:r>
                       <a:endParaRPr lang="en-US" sz="1100" dirty="0">
                         <a:latin typeface="Noto Sans TC Medium" charset="0"/>
@@ -11907,7 +11907,7 @@
                           <a:ea typeface="Noto Sans TC Bold" pitchFamily="34" charset="-122"/>
                           <a:cs typeface="Noto Sans TC Bold" pitchFamily="34" charset="-120"/>
                         </a:rPr>
-                        <a:t>成功大學光復第二宿舍站</a:t>
+                        <a:t>全聯福利中心屏東瑞民店站</a:t>
                       </a:r>
                       <a:endParaRPr lang="en-US" sz="1100" dirty="0">
                         <a:latin typeface="Noto Sans TC Bold" charset="0"/>
@@ -12081,7 +12081,7 @@
                           <a:ea typeface="Noto Sans TC Bold" pitchFamily="34" charset="-122"/>
                           <a:cs typeface="Noto Sans TC Bold" pitchFamily="34" charset="-120"/>
                         </a:rPr>
-                        <a:t>0</a:t>
+                        <a:t>1,075</a:t>
                       </a:r>
                       <a:endParaRPr lang="en-US" sz="1200" dirty="0">
                         <a:latin typeface="Noto Sans TC Bold" charset="0"/>
@@ -12219,7 +12219,7 @@
                           <a:ea typeface="Noto Sans TC Black" pitchFamily="34" charset="-122"/>
                           <a:cs typeface="Noto Sans TC Black" pitchFamily="34" charset="-120"/>
                         </a:rPr>
-                        <a:t>－</a:t>
+                        <a:t>F</a:t>
                       </a:r>
                       <a:endParaRPr lang="en-US" sz="1300" dirty="0">
                         <a:latin typeface="Noto Sans TC Black" charset="0"/>
@@ -12287,7 +12287,7 @@
                           <a:ea typeface="Noto Sans TC Medium" pitchFamily="34" charset="-122"/>
                           <a:cs typeface="Noto Sans TC Medium" pitchFamily="34" charset="-120"/>
                         </a:rPr>
-                        <a:t>－</a:t>
+                        <a:t>第 511 名</a:t>
                       </a:r>
                       <a:endParaRPr lang="en-US" sz="1050" dirty="0">
                         <a:latin typeface="Noto Sans TC Medium" charset="0"/>
@@ -12355,7 +12355,7 @@
                           <a:ea typeface="Noto Sans TC Medium" pitchFamily="34" charset="-122"/>
                           <a:cs typeface="Noto Sans TC Medium" pitchFamily="34" charset="-120"/>
                         </a:rPr>
-                        <a:t>臺北</a:t>
+                        <a:t>屏東</a:t>
                       </a:r>
                       <a:endParaRPr lang="en-US" sz="1100" dirty="0">
                         <a:latin typeface="Noto Sans TC Medium" charset="0"/>
@@ -12423,7 +12423,7 @@
                           <a:ea typeface="Noto Sans TC Bold" pitchFamily="34" charset="-122"/>
                           <a:cs typeface="Noto Sans TC Bold" pitchFamily="34" charset="-120"/>
                         </a:rPr>
-                        <a:t>Global Mall 環球南港車站</a:t>
+                        <a:t>全聯福利中心屏東瑞民店站</a:t>
                       </a:r>
                       <a:endParaRPr lang="en-US" sz="1100" dirty="0">
                         <a:latin typeface="Noto Sans TC Bold" charset="0"/>
@@ -12597,7 +12597,7 @@
                           <a:ea typeface="Noto Sans TC Bold" pitchFamily="34" charset="-122"/>
                           <a:cs typeface="Noto Sans TC Bold" pitchFamily="34" charset="-120"/>
                         </a:rPr>
-                        <a:t>0</a:t>
+                        <a:t>1,075</a:t>
                       </a:r>
                       <a:endParaRPr lang="en-US" sz="1200" dirty="0">
                         <a:latin typeface="Noto Sans TC Bold" charset="0"/>
@@ -12803,7 +12803,7 @@
                           <a:ea typeface="Noto Sans TC Medium" pitchFamily="34" charset="-122"/>
                           <a:cs typeface="Noto Sans TC Medium" pitchFamily="34" charset="-120"/>
                         </a:rPr>
-                        <a:t>第 524 名</a:t>
+                        <a:t>第 510 名</a:t>
                       </a:r>
                       <a:endParaRPr lang="en-US" sz="1050" dirty="0">
                         <a:latin typeface="Noto Sans TC Medium" charset="0"/>
@@ -12871,7 +12871,7 @@
                           <a:ea typeface="Noto Sans TC Medium" pitchFamily="34" charset="-122"/>
                           <a:cs typeface="Noto Sans TC Medium" pitchFamily="34" charset="-120"/>
                         </a:rPr>
-                        <a:t>澎湖</a:t>
+                        <a:t>雲林</a:t>
                       </a:r>
                       <a:endParaRPr lang="en-US" sz="1100" dirty="0">
                         <a:latin typeface="Noto Sans TC Medium" charset="0"/>
@@ -12939,7 +12939,7 @@
                           <a:ea typeface="Noto Sans TC Bold" pitchFamily="34" charset="-122"/>
                           <a:cs typeface="Noto Sans TC Bold" pitchFamily="34" charset="-120"/>
                         </a:rPr>
-                        <a:t>澎湖車船處交通船馬公候船室站</a:t>
+                        <a:t>全聯福利中心林內中正店站</a:t>
                       </a:r>
                       <a:endParaRPr lang="en-US" sz="1100" dirty="0">
                         <a:latin typeface="Noto Sans TC Bold" charset="0"/>
@@ -13113,7 +13113,7 @@
                           <a:ea typeface="Noto Sans TC Bold" pitchFamily="34" charset="-122"/>
                           <a:cs typeface="Noto Sans TC Bold" pitchFamily="34" charset="-120"/>
                         </a:rPr>
-                        <a:t>0</a:t>
+                        <a:t>1,100</a:t>
                       </a:r>
                       <a:endParaRPr lang="en-US" sz="1200" dirty="0">
                         <a:latin typeface="Noto Sans TC Bold" charset="0"/>
@@ -13313,6 +13313,96 @@
         </p:nvSpPr>
         <p:spPr>
           <a:xfrm>
+            <a:off x="7315200" y="1298448"/>
+            <a:ext cx="1188720" cy="256032"/>
+          </a:xfrm>
+          <a:prstGeom prst="roundRect">
+            <a:avLst>
+              <a:gd name="adj" fmla="val 50000"/>
+            </a:avLst>
+          </a:prstGeom>
+          <a:solidFill>
+            <a:srgbClr val="FFFFFF"/>
+          </a:solidFill>
+          <a:ln w="12700">
+            <a:solidFill>
+              <a:srgbClr val="060E9F"/>
+            </a:solidFill>
+            <a:prstDash val="solid"/>
+          </a:ln>
+        </p:spPr>
+      </p:sp>
+      <p:pic>
+        <p:nvPicPr>
+          <p:cNvPr id="9" name="Image 0" descr="D:\info\0507_Weekly-Report\Operations-Weekly-Report\automation\icons\key_blue.png">    </p:cNvPr>
+          <p:cNvPicPr>
+            <a:picLocks noChangeAspect="1"/>
+          </p:cNvPicPr>
+          <p:nvPr/>
+        </p:nvPicPr>
+        <p:blipFill>
+          <a:blip r:embed="rId1"/>
+          <a:stretch>
+            <a:fillRect/>
+          </a:stretch>
+        </p:blipFill>
+        <p:spPr>
+          <a:xfrm>
+            <a:off x="7443216" y="1353312"/>
+            <a:ext cx="146304" cy="146304"/>
+          </a:xfrm>
+          <a:prstGeom prst="rect">
+            <a:avLst/>
+          </a:prstGeom>
+        </p:spPr>
+      </p:pic>
+      <p:sp>
+        <p:nvSpPr>
+          <p:cNvPr id="10" name="Text 6"/>
+          <p:cNvSpPr/>
+          <p:nvPr/>
+        </p:nvSpPr>
+        <p:spPr>
+          <a:xfrm>
+            <a:off x="7607808" y="1298448"/>
+            <a:ext cx="822960" cy="256032"/>
+          </a:xfrm>
+          <a:prstGeom prst="rect">
+            <a:avLst/>
+          </a:prstGeom>
+          <a:noFill/>
+          <a:ln/>
+        </p:spPr>
+        <p:txBody>
+          <a:bodyPr wrap="square" lIns="0" tIns="0" rIns="0" bIns="0" rtlCol="0" anchor="ctr"/>
+          <a:lstStyle/>
+          <a:p>
+            <a:pPr algn="l" indent="0" marL="0">
+              <a:buNone/>
+            </a:pPr>
+            <a:r>
+              <a:rPr lang="en-US" sz="1000" b="1" dirty="0">
+                <a:solidFill>
+                  <a:srgbClr val="060E9F"/>
+                </a:solidFill>
+                <a:latin typeface="Noto Sans TC Bold" pitchFamily="34" charset="0"/>
+                <a:ea typeface="Noto Sans TC Bold" pitchFamily="34" charset="-122"/>
+                <a:cs typeface="Noto Sans TC Bold" pitchFamily="34" charset="-120"/>
+              </a:rPr>
+              <a:t>租賃</a:t>
+            </a:r>
+            <a:endParaRPr lang="en-US" sz="1000" dirty="0"/>
+          </a:p>
+        </p:txBody>
+      </p:sp>
+      <p:sp>
+        <p:nvSpPr>
+          <p:cNvPr id="11" name="Shape 7"/>
+          <p:cNvSpPr/>
+          <p:nvPr/>
+        </p:nvSpPr>
+        <p:spPr>
+          <a:xfrm>
             <a:off x="5966460" y="1682496"/>
             <a:ext cx="960120" cy="256032"/>
           </a:xfrm>
@@ -13336,7 +13426,7 @@
       </p:sp>
       <p:sp>
         <p:nvSpPr>
-          <p:cNvPr id="9" name="Text 6"/>
+          <p:cNvPr id="12" name="Text 8"/>
           <p:cNvSpPr/>
           <p:nvPr/>
         </p:nvSpPr>
@@ -13375,13 +13465,307 @@
       </p:sp>
       <p:sp>
         <p:nvSpPr>
-          <p:cNvPr id="10" name="Shape 7"/>
+          <p:cNvPr id="13" name="Shape 9"/>
           <p:cNvSpPr/>
           <p:nvPr/>
         </p:nvSpPr>
         <p:spPr>
           <a:xfrm>
             <a:off x="5966460" y="2066544"/>
+            <a:ext cx="960120" cy="256032"/>
+          </a:xfrm>
+          <a:prstGeom prst="roundRect">
+            <a:avLst>
+              <a:gd name="adj" fmla="val 50000"/>
+            </a:avLst>
+          </a:prstGeom>
+          <a:solidFill>
+            <a:srgbClr val="FF5000">
+              <a:alpha val="15000"/>
+            </a:srgbClr>
+          </a:solidFill>
+          <a:ln w="12700">
+            <a:solidFill>
+              <a:srgbClr val="FF5000"/>
+            </a:solidFill>
+            <a:prstDash val="solid"/>
+          </a:ln>
+        </p:spPr>
+      </p:sp>
+      <p:sp>
+        <p:nvSpPr>
+          <p:cNvPr id="14" name="Text 10"/>
+          <p:cNvSpPr/>
+          <p:nvPr/>
+        </p:nvSpPr>
+        <p:spPr>
+          <a:xfrm>
+            <a:off x="5966460" y="2066544"/>
+            <a:ext cx="960120" cy="256032"/>
+          </a:xfrm>
+          <a:prstGeom prst="rect">
+            <a:avLst/>
+          </a:prstGeom>
+          <a:noFill/>
+          <a:ln/>
+        </p:spPr>
+        <p:txBody>
+          <a:bodyPr wrap="square" lIns="0" tIns="0" rIns="0" bIns="0" rtlCol="0" anchor="ctr"/>
+          <a:lstStyle/>
+          <a:p>
+            <a:pPr algn="ctr" indent="0" marL="0">
+              <a:buNone/>
+            </a:pPr>
+            <a:r>
+              <a:rPr lang="en-US" sz="1000" b="1" dirty="0">
+                <a:solidFill>
+                  <a:srgbClr val="FF5000"/>
+                </a:solidFill>
+                <a:latin typeface="Noto Sans TC Bold" pitchFamily="34" charset="0"/>
+                <a:ea typeface="Noto Sans TC Bold" pitchFamily="34" charset="-122"/>
+                <a:cs typeface="Noto Sans TC Bold" pitchFamily="34" charset="-120"/>
+              </a:rPr>
+              <a:t>H30</a:t>
+            </a:r>
+            <a:endParaRPr lang="en-US" sz="1000" dirty="0"/>
+          </a:p>
+        </p:txBody>
+      </p:sp>
+      <p:sp>
+        <p:nvSpPr>
+          <p:cNvPr id="15" name="Shape 11"/>
+          <p:cNvSpPr/>
+          <p:nvPr/>
+        </p:nvSpPr>
+        <p:spPr>
+          <a:xfrm>
+            <a:off x="5966460" y="2450592"/>
+            <a:ext cx="960120" cy="256032"/>
+          </a:xfrm>
+          <a:prstGeom prst="roundRect">
+            <a:avLst>
+              <a:gd name="adj" fmla="val 50000"/>
+            </a:avLst>
+          </a:prstGeom>
+          <a:solidFill>
+            <a:srgbClr val="FF5000">
+              <a:alpha val="15000"/>
+            </a:srgbClr>
+          </a:solidFill>
+          <a:ln w="12700">
+            <a:solidFill>
+              <a:srgbClr val="FF5000"/>
+            </a:solidFill>
+            <a:prstDash val="solid"/>
+          </a:ln>
+        </p:spPr>
+      </p:sp>
+      <p:sp>
+        <p:nvSpPr>
+          <p:cNvPr id="16" name="Text 12"/>
+          <p:cNvSpPr/>
+          <p:nvPr/>
+        </p:nvSpPr>
+        <p:spPr>
+          <a:xfrm>
+            <a:off x="5966460" y="2450592"/>
+            <a:ext cx="960120" cy="256032"/>
+          </a:xfrm>
+          <a:prstGeom prst="rect">
+            <a:avLst/>
+          </a:prstGeom>
+          <a:noFill/>
+          <a:ln/>
+        </p:spPr>
+        <p:txBody>
+          <a:bodyPr wrap="square" lIns="0" tIns="0" rIns="0" bIns="0" rtlCol="0" anchor="ctr"/>
+          <a:lstStyle/>
+          <a:p>
+            <a:pPr algn="ctr" indent="0" marL="0">
+              <a:buNone/>
+            </a:pPr>
+            <a:r>
+              <a:rPr lang="en-US" sz="1000" b="1" dirty="0">
+                <a:solidFill>
+                  <a:srgbClr val="FF5000"/>
+                </a:solidFill>
+                <a:latin typeface="Noto Sans TC Bold" pitchFamily="34" charset="0"/>
+                <a:ea typeface="Noto Sans TC Bold" pitchFamily="34" charset="-122"/>
+                <a:cs typeface="Noto Sans TC Bold" pitchFamily="34" charset="-120"/>
+              </a:rPr>
+              <a:t>H30</a:t>
+            </a:r>
+            <a:endParaRPr lang="en-US" sz="1000" dirty="0"/>
+          </a:p>
+        </p:txBody>
+      </p:sp>
+      <p:sp>
+        <p:nvSpPr>
+          <p:cNvPr id="17" name="Shape 13"/>
+          <p:cNvSpPr/>
+          <p:nvPr/>
+        </p:nvSpPr>
+        <p:spPr>
+          <a:xfrm>
+            <a:off x="7315200" y="2450592"/>
+            <a:ext cx="1188720" cy="256032"/>
+          </a:xfrm>
+          <a:prstGeom prst="roundRect">
+            <a:avLst>
+              <a:gd name="adj" fmla="val 50000"/>
+            </a:avLst>
+          </a:prstGeom>
+          <a:solidFill>
+            <a:srgbClr val="FFFFFF"/>
+          </a:solidFill>
+          <a:ln w="12700">
+            <a:solidFill>
+              <a:srgbClr val="060E9F"/>
+            </a:solidFill>
+            <a:prstDash val="solid"/>
+          </a:ln>
+        </p:spPr>
+      </p:sp>
+      <p:pic>
+        <p:nvPicPr>
+          <p:cNvPr id="18" name="Image 1" descr="D:\info\0507_Weekly-Report\Operations-Weekly-Report\automation\icons\key_blue.png">    </p:cNvPr>
+          <p:cNvPicPr>
+            <a:picLocks noChangeAspect="1"/>
+          </p:cNvPicPr>
+          <p:nvPr/>
+        </p:nvPicPr>
+        <p:blipFill>
+          <a:blip r:embed="rId2"/>
+          <a:stretch>
+            <a:fillRect/>
+          </a:stretch>
+        </p:blipFill>
+        <p:spPr>
+          <a:xfrm>
+            <a:off x="7443216" y="2505456"/>
+            <a:ext cx="146304" cy="146304"/>
+          </a:xfrm>
+          <a:prstGeom prst="rect">
+            <a:avLst/>
+          </a:prstGeom>
+        </p:spPr>
+      </p:pic>
+      <p:sp>
+        <p:nvSpPr>
+          <p:cNvPr id="19" name="Text 14"/>
+          <p:cNvSpPr/>
+          <p:nvPr/>
+        </p:nvSpPr>
+        <p:spPr>
+          <a:xfrm>
+            <a:off x="7607808" y="2450592"/>
+            <a:ext cx="822960" cy="256032"/>
+          </a:xfrm>
+          <a:prstGeom prst="rect">
+            <a:avLst/>
+          </a:prstGeom>
+          <a:noFill/>
+          <a:ln/>
+        </p:spPr>
+        <p:txBody>
+          <a:bodyPr wrap="square" lIns="0" tIns="0" rIns="0" bIns="0" rtlCol="0" anchor="ctr"/>
+          <a:lstStyle/>
+          <a:p>
+            <a:pPr algn="l" indent="0" marL="0">
+              <a:buNone/>
+            </a:pPr>
+            <a:r>
+              <a:rPr lang="en-US" sz="1000" b="1" dirty="0">
+                <a:solidFill>
+                  <a:srgbClr val="060E9F"/>
+                </a:solidFill>
+                <a:latin typeface="Noto Sans TC Bold" pitchFamily="34" charset="0"/>
+                <a:ea typeface="Noto Sans TC Bold" pitchFamily="34" charset="-122"/>
+                <a:cs typeface="Noto Sans TC Bold" pitchFamily="34" charset="-120"/>
+              </a:rPr>
+              <a:t>租賃</a:t>
+            </a:r>
+            <a:endParaRPr lang="en-US" sz="1000" dirty="0"/>
+          </a:p>
+        </p:txBody>
+      </p:sp>
+      <p:sp>
+        <p:nvSpPr>
+          <p:cNvPr id="20" name="Shape 15"/>
+          <p:cNvSpPr/>
+          <p:nvPr/>
+        </p:nvSpPr>
+        <p:spPr>
+          <a:xfrm>
+            <a:off x="5966460" y="2834640"/>
+            <a:ext cx="960120" cy="256032"/>
+          </a:xfrm>
+          <a:prstGeom prst="roundRect">
+            <a:avLst>
+              <a:gd name="adj" fmla="val 50000"/>
+            </a:avLst>
+          </a:prstGeom>
+          <a:solidFill>
+            <a:srgbClr val="0076A9">
+              <a:alpha val="15000"/>
+            </a:srgbClr>
+          </a:solidFill>
+          <a:ln w="12700">
+            <a:solidFill>
+              <a:srgbClr val="0076A9"/>
+            </a:solidFill>
+            <a:prstDash val="solid"/>
+          </a:ln>
+        </p:spPr>
+      </p:sp>
+      <p:sp>
+        <p:nvSpPr>
+          <p:cNvPr id="21" name="Text 16"/>
+          <p:cNvSpPr/>
+          <p:nvPr/>
+        </p:nvSpPr>
+        <p:spPr>
+          <a:xfrm>
+            <a:off x="5966460" y="2834640"/>
+            <a:ext cx="960120" cy="256032"/>
+          </a:xfrm>
+          <a:prstGeom prst="rect">
+            <a:avLst/>
+          </a:prstGeom>
+          <a:noFill/>
+          <a:ln/>
+        </p:spPr>
+        <p:txBody>
+          <a:bodyPr wrap="square" lIns="0" tIns="0" rIns="0" bIns="0" rtlCol="0" anchor="ctr"/>
+          <a:lstStyle/>
+          <a:p>
+            <a:pPr algn="ctr" indent="0" marL="0">
+              <a:buNone/>
+            </a:pPr>
+            <a:r>
+              <a:rPr lang="en-US" sz="1000" b="1" dirty="0">
+                <a:solidFill>
+                  <a:srgbClr val="0076A9"/>
+                </a:solidFill>
+                <a:latin typeface="Noto Sans TC Bold" pitchFamily="34" charset="0"/>
+                <a:ea typeface="Noto Sans TC Bold" pitchFamily="34" charset="-122"/>
+                <a:cs typeface="Noto Sans TC Bold" pitchFamily="34" charset="-120"/>
+              </a:rPr>
+              <a:t>AI-HD</a:t>
+            </a:r>
+            <a:endParaRPr lang="en-US" sz="1000" dirty="0"/>
+          </a:p>
+        </p:txBody>
+      </p:sp>
+      <p:sp>
+        <p:nvSpPr>
+          <p:cNvPr id="22" name="Shape 17"/>
+          <p:cNvSpPr/>
+          <p:nvPr/>
+        </p:nvSpPr>
+        <p:spPr>
+          <a:xfrm>
+            <a:off x="5966460" y="3218688"/>
             <a:ext cx="960120" cy="256032"/>
           </a:xfrm>
           <a:prstGeom prst="roundRect">
@@ -13404,13 +13788,13 @@
       </p:sp>
       <p:sp>
         <p:nvSpPr>
-          <p:cNvPr id="11" name="Text 8"/>
+          <p:cNvPr id="23" name="Text 18"/>
           <p:cNvSpPr/>
           <p:nvPr/>
         </p:nvSpPr>
         <p:spPr>
           <a:xfrm>
-            <a:off x="5966460" y="2066544"/>
+            <a:off x="5966460" y="3218688"/>
             <a:ext cx="960120" cy="256032"/>
           </a:xfrm>
           <a:prstGeom prst="rect">
@@ -13443,13 +13827,307 @@
       </p:sp>
       <p:sp>
         <p:nvSpPr>
-          <p:cNvPr id="12" name="Shape 9"/>
+          <p:cNvPr id="24" name="Shape 19"/>
           <p:cNvSpPr/>
           <p:nvPr/>
         </p:nvSpPr>
         <p:spPr>
           <a:xfrm>
-            <a:off x="5966460" y="2450592"/>
+            <a:off x="5966460" y="3602736"/>
+            <a:ext cx="960120" cy="256032"/>
+          </a:xfrm>
+          <a:prstGeom prst="roundRect">
+            <a:avLst>
+              <a:gd name="adj" fmla="val 50000"/>
+            </a:avLst>
+          </a:prstGeom>
+          <a:solidFill>
+            <a:srgbClr val="060E9F">
+              <a:alpha val="15000"/>
+            </a:srgbClr>
+          </a:solidFill>
+          <a:ln w="12700">
+            <a:solidFill>
+              <a:srgbClr val="060E9F"/>
+            </a:solidFill>
+            <a:prstDash val="solid"/>
+          </a:ln>
+        </p:spPr>
+      </p:sp>
+      <p:sp>
+        <p:nvSpPr>
+          <p:cNvPr id="25" name="Text 20"/>
+          <p:cNvSpPr/>
+          <p:nvPr/>
+        </p:nvSpPr>
+        <p:spPr>
+          <a:xfrm>
+            <a:off x="5966460" y="3602736"/>
+            <a:ext cx="960120" cy="256032"/>
+          </a:xfrm>
+          <a:prstGeom prst="rect">
+            <a:avLst/>
+          </a:prstGeom>
+          <a:noFill/>
+          <a:ln/>
+        </p:spPr>
+        <p:txBody>
+          <a:bodyPr wrap="square" lIns="0" tIns="0" rIns="0" bIns="0" rtlCol="0" anchor="ctr"/>
+          <a:lstStyle/>
+          <a:p>
+            <a:pPr algn="ctr" indent="0" marL="0">
+              <a:buNone/>
+            </a:pPr>
+            <a:r>
+              <a:rPr lang="en-US" sz="1000" b="1" dirty="0">
+                <a:solidFill>
+                  <a:srgbClr val="060E9F"/>
+                </a:solidFill>
+                <a:latin typeface="Noto Sans TC Bold" pitchFamily="34" charset="0"/>
+                <a:ea typeface="Noto Sans TC Bold" pitchFamily="34" charset="-122"/>
+                <a:cs typeface="Noto Sans TC Bold" pitchFamily="34" charset="-120"/>
+              </a:rPr>
+              <a:t>AI-4</a:t>
+            </a:r>
+            <a:endParaRPr lang="en-US" sz="1000" dirty="0"/>
+          </a:p>
+        </p:txBody>
+      </p:sp>
+      <p:sp>
+        <p:nvSpPr>
+          <p:cNvPr id="26" name="Shape 21"/>
+          <p:cNvSpPr/>
+          <p:nvPr/>
+        </p:nvSpPr>
+        <p:spPr>
+          <a:xfrm>
+            <a:off x="7315200" y="3602736"/>
+            <a:ext cx="1188720" cy="256032"/>
+          </a:xfrm>
+          <a:prstGeom prst="roundRect">
+            <a:avLst>
+              <a:gd name="adj" fmla="val 50000"/>
+            </a:avLst>
+          </a:prstGeom>
+          <a:solidFill>
+            <a:srgbClr val="FFFFFF"/>
+          </a:solidFill>
+          <a:ln w="12700">
+            <a:solidFill>
+              <a:srgbClr val="060E9F"/>
+            </a:solidFill>
+            <a:prstDash val="solid"/>
+          </a:ln>
+        </p:spPr>
+      </p:sp>
+      <p:pic>
+        <p:nvPicPr>
+          <p:cNvPr id="27" name="Image 2" descr="D:\info\0507_Weekly-Report\Operations-Weekly-Report\automation\icons\key_blue.png">    </p:cNvPr>
+          <p:cNvPicPr>
+            <a:picLocks noChangeAspect="1"/>
+          </p:cNvPicPr>
+          <p:nvPr/>
+        </p:nvPicPr>
+        <p:blipFill>
+          <a:blip r:embed="rId3"/>
+          <a:stretch>
+            <a:fillRect/>
+          </a:stretch>
+        </p:blipFill>
+        <p:spPr>
+          <a:xfrm>
+            <a:off x="7443216" y="3657600"/>
+            <a:ext cx="146304" cy="146304"/>
+          </a:xfrm>
+          <a:prstGeom prst="rect">
+            <a:avLst/>
+          </a:prstGeom>
+        </p:spPr>
+      </p:pic>
+      <p:sp>
+        <p:nvSpPr>
+          <p:cNvPr id="28" name="Text 22"/>
+          <p:cNvSpPr/>
+          <p:nvPr/>
+        </p:nvSpPr>
+        <p:spPr>
+          <a:xfrm>
+            <a:off x="7607808" y="3602736"/>
+            <a:ext cx="822960" cy="256032"/>
+          </a:xfrm>
+          <a:prstGeom prst="rect">
+            <a:avLst/>
+          </a:prstGeom>
+          <a:noFill/>
+          <a:ln/>
+        </p:spPr>
+        <p:txBody>
+          <a:bodyPr wrap="square" lIns="0" tIns="0" rIns="0" bIns="0" rtlCol="0" anchor="ctr"/>
+          <a:lstStyle/>
+          <a:p>
+            <a:pPr algn="l" indent="0" marL="0">
+              <a:buNone/>
+            </a:pPr>
+            <a:r>
+              <a:rPr lang="en-US" sz="1000" b="1" dirty="0">
+                <a:solidFill>
+                  <a:srgbClr val="060E9F"/>
+                </a:solidFill>
+                <a:latin typeface="Noto Sans TC Bold" pitchFamily="34" charset="0"/>
+                <a:ea typeface="Noto Sans TC Bold" pitchFamily="34" charset="-122"/>
+                <a:cs typeface="Noto Sans TC Bold" pitchFamily="34" charset="-120"/>
+              </a:rPr>
+              <a:t>租賃</a:t>
+            </a:r>
+            <a:endParaRPr lang="en-US" sz="1000" dirty="0"/>
+          </a:p>
+        </p:txBody>
+      </p:sp>
+      <p:sp>
+        <p:nvSpPr>
+          <p:cNvPr id="29" name="Shape 23"/>
+          <p:cNvSpPr/>
+          <p:nvPr/>
+        </p:nvSpPr>
+        <p:spPr>
+          <a:xfrm>
+            <a:off x="5966460" y="3986784"/>
+            <a:ext cx="960120" cy="256032"/>
+          </a:xfrm>
+          <a:prstGeom prst="roundRect">
+            <a:avLst>
+              <a:gd name="adj" fmla="val 50000"/>
+            </a:avLst>
+          </a:prstGeom>
+          <a:solidFill>
+            <a:srgbClr val="060E9F">
+              <a:alpha val="15000"/>
+            </a:srgbClr>
+          </a:solidFill>
+          <a:ln w="12700">
+            <a:solidFill>
+              <a:srgbClr val="060E9F"/>
+            </a:solidFill>
+            <a:prstDash val="solid"/>
+          </a:ln>
+        </p:spPr>
+      </p:sp>
+      <p:sp>
+        <p:nvSpPr>
+          <p:cNvPr id="30" name="Text 24"/>
+          <p:cNvSpPr/>
+          <p:nvPr/>
+        </p:nvSpPr>
+        <p:spPr>
+          <a:xfrm>
+            <a:off x="5966460" y="3986784"/>
+            <a:ext cx="960120" cy="256032"/>
+          </a:xfrm>
+          <a:prstGeom prst="rect">
+            <a:avLst/>
+          </a:prstGeom>
+          <a:noFill/>
+          <a:ln/>
+        </p:spPr>
+        <p:txBody>
+          <a:bodyPr wrap="square" lIns="0" tIns="0" rIns="0" bIns="0" rtlCol="0" anchor="ctr"/>
+          <a:lstStyle/>
+          <a:p>
+            <a:pPr algn="ctr" indent="0" marL="0">
+              <a:buNone/>
+            </a:pPr>
+            <a:r>
+              <a:rPr lang="en-US" sz="1000" b="1" dirty="0">
+                <a:solidFill>
+                  <a:srgbClr val="060E9F"/>
+                </a:solidFill>
+                <a:latin typeface="Noto Sans TC Bold" pitchFamily="34" charset="0"/>
+                <a:ea typeface="Noto Sans TC Bold" pitchFamily="34" charset="-122"/>
+                <a:cs typeface="Noto Sans TC Bold" pitchFamily="34" charset="-120"/>
+              </a:rPr>
+              <a:t>AI-4</a:t>
+            </a:r>
+            <a:endParaRPr lang="en-US" sz="1000" dirty="0"/>
+          </a:p>
+        </p:txBody>
+      </p:sp>
+      <p:sp>
+        <p:nvSpPr>
+          <p:cNvPr id="31" name="Shape 25"/>
+          <p:cNvSpPr/>
+          <p:nvPr/>
+        </p:nvSpPr>
+        <p:spPr>
+          <a:xfrm>
+            <a:off x="5966460" y="4370832"/>
+            <a:ext cx="960120" cy="256032"/>
+          </a:xfrm>
+          <a:prstGeom prst="roundRect">
+            <a:avLst>
+              <a:gd name="adj" fmla="val 50000"/>
+            </a:avLst>
+          </a:prstGeom>
+          <a:solidFill>
+            <a:srgbClr val="060E9F">
+              <a:alpha val="15000"/>
+            </a:srgbClr>
+          </a:solidFill>
+          <a:ln w="12700">
+            <a:solidFill>
+              <a:srgbClr val="060E9F"/>
+            </a:solidFill>
+            <a:prstDash val="solid"/>
+          </a:ln>
+        </p:spPr>
+      </p:sp>
+      <p:sp>
+        <p:nvSpPr>
+          <p:cNvPr id="32" name="Text 26"/>
+          <p:cNvSpPr/>
+          <p:nvPr/>
+        </p:nvSpPr>
+        <p:spPr>
+          <a:xfrm>
+            <a:off x="5966460" y="4370832"/>
+            <a:ext cx="960120" cy="256032"/>
+          </a:xfrm>
+          <a:prstGeom prst="rect">
+            <a:avLst/>
+          </a:prstGeom>
+          <a:noFill/>
+          <a:ln/>
+        </p:spPr>
+        <p:txBody>
+          <a:bodyPr wrap="square" lIns="0" tIns="0" rIns="0" bIns="0" rtlCol="0" anchor="ctr"/>
+          <a:lstStyle/>
+          <a:p>
+            <a:pPr algn="ctr" indent="0" marL="0">
+              <a:buNone/>
+            </a:pPr>
+            <a:r>
+              <a:rPr lang="en-US" sz="1000" b="1" dirty="0">
+                <a:solidFill>
+                  <a:srgbClr val="060E9F"/>
+                </a:solidFill>
+                <a:latin typeface="Noto Sans TC Bold" pitchFamily="34" charset="0"/>
+                <a:ea typeface="Noto Sans TC Bold" pitchFamily="34" charset="-122"/>
+                <a:cs typeface="Noto Sans TC Bold" pitchFamily="34" charset="-120"/>
+              </a:rPr>
+              <a:t>AI-4</a:t>
+            </a:r>
+            <a:endParaRPr lang="en-US" sz="1000" dirty="0"/>
+          </a:p>
+        </p:txBody>
+      </p:sp>
+      <p:sp>
+        <p:nvSpPr>
+          <p:cNvPr id="33" name="Shape 27"/>
+          <p:cNvSpPr/>
+          <p:nvPr/>
+        </p:nvSpPr>
+        <p:spPr>
+          <a:xfrm>
+            <a:off x="5966460" y="4754880"/>
             <a:ext cx="960120" cy="256032"/>
           </a:xfrm>
           <a:prstGeom prst="roundRect">
@@ -13472,13 +14150,13 @@
       </p:sp>
       <p:sp>
         <p:nvSpPr>
-          <p:cNvPr id="13" name="Text 10"/>
+          <p:cNvPr id="34" name="Text 28"/>
           <p:cNvSpPr/>
           <p:nvPr/>
         </p:nvSpPr>
         <p:spPr>
           <a:xfrm>
-            <a:off x="5966460" y="2450592"/>
+            <a:off x="5966460" y="4754880"/>
             <a:ext cx="960120" cy="256032"/>
           </a:xfrm>
           <a:prstGeom prst="rect">
@@ -13511,505 +14189,7 @@
       </p:sp>
       <p:sp>
         <p:nvSpPr>
-          <p:cNvPr id="14" name="Shape 11"/>
-          <p:cNvSpPr/>
-          <p:nvPr/>
-        </p:nvSpPr>
-        <p:spPr>
-          <a:xfrm>
-            <a:off x="5966460" y="2834640"/>
-            <a:ext cx="960120" cy="256032"/>
-          </a:xfrm>
-          <a:prstGeom prst="roundRect">
-            <a:avLst>
-              <a:gd name="adj" fmla="val 50000"/>
-            </a:avLst>
-          </a:prstGeom>
-          <a:solidFill>
-            <a:srgbClr val="0076A9">
-              <a:alpha val="15000"/>
-            </a:srgbClr>
-          </a:solidFill>
-          <a:ln w="12700">
-            <a:solidFill>
-              <a:srgbClr val="0076A9"/>
-            </a:solidFill>
-            <a:prstDash val="solid"/>
-          </a:ln>
-        </p:spPr>
-      </p:sp>
-      <p:sp>
-        <p:nvSpPr>
-          <p:cNvPr id="15" name="Text 12"/>
-          <p:cNvSpPr/>
-          <p:nvPr/>
-        </p:nvSpPr>
-        <p:spPr>
-          <a:xfrm>
-            <a:off x="5966460" y="2834640"/>
-            <a:ext cx="960120" cy="256032"/>
-          </a:xfrm>
-          <a:prstGeom prst="rect">
-            <a:avLst/>
-          </a:prstGeom>
-          <a:noFill/>
-          <a:ln/>
-        </p:spPr>
-        <p:txBody>
-          <a:bodyPr wrap="square" lIns="0" tIns="0" rIns="0" bIns="0" rtlCol="0" anchor="ctr"/>
-          <a:lstStyle/>
-          <a:p>
-            <a:pPr algn="ctr" indent="0" marL="0">
-              <a:buNone/>
-            </a:pPr>
-            <a:r>
-              <a:rPr lang="en-US" sz="1000" b="1" dirty="0">
-                <a:solidFill>
-                  <a:srgbClr val="0076A9"/>
-                </a:solidFill>
-                <a:latin typeface="Noto Sans TC Bold" pitchFamily="34" charset="0"/>
-                <a:ea typeface="Noto Sans TC Bold" pitchFamily="34" charset="-122"/>
-                <a:cs typeface="Noto Sans TC Bold" pitchFamily="34" charset="-120"/>
-              </a:rPr>
-              <a:t>AI-HD</a:t>
-            </a:r>
-            <a:endParaRPr lang="en-US" sz="1000" dirty="0"/>
-          </a:p>
-        </p:txBody>
-      </p:sp>
-      <p:sp>
-        <p:nvSpPr>
-          <p:cNvPr id="16" name="Shape 13"/>
-          <p:cNvSpPr/>
-          <p:nvPr/>
-        </p:nvSpPr>
-        <p:spPr>
-          <a:xfrm>
-            <a:off x="5966460" y="3218688"/>
-            <a:ext cx="960120" cy="256032"/>
-          </a:xfrm>
-          <a:prstGeom prst="roundRect">
-            <a:avLst>
-              <a:gd name="adj" fmla="val 50000"/>
-            </a:avLst>
-          </a:prstGeom>
-          <a:solidFill>
-            <a:srgbClr val="0076A9">
-              <a:alpha val="15000"/>
-            </a:srgbClr>
-          </a:solidFill>
-          <a:ln w="12700">
-            <a:solidFill>
-              <a:srgbClr val="0076A9"/>
-            </a:solidFill>
-            <a:prstDash val="solid"/>
-          </a:ln>
-        </p:spPr>
-      </p:sp>
-      <p:sp>
-        <p:nvSpPr>
-          <p:cNvPr id="17" name="Text 14"/>
-          <p:cNvSpPr/>
-          <p:nvPr/>
-        </p:nvSpPr>
-        <p:spPr>
-          <a:xfrm>
-            <a:off x="5966460" y="3218688"/>
-            <a:ext cx="960120" cy="256032"/>
-          </a:xfrm>
-          <a:prstGeom prst="rect">
-            <a:avLst/>
-          </a:prstGeom>
-          <a:noFill/>
-          <a:ln/>
-        </p:spPr>
-        <p:txBody>
-          <a:bodyPr wrap="square" lIns="0" tIns="0" rIns="0" bIns="0" rtlCol="0" anchor="ctr"/>
-          <a:lstStyle/>
-          <a:p>
-            <a:pPr algn="ctr" indent="0" marL="0">
-              <a:buNone/>
-            </a:pPr>
-            <a:r>
-              <a:rPr lang="en-US" sz="1000" b="1" dirty="0">
-                <a:solidFill>
-                  <a:srgbClr val="0076A9"/>
-                </a:solidFill>
-                <a:latin typeface="Noto Sans TC Bold" pitchFamily="34" charset="0"/>
-                <a:ea typeface="Noto Sans TC Bold" pitchFamily="34" charset="-122"/>
-                <a:cs typeface="Noto Sans TC Bold" pitchFamily="34" charset="-120"/>
-              </a:rPr>
-              <a:t>AI-HD</a:t>
-            </a:r>
-            <a:endParaRPr lang="en-US" sz="1000" dirty="0"/>
-          </a:p>
-        </p:txBody>
-      </p:sp>
-      <p:sp>
-        <p:nvSpPr>
-          <p:cNvPr id="18" name="Shape 15"/>
-          <p:cNvSpPr/>
-          <p:nvPr/>
-        </p:nvSpPr>
-        <p:spPr>
-          <a:xfrm>
-            <a:off x="5966460" y="3602736"/>
-            <a:ext cx="960120" cy="256032"/>
-          </a:xfrm>
-          <a:prstGeom prst="roundRect">
-            <a:avLst>
-              <a:gd name="adj" fmla="val 50000"/>
-            </a:avLst>
-          </a:prstGeom>
-          <a:solidFill>
-            <a:srgbClr val="0076A9">
-              <a:alpha val="15000"/>
-            </a:srgbClr>
-          </a:solidFill>
-          <a:ln w="12700">
-            <a:solidFill>
-              <a:srgbClr val="0076A9"/>
-            </a:solidFill>
-            <a:prstDash val="solid"/>
-          </a:ln>
-        </p:spPr>
-      </p:sp>
-      <p:sp>
-        <p:nvSpPr>
-          <p:cNvPr id="19" name="Text 16"/>
-          <p:cNvSpPr/>
-          <p:nvPr/>
-        </p:nvSpPr>
-        <p:spPr>
-          <a:xfrm>
-            <a:off x="5966460" y="3602736"/>
-            <a:ext cx="960120" cy="256032"/>
-          </a:xfrm>
-          <a:prstGeom prst="rect">
-            <a:avLst/>
-          </a:prstGeom>
-          <a:noFill/>
-          <a:ln/>
-        </p:spPr>
-        <p:txBody>
-          <a:bodyPr wrap="square" lIns="0" tIns="0" rIns="0" bIns="0" rtlCol="0" anchor="ctr"/>
-          <a:lstStyle/>
-          <a:p>
-            <a:pPr algn="ctr" indent="0" marL="0">
-              <a:buNone/>
-            </a:pPr>
-            <a:r>
-              <a:rPr lang="en-US" sz="1000" b="1" dirty="0">
-                <a:solidFill>
-                  <a:srgbClr val="0076A9"/>
-                </a:solidFill>
-                <a:latin typeface="Noto Sans TC Bold" pitchFamily="34" charset="0"/>
-                <a:ea typeface="Noto Sans TC Bold" pitchFamily="34" charset="-122"/>
-                <a:cs typeface="Noto Sans TC Bold" pitchFamily="34" charset="-120"/>
-              </a:rPr>
-              <a:t>AI-HD</a:t>
-            </a:r>
-            <a:endParaRPr lang="en-US" sz="1000" dirty="0"/>
-          </a:p>
-        </p:txBody>
-      </p:sp>
-      <p:sp>
-        <p:nvSpPr>
-          <p:cNvPr id="20" name="Shape 17"/>
-          <p:cNvSpPr/>
-          <p:nvPr/>
-        </p:nvSpPr>
-        <p:spPr>
-          <a:xfrm>
-            <a:off x="5966460" y="3986784"/>
-            <a:ext cx="960120" cy="256032"/>
-          </a:xfrm>
-          <a:prstGeom prst="roundRect">
-            <a:avLst>
-              <a:gd name="adj" fmla="val 50000"/>
-            </a:avLst>
-          </a:prstGeom>
-          <a:solidFill>
-            <a:srgbClr val="060E9F">
-              <a:alpha val="15000"/>
-            </a:srgbClr>
-          </a:solidFill>
-          <a:ln w="12700">
-            <a:solidFill>
-              <a:srgbClr val="060E9F"/>
-            </a:solidFill>
-            <a:prstDash val="solid"/>
-          </a:ln>
-        </p:spPr>
-      </p:sp>
-      <p:sp>
-        <p:nvSpPr>
-          <p:cNvPr id="21" name="Text 18"/>
-          <p:cNvSpPr/>
-          <p:nvPr/>
-        </p:nvSpPr>
-        <p:spPr>
-          <a:xfrm>
-            <a:off x="5966460" y="3986784"/>
-            <a:ext cx="960120" cy="256032"/>
-          </a:xfrm>
-          <a:prstGeom prst="rect">
-            <a:avLst/>
-          </a:prstGeom>
-          <a:noFill/>
-          <a:ln/>
-        </p:spPr>
-        <p:txBody>
-          <a:bodyPr wrap="square" lIns="0" tIns="0" rIns="0" bIns="0" rtlCol="0" anchor="ctr"/>
-          <a:lstStyle/>
-          <a:p>
-            <a:pPr algn="ctr" indent="0" marL="0">
-              <a:buNone/>
-            </a:pPr>
-            <a:r>
-              <a:rPr lang="en-US" sz="1000" b="1" dirty="0">
-                <a:solidFill>
-                  <a:srgbClr val="060E9F"/>
-                </a:solidFill>
-                <a:latin typeface="Noto Sans TC Bold" pitchFamily="34" charset="0"/>
-                <a:ea typeface="Noto Sans TC Bold" pitchFamily="34" charset="-122"/>
-                <a:cs typeface="Noto Sans TC Bold" pitchFamily="34" charset="-120"/>
-              </a:rPr>
-              <a:t>AI-4</a:t>
-            </a:r>
-            <a:endParaRPr lang="en-US" sz="1000" dirty="0"/>
-          </a:p>
-        </p:txBody>
-      </p:sp>
-      <p:sp>
-        <p:nvSpPr>
-          <p:cNvPr id="22" name="Shape 19"/>
-          <p:cNvSpPr/>
-          <p:nvPr/>
-        </p:nvSpPr>
-        <p:spPr>
-          <a:xfrm>
-            <a:off x="7315200" y="3986784"/>
-            <a:ext cx="1188720" cy="256032"/>
-          </a:xfrm>
-          <a:prstGeom prst="roundRect">
-            <a:avLst>
-              <a:gd name="adj" fmla="val 50000"/>
-            </a:avLst>
-          </a:prstGeom>
-          <a:solidFill>
-            <a:srgbClr val="FFFFFF"/>
-          </a:solidFill>
-          <a:ln w="12700">
-            <a:solidFill>
-              <a:srgbClr val="060E9F"/>
-            </a:solidFill>
-            <a:prstDash val="solid"/>
-          </a:ln>
-        </p:spPr>
-      </p:sp>
-      <p:pic>
-        <p:nvPicPr>
-          <p:cNvPr id="23" name="Image 0" descr="D:\info\0507_Weekly-Report\Operations-Weekly-Report\automation\icons\key_blue.png">    </p:cNvPr>
-          <p:cNvPicPr>
-            <a:picLocks noChangeAspect="1"/>
-          </p:cNvPicPr>
-          <p:nvPr/>
-        </p:nvPicPr>
-        <p:blipFill>
-          <a:blip r:embed="rId1"/>
-          <a:stretch>
-            <a:fillRect/>
-          </a:stretch>
-        </p:blipFill>
-        <p:spPr>
-          <a:xfrm>
-            <a:off x="7443216" y="4041648"/>
-            <a:ext cx="146304" cy="146304"/>
-          </a:xfrm>
-          <a:prstGeom prst="rect">
-            <a:avLst/>
-          </a:prstGeom>
-        </p:spPr>
-      </p:pic>
-      <p:sp>
-        <p:nvSpPr>
-          <p:cNvPr id="24" name="Text 20"/>
-          <p:cNvSpPr/>
-          <p:nvPr/>
-        </p:nvSpPr>
-        <p:spPr>
-          <a:xfrm>
-            <a:off x="7607808" y="3986784"/>
-            <a:ext cx="822960" cy="256032"/>
-          </a:xfrm>
-          <a:prstGeom prst="rect">
-            <a:avLst/>
-          </a:prstGeom>
-          <a:noFill/>
-          <a:ln/>
-        </p:spPr>
-        <p:txBody>
-          <a:bodyPr wrap="square" lIns="0" tIns="0" rIns="0" bIns="0" rtlCol="0" anchor="ctr"/>
-          <a:lstStyle/>
-          <a:p>
-            <a:pPr algn="l" indent="0" marL="0">
-              <a:buNone/>
-            </a:pPr>
-            <a:r>
-              <a:rPr lang="en-US" sz="1000" b="1" dirty="0">
-                <a:solidFill>
-                  <a:srgbClr val="060E9F"/>
-                </a:solidFill>
-                <a:latin typeface="Noto Sans TC Bold" pitchFamily="34" charset="0"/>
-                <a:ea typeface="Noto Sans TC Bold" pitchFamily="34" charset="-122"/>
-                <a:cs typeface="Noto Sans TC Bold" pitchFamily="34" charset="-120"/>
-              </a:rPr>
-              <a:t>租賃</a:t>
-            </a:r>
-            <a:endParaRPr lang="en-US" sz="1000" dirty="0"/>
-          </a:p>
-        </p:txBody>
-      </p:sp>
-      <p:sp>
-        <p:nvSpPr>
-          <p:cNvPr id="25" name="Shape 21"/>
-          <p:cNvSpPr/>
-          <p:nvPr/>
-        </p:nvSpPr>
-        <p:spPr>
-          <a:xfrm>
-            <a:off x="5966460" y="4370832"/>
-            <a:ext cx="960120" cy="256032"/>
-          </a:xfrm>
-          <a:prstGeom prst="roundRect">
-            <a:avLst>
-              <a:gd name="adj" fmla="val 50000"/>
-            </a:avLst>
-          </a:prstGeom>
-          <a:solidFill>
-            <a:srgbClr val="FF5000">
-              <a:alpha val="15000"/>
-            </a:srgbClr>
-          </a:solidFill>
-          <a:ln w="12700">
-            <a:solidFill>
-              <a:srgbClr val="FF5000"/>
-            </a:solidFill>
-            <a:prstDash val="solid"/>
-          </a:ln>
-        </p:spPr>
-      </p:sp>
-      <p:sp>
-        <p:nvSpPr>
-          <p:cNvPr id="26" name="Text 22"/>
-          <p:cNvSpPr/>
-          <p:nvPr/>
-        </p:nvSpPr>
-        <p:spPr>
-          <a:xfrm>
-            <a:off x="5966460" y="4370832"/>
-            <a:ext cx="960120" cy="256032"/>
-          </a:xfrm>
-          <a:prstGeom prst="rect">
-            <a:avLst/>
-          </a:prstGeom>
-          <a:noFill/>
-          <a:ln/>
-        </p:spPr>
-        <p:txBody>
-          <a:bodyPr wrap="square" lIns="0" tIns="0" rIns="0" bIns="0" rtlCol="0" anchor="ctr"/>
-          <a:lstStyle/>
-          <a:p>
-            <a:pPr algn="ctr" indent="0" marL="0">
-              <a:buNone/>
-            </a:pPr>
-            <a:r>
-              <a:rPr lang="en-US" sz="1000" b="1" dirty="0">
-                <a:solidFill>
-                  <a:srgbClr val="FF5000"/>
-                </a:solidFill>
-                <a:latin typeface="Noto Sans TC Bold" pitchFamily="34" charset="0"/>
-                <a:ea typeface="Noto Sans TC Bold" pitchFamily="34" charset="-122"/>
-                <a:cs typeface="Noto Sans TC Bold" pitchFamily="34" charset="-120"/>
-              </a:rPr>
-              <a:t>H30</a:t>
-            </a:r>
-            <a:endParaRPr lang="en-US" sz="1000" dirty="0"/>
-          </a:p>
-        </p:txBody>
-      </p:sp>
-      <p:sp>
-        <p:nvSpPr>
-          <p:cNvPr id="27" name="Shape 23"/>
-          <p:cNvSpPr/>
-          <p:nvPr/>
-        </p:nvSpPr>
-        <p:spPr>
-          <a:xfrm>
-            <a:off x="5966460" y="4754880"/>
-            <a:ext cx="960120" cy="256032"/>
-          </a:xfrm>
-          <a:prstGeom prst="roundRect">
-            <a:avLst>
-              <a:gd name="adj" fmla="val 50000"/>
-            </a:avLst>
-          </a:prstGeom>
-          <a:solidFill>
-            <a:srgbClr val="FF5000">
-              <a:alpha val="15000"/>
-            </a:srgbClr>
-          </a:solidFill>
-          <a:ln w="12700">
-            <a:solidFill>
-              <a:srgbClr val="FF5000"/>
-            </a:solidFill>
-            <a:prstDash val="solid"/>
-          </a:ln>
-        </p:spPr>
-      </p:sp>
-      <p:sp>
-        <p:nvSpPr>
-          <p:cNvPr id="28" name="Text 24"/>
-          <p:cNvSpPr/>
-          <p:nvPr/>
-        </p:nvSpPr>
-        <p:spPr>
-          <a:xfrm>
-            <a:off x="5966460" y="4754880"/>
-            <a:ext cx="960120" cy="256032"/>
-          </a:xfrm>
-          <a:prstGeom prst="rect">
-            <a:avLst/>
-          </a:prstGeom>
-          <a:noFill/>
-          <a:ln/>
-        </p:spPr>
-        <p:txBody>
-          <a:bodyPr wrap="square" lIns="0" tIns="0" rIns="0" bIns="0" rtlCol="0" anchor="ctr"/>
-          <a:lstStyle/>
-          <a:p>
-            <a:pPr algn="ctr" indent="0" marL="0">
-              <a:buNone/>
-            </a:pPr>
-            <a:r>
-              <a:rPr lang="en-US" sz="1000" b="1" dirty="0">
-                <a:solidFill>
-                  <a:srgbClr val="FF5000"/>
-                </a:solidFill>
-                <a:latin typeface="Noto Sans TC Bold" pitchFamily="34" charset="0"/>
-                <a:ea typeface="Noto Sans TC Bold" pitchFamily="34" charset="-122"/>
-                <a:cs typeface="Noto Sans TC Bold" pitchFamily="34" charset="-120"/>
-              </a:rPr>
-              <a:t>H30</a:t>
-            </a:r>
-            <a:endParaRPr lang="en-US" sz="1000" dirty="0"/>
-          </a:p>
-        </p:txBody>
-      </p:sp>
-      <p:sp>
-        <p:nvSpPr>
-          <p:cNvPr id="29" name="Shape 25"/>
+          <p:cNvPr id="35" name="Shape 29"/>
           <p:cNvSpPr/>
           <p:nvPr/>
         </p:nvSpPr>
@@ -14036,7 +14216,7 @@
       </p:sp>
       <p:sp>
         <p:nvSpPr>
-          <p:cNvPr id="30" name="Text 26"/>
+          <p:cNvPr id="36" name="Text 30"/>
           <p:cNvSpPr/>
           <p:nvPr/>
         </p:nvSpPr>
@@ -14075,7 +14255,7 @@
       </p:sp>
       <p:sp>
         <p:nvSpPr>
-          <p:cNvPr id="31" name="Text 27"/>
+          <p:cNvPr id="37" name="Text 31"/>
           <p:cNvSpPr/>
           <p:nvPr/>
         </p:nvSpPr>
@@ -14114,7 +14294,7 @@
       </p:sp>
       <p:sp>
         <p:nvSpPr>
-          <p:cNvPr id="32" name="Shape 28"/>
+          <p:cNvPr id="38" name="Shape 32"/>
           <p:cNvSpPr/>
           <p:nvPr/>
         </p:nvSpPr>
@@ -14143,7 +14323,7 @@
       </p:sp>
       <p:sp>
         <p:nvSpPr>
-          <p:cNvPr id="33" name="Text 29"/>
+          <p:cNvPr id="39" name="Text 33"/>
           <p:cNvSpPr/>
           <p:nvPr/>
         </p:nvSpPr>
@@ -14182,7 +14362,7 @@
       </p:sp>
       <p:sp>
         <p:nvSpPr>
-          <p:cNvPr id="34" name="Text 30"/>
+          <p:cNvPr id="40" name="Text 34"/>
           <p:cNvSpPr/>
           <p:nvPr/>
         </p:nvSpPr>
@@ -14221,7 +14401,7 @@
       </p:sp>
       <p:sp>
         <p:nvSpPr>
-          <p:cNvPr id="35" name="Shape 31"/>
+          <p:cNvPr id="41" name="Shape 35"/>
           <p:cNvSpPr/>
           <p:nvPr/>
         </p:nvSpPr>
@@ -14250,7 +14430,7 @@
       </p:sp>
       <p:sp>
         <p:nvSpPr>
-          <p:cNvPr id="36" name="Text 32"/>
+          <p:cNvPr id="42" name="Text 36"/>
           <p:cNvSpPr/>
           <p:nvPr/>
         </p:nvSpPr>
@@ -14289,7 +14469,7 @@
       </p:sp>
       <p:sp>
         <p:nvSpPr>
-          <p:cNvPr id="37" name="Text 33"/>
+          <p:cNvPr id="43" name="Text 37"/>
           <p:cNvSpPr/>
           <p:nvPr/>
         </p:nvSpPr>
@@ -14328,7 +14508,7 @@
       </p:sp>
       <p:sp>
         <p:nvSpPr>
-          <p:cNvPr id="38" name="Shape 34"/>
+          <p:cNvPr id="44" name="Shape 38"/>
           <p:cNvSpPr/>
           <p:nvPr/>
         </p:nvSpPr>
@@ -14357,7 +14537,7 @@
       </p:sp>
       <p:sp>
         <p:nvSpPr>
-          <p:cNvPr id="39" name="Text 35"/>
+          <p:cNvPr id="45" name="Text 39"/>
           <p:cNvSpPr/>
           <p:nvPr/>
         </p:nvSpPr>
@@ -14396,7 +14576,7 @@
       </p:sp>
       <p:sp>
         <p:nvSpPr>
-          <p:cNvPr id="40" name="Text 36"/>
+          <p:cNvPr id="46" name="Text 40"/>
           <p:cNvSpPr/>
           <p:nvPr/>
         </p:nvSpPr>
@@ -14435,7 +14615,7 @@
       </p:sp>
       <p:sp>
         <p:nvSpPr>
-          <p:cNvPr id="41" name="Shape 37"/>
+          <p:cNvPr id="47" name="Shape 41"/>
           <p:cNvSpPr/>
           <p:nvPr/>
         </p:nvSpPr>
@@ -14464,7 +14644,7 @@
       </p:sp>
       <p:sp>
         <p:nvSpPr>
-          <p:cNvPr id="42" name="Text 38"/>
+          <p:cNvPr id="48" name="Text 42"/>
           <p:cNvSpPr/>
           <p:nvPr/>
         </p:nvSpPr>
@@ -14503,7 +14683,7 @@
       </p:sp>
       <p:sp>
         <p:nvSpPr>
-          <p:cNvPr id="43" name="Text 39"/>
+          <p:cNvPr id="49" name="Text 43"/>
           <p:cNvSpPr/>
           <p:nvPr/>
         </p:nvSpPr>
@@ -14542,7 +14722,7 @@
       </p:sp>
       <p:sp>
         <p:nvSpPr>
-          <p:cNvPr id="44" name="Shape 40"/>
+          <p:cNvPr id="50" name="Shape 44"/>
           <p:cNvSpPr/>
           <p:nvPr/>
         </p:nvSpPr>
@@ -14571,7 +14751,7 @@
       </p:sp>
       <p:sp>
         <p:nvSpPr>
-          <p:cNvPr id="45" name="Text 41"/>
+          <p:cNvPr id="51" name="Text 45"/>
           <p:cNvSpPr/>
           <p:nvPr/>
         </p:nvSpPr>
@@ -14610,7 +14790,7 @@
       </p:sp>
       <p:sp>
         <p:nvSpPr>
-          <p:cNvPr id="46" name="Text 42"/>
+          <p:cNvPr id="52" name="Text 46"/>
           <p:cNvSpPr/>
           <p:nvPr/>
         </p:nvSpPr>
@@ -14649,7 +14829,7 @@
       </p:sp>
       <p:sp>
         <p:nvSpPr>
-          <p:cNvPr id="47" name="Shape 43"/>
+          <p:cNvPr id="53" name="Shape 47"/>
           <p:cNvSpPr/>
           <p:nvPr/>
         </p:nvSpPr>
@@ -14678,7 +14858,7 @@
       </p:sp>
       <p:sp>
         <p:nvSpPr>
-          <p:cNvPr id="48" name="Text 44"/>
+          <p:cNvPr id="54" name="Text 48"/>
           <p:cNvSpPr/>
           <p:nvPr/>
         </p:nvSpPr>
@@ -14717,7 +14897,7 @@
       </p:sp>
       <p:sp>
         <p:nvSpPr>
-          <p:cNvPr id="49" name="Text 45"/>
+          <p:cNvPr id="55" name="Text 49"/>
           <p:cNvSpPr/>
           <p:nvPr/>
         </p:nvSpPr>
@@ -14756,7 +14936,7 @@
       </p:sp>
       <p:sp>
         <p:nvSpPr>
-          <p:cNvPr id="50" name="Shape 46"/>
+          <p:cNvPr id="56" name="Shape 50"/>
           <p:cNvSpPr/>
           <p:nvPr/>
         </p:nvSpPr>
@@ -14785,7 +14965,7 @@
       </p:sp>
       <p:sp>
         <p:nvSpPr>
-          <p:cNvPr id="51" name="Text 47"/>
+          <p:cNvPr id="57" name="Text 51"/>
           <p:cNvSpPr/>
           <p:nvPr/>
         </p:nvSpPr>
@@ -14824,7 +15004,7 @@
       </p:sp>
       <p:sp>
         <p:nvSpPr>
-          <p:cNvPr id="52" name="Text 48"/>
+          <p:cNvPr id="58" name="Text 52"/>
           <p:cNvSpPr/>
           <p:nvPr/>
         </p:nvSpPr>
@@ -14863,7 +15043,7 @@
       </p:sp>
       <p:sp>
         <p:nvSpPr>
-          <p:cNvPr id="53" name="Shape 49"/>
+          <p:cNvPr id="59" name="Shape 53"/>
           <p:cNvSpPr/>
           <p:nvPr/>
         </p:nvSpPr>
@@ -14892,7 +15072,7 @@
       </p:sp>
       <p:sp>
         <p:nvSpPr>
-          <p:cNvPr id="54" name="Text 50"/>
+          <p:cNvPr id="60" name="Text 54"/>
           <p:cNvSpPr/>
           <p:nvPr/>
         </p:nvSpPr>
@@ -14931,7 +15111,7 @@
       </p:sp>
       <p:sp>
         <p:nvSpPr>
-          <p:cNvPr id="55" name="Text 51"/>
+          <p:cNvPr id="61" name="Text 55"/>
           <p:cNvSpPr/>
           <p:nvPr/>
         </p:nvSpPr>

--- a/automation/ecoco_客服週報_第35週_0824~0830.pptx
+++ b/automation/ecoco_客服週報_第35週_0824~0830.pptx
@@ -6733,7 +6733,7 @@
                 <a:ea typeface="Noto Sans TC Medium" pitchFamily="34" charset="-122"/>
                 <a:cs typeface="Noto Sans TC Medium" pitchFamily="34" charset="-120"/>
               </a:rPr>
-              <a:t>最高回報站點：D｜臺南/迷客夏臺南華平店站（4件）</a:t>
+              <a:t>最高回報站點：E｜臺南/迷客夏臺南華平店站（4件）</a:t>
             </a:r>
             <a:endParaRPr lang="en-US" sz="1050" dirty="0"/>
           </a:p>
@@ -9191,7 +9191,7 @@
                           <a:ea typeface="Noto Sans TC Medium" pitchFamily="34" charset="-122"/>
                           <a:cs typeface="Noto Sans TC Medium" pitchFamily="34" charset="-120"/>
                         </a:rPr>
-                        <a:t>第 531 名</a:t>
+                        <a:t>第 513 名</a:t>
                       </a:r>
                       <a:endParaRPr lang="en-US" sz="1050" dirty="0">
                         <a:latin typeface="Noto Sans TC Medium" charset="0"/>
@@ -9259,7 +9259,7 @@
                           <a:ea typeface="Noto Sans TC Medium" pitchFamily="34" charset="-122"/>
                           <a:cs typeface="Noto Sans TC Medium" pitchFamily="34" charset="-120"/>
                         </a:rPr>
-                        <a:t>新北</a:t>
+                        <a:t>高雄</a:t>
                       </a:r>
                       <a:endParaRPr lang="en-US" sz="1100" dirty="0">
                         <a:latin typeface="Noto Sans TC Medium" charset="0"/>
@@ -9327,7 +9327,7 @@
                           <a:ea typeface="Noto Sans TC Bold" pitchFamily="34" charset="-122"/>
                           <a:cs typeface="Noto Sans TC Bold" pitchFamily="34" charset="-120"/>
                         </a:rPr>
-                        <a:t>南山高中大中一樓站</a:t>
+                        <a:t>全聯福利中心三民十全三店站</a:t>
                       </a:r>
                       <a:endParaRPr lang="en-US" sz="1100" dirty="0">
                         <a:latin typeface="Noto Sans TC Bold" charset="0"/>
@@ -9501,7 +9501,7 @@
                           <a:ea typeface="Noto Sans TC Bold" pitchFamily="34" charset="-122"/>
                           <a:cs typeface="Noto Sans TC Bold" pitchFamily="34" charset="-120"/>
                         </a:rPr>
-                        <a:t>0</a:t>
+                        <a:t>112</a:t>
                       </a:r>
                       <a:endParaRPr lang="en-US" sz="1200" dirty="0">
                         <a:latin typeface="Noto Sans TC Bold" charset="0"/>
@@ -9707,7 +9707,7 @@
                           <a:ea typeface="Noto Sans TC Medium" pitchFamily="34" charset="-122"/>
                           <a:cs typeface="Noto Sans TC Medium" pitchFamily="34" charset="-120"/>
                         </a:rPr>
-                        <a:t>第 530 名</a:t>
+                        <a:t>第 512 名</a:t>
                       </a:r>
                       <a:endParaRPr lang="en-US" sz="1050" dirty="0">
                         <a:latin typeface="Noto Sans TC Medium" charset="0"/>
@@ -9775,7 +9775,7 @@
                           <a:ea typeface="Noto Sans TC Medium" pitchFamily="34" charset="-122"/>
                           <a:cs typeface="Noto Sans TC Medium" pitchFamily="34" charset="-120"/>
                         </a:rPr>
-                        <a:t>新北</a:t>
+                        <a:t>高雄</a:t>
                       </a:r>
                       <a:endParaRPr lang="en-US" sz="1100" dirty="0">
                         <a:latin typeface="Noto Sans TC Medium" charset="0"/>
@@ -9843,7 +9843,7 @@
                           <a:ea typeface="Noto Sans TC Bold" pitchFamily="34" charset="-122"/>
                           <a:cs typeface="Noto Sans TC Bold" pitchFamily="34" charset="-120"/>
                         </a:rPr>
-                        <a:t>衛生福利部雙和醫院第一醫療大樓站</a:t>
+                        <a:t>全聯福利中心小港宏平店站</a:t>
                       </a:r>
                       <a:endParaRPr lang="en-US" sz="1100" dirty="0">
                         <a:latin typeface="Noto Sans TC Bold" charset="0"/>
@@ -10017,7 +10017,7 @@
                           <a:ea typeface="Noto Sans TC Bold" pitchFamily="34" charset="-122"/>
                           <a:cs typeface="Noto Sans TC Bold" pitchFamily="34" charset="-120"/>
                         </a:rPr>
-                        <a:t>0</a:t>
+                        <a:t>823</a:t>
                       </a:r>
                       <a:endParaRPr lang="en-US" sz="1200" dirty="0">
                         <a:latin typeface="Noto Sans TC Bold" charset="0"/>
@@ -10223,7 +10223,1039 @@
                           <a:ea typeface="Noto Sans TC Medium" pitchFamily="34" charset="-122"/>
                           <a:cs typeface="Noto Sans TC Medium" pitchFamily="34" charset="-120"/>
                         </a:rPr>
-                        <a:t>第 513 名</a:t>
+                        <a:t>第 511 名</a:t>
+                      </a:r>
+                      <a:endParaRPr lang="en-US" sz="1050" dirty="0">
+                        <a:latin typeface="Noto Sans TC Medium" charset="0"/>
+                        <a:ea typeface="Noto Sans TC Medium" charset="0"/>
+                        <a:cs typeface="Noto Sans TC Medium" charset="0"/>
+                      </a:endParaRPr>
+                    </a:p>
+                  </a:txBody>
+                  <a:tcPr marL="91440" marR="91440" marT="45720" marB="45720" anchor="ctr">
+                    <a:lnL w="6350" cap="flat" cmpd="sng" algn="ctr">
+                      <a:solidFill>
+                        <a:srgbClr val="E5E5E5"/>
+                      </a:solidFill>
+                      <a:prstDash val="solid"/>
+                      <a:round/>
+                      <a:headEnd type="none" w="med" len="med"/>
+                      <a:tailEnd type="none" w="med" len="med"/>
+                    </a:lnL>
+                    <a:lnR w="6350" cap="flat" cmpd="sng" algn="ctr">
+                      <a:solidFill>
+                        <a:srgbClr val="E5E5E5"/>
+                      </a:solidFill>
+                      <a:prstDash val="solid"/>
+                      <a:round/>
+                      <a:headEnd type="none" w="med" len="med"/>
+                      <a:tailEnd type="none" w="med" len="med"/>
+                    </a:lnR>
+                    <a:lnT w="6350" cap="flat" cmpd="sng" algn="ctr">
+                      <a:solidFill>
+                        <a:srgbClr val="E5E5E5"/>
+                      </a:solidFill>
+                      <a:prstDash val="solid"/>
+                      <a:round/>
+                      <a:headEnd type="none" w="med" len="med"/>
+                      <a:tailEnd type="none" w="med" len="med"/>
+                    </a:lnT>
+                    <a:lnB w="6350" cap="flat" cmpd="sng" algn="ctr">
+                      <a:solidFill>
+                        <a:srgbClr val="E5E5E5"/>
+                      </a:solidFill>
+                      <a:prstDash val="solid"/>
+                      <a:round/>
+                      <a:headEnd type="none" w="med" len="med"/>
+                      <a:tailEnd type="none" w="med" len="med"/>
+                    </a:lnB>
+                    <a:solidFill>
+                      <a:srgbClr val="FFFFFF"/>
+                    </a:solidFill>
+                  </a:tcPr>
+                </a:tc>
+                <a:tc>
+                  <a:txBody>
+                    <a:bodyPr/>
+                    <a:lstStyle/>
+                    <a:p>
+                      <a:pPr algn="ctr" indent="0" marL="0">
+                        <a:buNone/>
+                      </a:pPr>
+                      <a:r>
+                        <a:rPr lang="en-US" sz="1100" dirty="0">
+                          <a:solidFill>
+                            <a:srgbClr val="333333"/>
+                          </a:solidFill>
+                          <a:latin typeface="Noto Sans TC Medium" pitchFamily="34" charset="0"/>
+                          <a:ea typeface="Noto Sans TC Medium" pitchFamily="34" charset="-122"/>
+                          <a:cs typeface="Noto Sans TC Medium" pitchFamily="34" charset="-120"/>
+                        </a:rPr>
+                        <a:t>屏東</a:t>
+                      </a:r>
+                      <a:endParaRPr lang="en-US" sz="1100" dirty="0">
+                        <a:latin typeface="Noto Sans TC Medium" charset="0"/>
+                        <a:ea typeface="Noto Sans TC Medium" charset="0"/>
+                        <a:cs typeface="Noto Sans TC Medium" charset="0"/>
+                      </a:endParaRPr>
+                    </a:p>
+                  </a:txBody>
+                  <a:tcPr marL="91440" marR="91440" marT="45720" marB="45720" anchor="ctr">
+                    <a:lnL w="6350" cap="flat" cmpd="sng" algn="ctr">
+                      <a:solidFill>
+                        <a:srgbClr val="E5E5E5"/>
+                      </a:solidFill>
+                      <a:prstDash val="solid"/>
+                      <a:round/>
+                      <a:headEnd type="none" w="med" len="med"/>
+                      <a:tailEnd type="none" w="med" len="med"/>
+                    </a:lnL>
+                    <a:lnR w="6350" cap="flat" cmpd="sng" algn="ctr">
+                      <a:solidFill>
+                        <a:srgbClr val="E5E5E5"/>
+                      </a:solidFill>
+                      <a:prstDash val="solid"/>
+                      <a:round/>
+                      <a:headEnd type="none" w="med" len="med"/>
+                      <a:tailEnd type="none" w="med" len="med"/>
+                    </a:lnR>
+                    <a:lnT w="6350" cap="flat" cmpd="sng" algn="ctr">
+                      <a:solidFill>
+                        <a:srgbClr val="E5E5E5"/>
+                      </a:solidFill>
+                      <a:prstDash val="solid"/>
+                      <a:round/>
+                      <a:headEnd type="none" w="med" len="med"/>
+                      <a:tailEnd type="none" w="med" len="med"/>
+                    </a:lnT>
+                    <a:lnB w="6350" cap="flat" cmpd="sng" algn="ctr">
+                      <a:solidFill>
+                        <a:srgbClr val="E5E5E5"/>
+                      </a:solidFill>
+                      <a:prstDash val="solid"/>
+                      <a:round/>
+                      <a:headEnd type="none" w="med" len="med"/>
+                      <a:tailEnd type="none" w="med" len="med"/>
+                    </a:lnB>
+                    <a:solidFill>
+                      <a:srgbClr val="FFFFFF"/>
+                    </a:solidFill>
+                  </a:tcPr>
+                </a:tc>
+                <a:tc>
+                  <a:txBody>
+                    <a:bodyPr/>
+                    <a:lstStyle/>
+                    <a:p>
+                      <a:pPr algn="l" indent="0" marL="0">
+                        <a:buNone/>
+                      </a:pPr>
+                      <a:r>
+                        <a:rPr lang="en-US" sz="1100" b="1" dirty="0">
+                          <a:solidFill>
+                            <a:srgbClr val="333333"/>
+                          </a:solidFill>
+                          <a:latin typeface="Noto Sans TC Bold" pitchFamily="34" charset="0"/>
+                          <a:ea typeface="Noto Sans TC Bold" pitchFamily="34" charset="-122"/>
+                          <a:cs typeface="Noto Sans TC Bold" pitchFamily="34" charset="-120"/>
+                        </a:rPr>
+                        <a:t>全聯福利中心屏東瑞民店站</a:t>
+                      </a:r>
+                      <a:endParaRPr lang="en-US" sz="1100" dirty="0">
+                        <a:latin typeface="Noto Sans TC Bold" charset="0"/>
+                        <a:ea typeface="Noto Sans TC Bold" charset="0"/>
+                        <a:cs typeface="Noto Sans TC Bold" charset="0"/>
+                      </a:endParaRPr>
+                    </a:p>
+                  </a:txBody>
+                  <a:tcPr marL="91440" marR="91440" marT="45720" marB="45720" anchor="ctr">
+                    <a:lnL w="6350" cap="flat" cmpd="sng" algn="ctr">
+                      <a:solidFill>
+                        <a:srgbClr val="E5E5E5"/>
+                      </a:solidFill>
+                      <a:prstDash val="solid"/>
+                      <a:round/>
+                      <a:headEnd type="none" w="med" len="med"/>
+                      <a:tailEnd type="none" w="med" len="med"/>
+                    </a:lnL>
+                    <a:lnR w="6350" cap="flat" cmpd="sng" algn="ctr">
+                      <a:solidFill>
+                        <a:srgbClr val="E5E5E5"/>
+                      </a:solidFill>
+                      <a:prstDash val="solid"/>
+                      <a:round/>
+                      <a:headEnd type="none" w="med" len="med"/>
+                      <a:tailEnd type="none" w="med" len="med"/>
+                    </a:lnR>
+                    <a:lnT w="6350" cap="flat" cmpd="sng" algn="ctr">
+                      <a:solidFill>
+                        <a:srgbClr val="E5E5E5"/>
+                      </a:solidFill>
+                      <a:prstDash val="solid"/>
+                      <a:round/>
+                      <a:headEnd type="none" w="med" len="med"/>
+                      <a:tailEnd type="none" w="med" len="med"/>
+                    </a:lnT>
+                    <a:lnB w="6350" cap="flat" cmpd="sng" algn="ctr">
+                      <a:solidFill>
+                        <a:srgbClr val="E5E5E5"/>
+                      </a:solidFill>
+                      <a:prstDash val="solid"/>
+                      <a:round/>
+                      <a:headEnd type="none" w="med" len="med"/>
+                      <a:tailEnd type="none" w="med" len="med"/>
+                    </a:lnB>
+                    <a:solidFill>
+                      <a:srgbClr val="FFFFFF"/>
+                    </a:solidFill>
+                  </a:tcPr>
+                </a:tc>
+                <a:tc>
+                  <a:txBody>
+                    <a:bodyPr/>
+                    <a:lstStyle/>
+                    <a:p>
+                      <a:pPr indent="0" marL="0">
+                        <a:buNone/>
+                      </a:pPr>
+                      <a:endParaRPr lang="en-US" sz="1200" dirty="0"/>
+                    </a:p>
+                  </a:txBody>
+                  <a:tcPr marL="91440" marR="91440" marT="45720" marB="45720">
+                    <a:lnL w="6350" cap="flat" cmpd="sng" algn="ctr">
+                      <a:solidFill>
+                        <a:srgbClr val="E5E5E5"/>
+                      </a:solidFill>
+                      <a:prstDash val="solid"/>
+                      <a:round/>
+                      <a:headEnd type="none" w="med" len="med"/>
+                      <a:tailEnd type="none" w="med" len="med"/>
+                    </a:lnL>
+                    <a:lnR w="6350" cap="flat" cmpd="sng" algn="ctr">
+                      <a:solidFill>
+                        <a:srgbClr val="E5E5E5"/>
+                      </a:solidFill>
+                      <a:prstDash val="solid"/>
+                      <a:round/>
+                      <a:headEnd type="none" w="med" len="med"/>
+                      <a:tailEnd type="none" w="med" len="med"/>
+                    </a:lnR>
+                    <a:lnT w="6350" cap="flat" cmpd="sng" algn="ctr">
+                      <a:solidFill>
+                        <a:srgbClr val="E5E5E5"/>
+                      </a:solidFill>
+                      <a:prstDash val="solid"/>
+                      <a:round/>
+                      <a:headEnd type="none" w="med" len="med"/>
+                      <a:tailEnd type="none" w="med" len="med"/>
+                    </a:lnT>
+                    <a:lnB w="6350" cap="flat" cmpd="sng" algn="ctr">
+                      <a:solidFill>
+                        <a:srgbClr val="E5E5E5"/>
+                      </a:solidFill>
+                      <a:prstDash val="solid"/>
+                      <a:round/>
+                      <a:headEnd type="none" w="med" len="med"/>
+                      <a:tailEnd type="none" w="med" len="med"/>
+                    </a:lnB>
+                    <a:solidFill>
+                      <a:srgbClr val="FFFFFF"/>
+                    </a:solidFill>
+                  </a:tcPr>
+                </a:tc>
+                <a:tc>
+                  <a:txBody>
+                    <a:bodyPr/>
+                    <a:lstStyle/>
+                    <a:p>
+                      <a:pPr indent="0" marL="0">
+                        <a:buNone/>
+                      </a:pPr>
+                      <a:endParaRPr lang="en-US" sz="1200" dirty="0"/>
+                    </a:p>
+                  </a:txBody>
+                  <a:tcPr marL="91440" marR="91440" marT="45720" marB="45720">
+                    <a:lnL w="6350" cap="flat" cmpd="sng" algn="ctr">
+                      <a:solidFill>
+                        <a:srgbClr val="E5E5E5"/>
+                      </a:solidFill>
+                      <a:prstDash val="solid"/>
+                      <a:round/>
+                      <a:headEnd type="none" w="med" len="med"/>
+                      <a:tailEnd type="none" w="med" len="med"/>
+                    </a:lnL>
+                    <a:lnR w="6350" cap="flat" cmpd="sng" algn="ctr">
+                      <a:solidFill>
+                        <a:srgbClr val="E5E5E5"/>
+                      </a:solidFill>
+                      <a:prstDash val="solid"/>
+                      <a:round/>
+                      <a:headEnd type="none" w="med" len="med"/>
+                      <a:tailEnd type="none" w="med" len="med"/>
+                    </a:lnR>
+                    <a:lnT w="6350" cap="flat" cmpd="sng" algn="ctr">
+                      <a:solidFill>
+                        <a:srgbClr val="E5E5E5"/>
+                      </a:solidFill>
+                      <a:prstDash val="solid"/>
+                      <a:round/>
+                      <a:headEnd type="none" w="med" len="med"/>
+                      <a:tailEnd type="none" w="med" len="med"/>
+                    </a:lnT>
+                    <a:lnB w="6350" cap="flat" cmpd="sng" algn="ctr">
+                      <a:solidFill>
+                        <a:srgbClr val="E5E5E5"/>
+                      </a:solidFill>
+                      <a:prstDash val="solid"/>
+                      <a:round/>
+                      <a:headEnd type="none" w="med" len="med"/>
+                      <a:tailEnd type="none" w="med" len="med"/>
+                    </a:lnB>
+                    <a:solidFill>
+                      <a:srgbClr val="FFFFFF"/>
+                    </a:solidFill>
+                  </a:tcPr>
+                </a:tc>
+                <a:tc>
+                  <a:txBody>
+                    <a:bodyPr/>
+                    <a:lstStyle/>
+                    <a:p>
+                      <a:pPr algn="ctr" indent="0" marL="0">
+                        <a:buNone/>
+                      </a:pPr>
+                      <a:r>
+                        <a:rPr lang="en-US" sz="1200" b="1" dirty="0">
+                          <a:solidFill>
+                            <a:srgbClr val="0076A9"/>
+                          </a:solidFill>
+                          <a:latin typeface="Noto Sans TC Bold" pitchFamily="34" charset="0"/>
+                          <a:ea typeface="Noto Sans TC Bold" pitchFamily="34" charset="-122"/>
+                          <a:cs typeface="Noto Sans TC Bold" pitchFamily="34" charset="-120"/>
+                        </a:rPr>
+                        <a:t>1,075</a:t>
+                      </a:r>
+                      <a:endParaRPr lang="en-US" sz="1200" dirty="0">
+                        <a:latin typeface="Noto Sans TC Bold" charset="0"/>
+                        <a:ea typeface="Noto Sans TC Bold" charset="0"/>
+                        <a:cs typeface="Noto Sans TC Bold" charset="0"/>
+                      </a:endParaRPr>
+                    </a:p>
+                  </a:txBody>
+                  <a:tcPr marL="91440" marR="91440" marT="45720" marB="45720" anchor="ctr">
+                    <a:lnL w="6350" cap="flat" cmpd="sng" algn="ctr">
+                      <a:solidFill>
+                        <a:srgbClr val="E5E5E5"/>
+                      </a:solidFill>
+                      <a:prstDash val="solid"/>
+                      <a:round/>
+                      <a:headEnd type="none" w="med" len="med"/>
+                      <a:tailEnd type="none" w="med" len="med"/>
+                    </a:lnL>
+                    <a:lnR w="6350" cap="flat" cmpd="sng" algn="ctr">
+                      <a:solidFill>
+                        <a:srgbClr val="E5E5E5"/>
+                      </a:solidFill>
+                      <a:prstDash val="solid"/>
+                      <a:round/>
+                      <a:headEnd type="none" w="med" len="med"/>
+                      <a:tailEnd type="none" w="med" len="med"/>
+                    </a:lnR>
+                    <a:lnT w="6350" cap="flat" cmpd="sng" algn="ctr">
+                      <a:solidFill>
+                        <a:srgbClr val="E5E5E5"/>
+                      </a:solidFill>
+                      <a:prstDash val="solid"/>
+                      <a:round/>
+                      <a:headEnd type="none" w="med" len="med"/>
+                      <a:tailEnd type="none" w="med" len="med"/>
+                    </a:lnT>
+                    <a:lnB w="6350" cap="flat" cmpd="sng" algn="ctr">
+                      <a:solidFill>
+                        <a:srgbClr val="E5E5E5"/>
+                      </a:solidFill>
+                      <a:prstDash val="solid"/>
+                      <a:round/>
+                      <a:headEnd type="none" w="med" len="med"/>
+                      <a:tailEnd type="none" w="med" len="med"/>
+                    </a:lnB>
+                    <a:solidFill>
+                      <a:srgbClr val="FFFFFF"/>
+                    </a:solidFill>
+                  </a:tcPr>
+                </a:tc>
+                <a:tc>
+                  <a:txBody>
+                    <a:bodyPr/>
+                    <a:lstStyle/>
+                    <a:p>
+                      <a:pPr algn="ctr" indent="0" marL="0">
+                        <a:buNone/>
+                      </a:pPr>
+                      <a:r>
+                        <a:rPr lang="en-US" sz="950" dirty="0">
+                          <a:solidFill>
+                            <a:srgbClr val="888888"/>
+                          </a:solidFill>
+                          <a:latin typeface="Noto Sans TC Medium" pitchFamily="34" charset="0"/>
+                          <a:ea typeface="Noto Sans TC Medium" pitchFamily="34" charset="-122"/>
+                          <a:cs typeface="Noto Sans TC Medium" pitchFamily="34" charset="-120"/>
+                        </a:rPr>
+                        <a:t>－（首次記錄）</a:t>
+                      </a:r>
+                      <a:endParaRPr lang="en-US" sz="950" dirty="0">
+                        <a:latin typeface="Noto Sans TC Medium" charset="0"/>
+                        <a:ea typeface="Noto Sans TC Medium" charset="0"/>
+                        <a:cs typeface="Noto Sans TC Medium" charset="0"/>
+                      </a:endParaRPr>
+                    </a:p>
+                  </a:txBody>
+                  <a:tcPr marL="91440" marR="91440" marT="45720" marB="45720" anchor="ctr">
+                    <a:lnL w="6350" cap="flat" cmpd="sng" algn="ctr">
+                      <a:solidFill>
+                        <a:srgbClr val="E5E5E5"/>
+                      </a:solidFill>
+                      <a:prstDash val="solid"/>
+                      <a:round/>
+                      <a:headEnd type="none" w="med" len="med"/>
+                      <a:tailEnd type="none" w="med" len="med"/>
+                    </a:lnL>
+                    <a:lnR w="6350" cap="flat" cmpd="sng" algn="ctr">
+                      <a:solidFill>
+                        <a:srgbClr val="E5E5E5"/>
+                      </a:solidFill>
+                      <a:prstDash val="solid"/>
+                      <a:round/>
+                      <a:headEnd type="none" w="med" len="med"/>
+                      <a:tailEnd type="none" w="med" len="med"/>
+                    </a:lnR>
+                    <a:lnT w="6350" cap="flat" cmpd="sng" algn="ctr">
+                      <a:solidFill>
+                        <a:srgbClr val="E5E5E5"/>
+                      </a:solidFill>
+                      <a:prstDash val="solid"/>
+                      <a:round/>
+                      <a:headEnd type="none" w="med" len="med"/>
+                      <a:tailEnd type="none" w="med" len="med"/>
+                    </a:lnT>
+                    <a:lnB w="6350" cap="flat" cmpd="sng" algn="ctr">
+                      <a:solidFill>
+                        <a:srgbClr val="E5E5E5"/>
+                      </a:solidFill>
+                      <a:prstDash val="solid"/>
+                      <a:round/>
+                      <a:headEnd type="none" w="med" len="med"/>
+                      <a:tailEnd type="none" w="med" len="med"/>
+                    </a:lnB>
+                    <a:solidFill>
+                      <a:srgbClr val="FFFFFF"/>
+                    </a:solidFill>
+                  </a:tcPr>
+                </a:tc>
+              </a:tr>
+              <a:tr h="384048">
+                <a:tc>
+                  <a:txBody>
+                    <a:bodyPr/>
+                    <a:lstStyle/>
+                    <a:p>
+                      <a:pPr algn="ctr" indent="0" marL="0">
+                        <a:buNone/>
+                      </a:pPr>
+                      <a:r>
+                        <a:rPr lang="en-US" sz="1300" b="1" dirty="0">
+                          <a:solidFill>
+                            <a:srgbClr val="888888"/>
+                          </a:solidFill>
+                          <a:latin typeface="Noto Sans TC Black" pitchFamily="34" charset="0"/>
+                          <a:ea typeface="Noto Sans TC Black" pitchFamily="34" charset="-122"/>
+                          <a:cs typeface="Noto Sans TC Black" pitchFamily="34" charset="-120"/>
+                        </a:rPr>
+                        <a:t>F</a:t>
+                      </a:r>
+                      <a:endParaRPr lang="en-US" sz="1300" dirty="0">
+                        <a:latin typeface="Noto Sans TC Black" charset="0"/>
+                        <a:ea typeface="Noto Sans TC Black" charset="0"/>
+                        <a:cs typeface="Noto Sans TC Black" charset="0"/>
+                      </a:endParaRPr>
+                    </a:p>
+                  </a:txBody>
+                  <a:tcPr marL="91440" marR="91440" marT="45720" marB="45720" anchor="ctr">
+                    <a:lnL w="6350" cap="flat" cmpd="sng" algn="ctr">
+                      <a:solidFill>
+                        <a:srgbClr val="E5E5E5"/>
+                      </a:solidFill>
+                      <a:prstDash val="solid"/>
+                      <a:round/>
+                      <a:headEnd type="none" w="med" len="med"/>
+                      <a:tailEnd type="none" w="med" len="med"/>
+                    </a:lnL>
+                    <a:lnR w="6350" cap="flat" cmpd="sng" algn="ctr">
+                      <a:solidFill>
+                        <a:srgbClr val="E5E5E5"/>
+                      </a:solidFill>
+                      <a:prstDash val="solid"/>
+                      <a:round/>
+                      <a:headEnd type="none" w="med" len="med"/>
+                      <a:tailEnd type="none" w="med" len="med"/>
+                    </a:lnR>
+                    <a:lnT w="6350" cap="flat" cmpd="sng" algn="ctr">
+                      <a:solidFill>
+                        <a:srgbClr val="E5E5E5"/>
+                      </a:solidFill>
+                      <a:prstDash val="solid"/>
+                      <a:round/>
+                      <a:headEnd type="none" w="med" len="med"/>
+                      <a:tailEnd type="none" w="med" len="med"/>
+                    </a:lnT>
+                    <a:lnB w="6350" cap="flat" cmpd="sng" algn="ctr">
+                      <a:solidFill>
+                        <a:srgbClr val="E5E5E5"/>
+                      </a:solidFill>
+                      <a:prstDash val="solid"/>
+                      <a:round/>
+                      <a:headEnd type="none" w="med" len="med"/>
+                      <a:tailEnd type="none" w="med" len="med"/>
+                    </a:lnB>
+                    <a:solidFill>
+                      <a:srgbClr val="F7F7F9"/>
+                    </a:solidFill>
+                  </a:tcPr>
+                </a:tc>
+                <a:tc>
+                  <a:txBody>
+                    <a:bodyPr/>
+                    <a:lstStyle/>
+                    <a:p>
+                      <a:pPr algn="ctr" indent="0" marL="0">
+                        <a:buNone/>
+                      </a:pPr>
+                      <a:r>
+                        <a:rPr lang="en-US" sz="1050" dirty="0">
+                          <a:solidFill>
+                            <a:srgbClr val="888888"/>
+                          </a:solidFill>
+                          <a:latin typeface="Noto Sans TC Medium" pitchFamily="34" charset="0"/>
+                          <a:ea typeface="Noto Sans TC Medium" pitchFamily="34" charset="-122"/>
+                          <a:cs typeface="Noto Sans TC Medium" pitchFamily="34" charset="-120"/>
+                        </a:rPr>
+                        <a:t>第 510 名</a:t>
+                      </a:r>
+                      <a:endParaRPr lang="en-US" sz="1050" dirty="0">
+                        <a:latin typeface="Noto Sans TC Medium" charset="0"/>
+                        <a:ea typeface="Noto Sans TC Medium" charset="0"/>
+                        <a:cs typeface="Noto Sans TC Medium" charset="0"/>
+                      </a:endParaRPr>
+                    </a:p>
+                  </a:txBody>
+                  <a:tcPr marL="91440" marR="91440" marT="45720" marB="45720" anchor="ctr">
+                    <a:lnL w="6350" cap="flat" cmpd="sng" algn="ctr">
+                      <a:solidFill>
+                        <a:srgbClr val="E5E5E5"/>
+                      </a:solidFill>
+                      <a:prstDash val="solid"/>
+                      <a:round/>
+                      <a:headEnd type="none" w="med" len="med"/>
+                      <a:tailEnd type="none" w="med" len="med"/>
+                    </a:lnL>
+                    <a:lnR w="6350" cap="flat" cmpd="sng" algn="ctr">
+                      <a:solidFill>
+                        <a:srgbClr val="E5E5E5"/>
+                      </a:solidFill>
+                      <a:prstDash val="solid"/>
+                      <a:round/>
+                      <a:headEnd type="none" w="med" len="med"/>
+                      <a:tailEnd type="none" w="med" len="med"/>
+                    </a:lnR>
+                    <a:lnT w="6350" cap="flat" cmpd="sng" algn="ctr">
+                      <a:solidFill>
+                        <a:srgbClr val="E5E5E5"/>
+                      </a:solidFill>
+                      <a:prstDash val="solid"/>
+                      <a:round/>
+                      <a:headEnd type="none" w="med" len="med"/>
+                      <a:tailEnd type="none" w="med" len="med"/>
+                    </a:lnT>
+                    <a:lnB w="6350" cap="flat" cmpd="sng" algn="ctr">
+                      <a:solidFill>
+                        <a:srgbClr val="E5E5E5"/>
+                      </a:solidFill>
+                      <a:prstDash val="solid"/>
+                      <a:round/>
+                      <a:headEnd type="none" w="med" len="med"/>
+                      <a:tailEnd type="none" w="med" len="med"/>
+                    </a:lnB>
+                    <a:solidFill>
+                      <a:srgbClr val="F7F7F9"/>
+                    </a:solidFill>
+                  </a:tcPr>
+                </a:tc>
+                <a:tc>
+                  <a:txBody>
+                    <a:bodyPr/>
+                    <a:lstStyle/>
+                    <a:p>
+                      <a:pPr algn="ctr" indent="0" marL="0">
+                        <a:buNone/>
+                      </a:pPr>
+                      <a:r>
+                        <a:rPr lang="en-US" sz="1100" dirty="0">
+                          <a:solidFill>
+                            <a:srgbClr val="333333"/>
+                          </a:solidFill>
+                          <a:latin typeface="Noto Sans TC Medium" pitchFamily="34" charset="0"/>
+                          <a:ea typeface="Noto Sans TC Medium" pitchFamily="34" charset="-122"/>
+                          <a:cs typeface="Noto Sans TC Medium" pitchFamily="34" charset="-120"/>
+                        </a:rPr>
+                        <a:t>雲林</a:t>
+                      </a:r>
+                      <a:endParaRPr lang="en-US" sz="1100" dirty="0">
+                        <a:latin typeface="Noto Sans TC Medium" charset="0"/>
+                        <a:ea typeface="Noto Sans TC Medium" charset="0"/>
+                        <a:cs typeface="Noto Sans TC Medium" charset="0"/>
+                      </a:endParaRPr>
+                    </a:p>
+                  </a:txBody>
+                  <a:tcPr marL="91440" marR="91440" marT="45720" marB="45720" anchor="ctr">
+                    <a:lnL w="6350" cap="flat" cmpd="sng" algn="ctr">
+                      <a:solidFill>
+                        <a:srgbClr val="E5E5E5"/>
+                      </a:solidFill>
+                      <a:prstDash val="solid"/>
+                      <a:round/>
+                      <a:headEnd type="none" w="med" len="med"/>
+                      <a:tailEnd type="none" w="med" len="med"/>
+                    </a:lnL>
+                    <a:lnR w="6350" cap="flat" cmpd="sng" algn="ctr">
+                      <a:solidFill>
+                        <a:srgbClr val="E5E5E5"/>
+                      </a:solidFill>
+                      <a:prstDash val="solid"/>
+                      <a:round/>
+                      <a:headEnd type="none" w="med" len="med"/>
+                      <a:tailEnd type="none" w="med" len="med"/>
+                    </a:lnR>
+                    <a:lnT w="6350" cap="flat" cmpd="sng" algn="ctr">
+                      <a:solidFill>
+                        <a:srgbClr val="E5E5E5"/>
+                      </a:solidFill>
+                      <a:prstDash val="solid"/>
+                      <a:round/>
+                      <a:headEnd type="none" w="med" len="med"/>
+                      <a:tailEnd type="none" w="med" len="med"/>
+                    </a:lnT>
+                    <a:lnB w="6350" cap="flat" cmpd="sng" algn="ctr">
+                      <a:solidFill>
+                        <a:srgbClr val="E5E5E5"/>
+                      </a:solidFill>
+                      <a:prstDash val="solid"/>
+                      <a:round/>
+                      <a:headEnd type="none" w="med" len="med"/>
+                      <a:tailEnd type="none" w="med" len="med"/>
+                    </a:lnB>
+                    <a:solidFill>
+                      <a:srgbClr val="F7F7F9"/>
+                    </a:solidFill>
+                  </a:tcPr>
+                </a:tc>
+                <a:tc>
+                  <a:txBody>
+                    <a:bodyPr/>
+                    <a:lstStyle/>
+                    <a:p>
+                      <a:pPr algn="l" indent="0" marL="0">
+                        <a:buNone/>
+                      </a:pPr>
+                      <a:r>
+                        <a:rPr lang="en-US" sz="1100" b="1" dirty="0">
+                          <a:solidFill>
+                            <a:srgbClr val="333333"/>
+                          </a:solidFill>
+                          <a:latin typeface="Noto Sans TC Bold" pitchFamily="34" charset="0"/>
+                          <a:ea typeface="Noto Sans TC Bold" pitchFamily="34" charset="-122"/>
+                          <a:cs typeface="Noto Sans TC Bold" pitchFamily="34" charset="-120"/>
+                        </a:rPr>
+                        <a:t>全聯福利中心林內中正店站</a:t>
+                      </a:r>
+                      <a:endParaRPr lang="en-US" sz="1100" dirty="0">
+                        <a:latin typeface="Noto Sans TC Bold" charset="0"/>
+                        <a:ea typeface="Noto Sans TC Bold" charset="0"/>
+                        <a:cs typeface="Noto Sans TC Bold" charset="0"/>
+                      </a:endParaRPr>
+                    </a:p>
+                  </a:txBody>
+                  <a:tcPr marL="91440" marR="91440" marT="45720" marB="45720" anchor="ctr">
+                    <a:lnL w="6350" cap="flat" cmpd="sng" algn="ctr">
+                      <a:solidFill>
+                        <a:srgbClr val="E5E5E5"/>
+                      </a:solidFill>
+                      <a:prstDash val="solid"/>
+                      <a:round/>
+                      <a:headEnd type="none" w="med" len="med"/>
+                      <a:tailEnd type="none" w="med" len="med"/>
+                    </a:lnL>
+                    <a:lnR w="6350" cap="flat" cmpd="sng" algn="ctr">
+                      <a:solidFill>
+                        <a:srgbClr val="E5E5E5"/>
+                      </a:solidFill>
+                      <a:prstDash val="solid"/>
+                      <a:round/>
+                      <a:headEnd type="none" w="med" len="med"/>
+                      <a:tailEnd type="none" w="med" len="med"/>
+                    </a:lnR>
+                    <a:lnT w="6350" cap="flat" cmpd="sng" algn="ctr">
+                      <a:solidFill>
+                        <a:srgbClr val="E5E5E5"/>
+                      </a:solidFill>
+                      <a:prstDash val="solid"/>
+                      <a:round/>
+                      <a:headEnd type="none" w="med" len="med"/>
+                      <a:tailEnd type="none" w="med" len="med"/>
+                    </a:lnT>
+                    <a:lnB w="6350" cap="flat" cmpd="sng" algn="ctr">
+                      <a:solidFill>
+                        <a:srgbClr val="E5E5E5"/>
+                      </a:solidFill>
+                      <a:prstDash val="solid"/>
+                      <a:round/>
+                      <a:headEnd type="none" w="med" len="med"/>
+                      <a:tailEnd type="none" w="med" len="med"/>
+                    </a:lnB>
+                    <a:solidFill>
+                      <a:srgbClr val="F7F7F9"/>
+                    </a:solidFill>
+                  </a:tcPr>
+                </a:tc>
+                <a:tc>
+                  <a:txBody>
+                    <a:bodyPr/>
+                    <a:lstStyle/>
+                    <a:p>
+                      <a:pPr indent="0" marL="0">
+                        <a:buNone/>
+                      </a:pPr>
+                      <a:endParaRPr lang="en-US" sz="1200" dirty="0"/>
+                    </a:p>
+                  </a:txBody>
+                  <a:tcPr marL="91440" marR="91440" marT="45720" marB="45720">
+                    <a:lnL w="6350" cap="flat" cmpd="sng" algn="ctr">
+                      <a:solidFill>
+                        <a:srgbClr val="E5E5E5"/>
+                      </a:solidFill>
+                      <a:prstDash val="solid"/>
+                      <a:round/>
+                      <a:headEnd type="none" w="med" len="med"/>
+                      <a:tailEnd type="none" w="med" len="med"/>
+                    </a:lnL>
+                    <a:lnR w="6350" cap="flat" cmpd="sng" algn="ctr">
+                      <a:solidFill>
+                        <a:srgbClr val="E5E5E5"/>
+                      </a:solidFill>
+                      <a:prstDash val="solid"/>
+                      <a:round/>
+                      <a:headEnd type="none" w="med" len="med"/>
+                      <a:tailEnd type="none" w="med" len="med"/>
+                    </a:lnR>
+                    <a:lnT w="6350" cap="flat" cmpd="sng" algn="ctr">
+                      <a:solidFill>
+                        <a:srgbClr val="E5E5E5"/>
+                      </a:solidFill>
+                      <a:prstDash val="solid"/>
+                      <a:round/>
+                      <a:headEnd type="none" w="med" len="med"/>
+                      <a:tailEnd type="none" w="med" len="med"/>
+                    </a:lnT>
+                    <a:lnB w="6350" cap="flat" cmpd="sng" algn="ctr">
+                      <a:solidFill>
+                        <a:srgbClr val="E5E5E5"/>
+                      </a:solidFill>
+                      <a:prstDash val="solid"/>
+                      <a:round/>
+                      <a:headEnd type="none" w="med" len="med"/>
+                      <a:tailEnd type="none" w="med" len="med"/>
+                    </a:lnB>
+                    <a:solidFill>
+                      <a:srgbClr val="F7F7F9"/>
+                    </a:solidFill>
+                  </a:tcPr>
+                </a:tc>
+                <a:tc>
+                  <a:txBody>
+                    <a:bodyPr/>
+                    <a:lstStyle/>
+                    <a:p>
+                      <a:pPr indent="0" marL="0">
+                        <a:buNone/>
+                      </a:pPr>
+                      <a:endParaRPr lang="en-US" sz="1200" dirty="0"/>
+                    </a:p>
+                  </a:txBody>
+                  <a:tcPr marL="91440" marR="91440" marT="45720" marB="45720">
+                    <a:lnL w="6350" cap="flat" cmpd="sng" algn="ctr">
+                      <a:solidFill>
+                        <a:srgbClr val="E5E5E5"/>
+                      </a:solidFill>
+                      <a:prstDash val="solid"/>
+                      <a:round/>
+                      <a:headEnd type="none" w="med" len="med"/>
+                      <a:tailEnd type="none" w="med" len="med"/>
+                    </a:lnL>
+                    <a:lnR w="6350" cap="flat" cmpd="sng" algn="ctr">
+                      <a:solidFill>
+                        <a:srgbClr val="E5E5E5"/>
+                      </a:solidFill>
+                      <a:prstDash val="solid"/>
+                      <a:round/>
+                      <a:headEnd type="none" w="med" len="med"/>
+                      <a:tailEnd type="none" w="med" len="med"/>
+                    </a:lnR>
+                    <a:lnT w="6350" cap="flat" cmpd="sng" algn="ctr">
+                      <a:solidFill>
+                        <a:srgbClr val="E5E5E5"/>
+                      </a:solidFill>
+                      <a:prstDash val="solid"/>
+                      <a:round/>
+                      <a:headEnd type="none" w="med" len="med"/>
+                      <a:tailEnd type="none" w="med" len="med"/>
+                    </a:lnT>
+                    <a:lnB w="6350" cap="flat" cmpd="sng" algn="ctr">
+                      <a:solidFill>
+                        <a:srgbClr val="E5E5E5"/>
+                      </a:solidFill>
+                      <a:prstDash val="solid"/>
+                      <a:round/>
+                      <a:headEnd type="none" w="med" len="med"/>
+                      <a:tailEnd type="none" w="med" len="med"/>
+                    </a:lnB>
+                    <a:solidFill>
+                      <a:srgbClr val="F7F7F9"/>
+                    </a:solidFill>
+                  </a:tcPr>
+                </a:tc>
+                <a:tc>
+                  <a:txBody>
+                    <a:bodyPr/>
+                    <a:lstStyle/>
+                    <a:p>
+                      <a:pPr algn="ctr" indent="0" marL="0">
+                        <a:buNone/>
+                      </a:pPr>
+                      <a:r>
+                        <a:rPr lang="en-US" sz="1200" b="1" dirty="0">
+                          <a:solidFill>
+                            <a:srgbClr val="0076A9"/>
+                          </a:solidFill>
+                          <a:latin typeface="Noto Sans TC Bold" pitchFamily="34" charset="0"/>
+                          <a:ea typeface="Noto Sans TC Bold" pitchFamily="34" charset="-122"/>
+                          <a:cs typeface="Noto Sans TC Bold" pitchFamily="34" charset="-120"/>
+                        </a:rPr>
+                        <a:t>1,100</a:t>
+                      </a:r>
+                      <a:endParaRPr lang="en-US" sz="1200" dirty="0">
+                        <a:latin typeface="Noto Sans TC Bold" charset="0"/>
+                        <a:ea typeface="Noto Sans TC Bold" charset="0"/>
+                        <a:cs typeface="Noto Sans TC Bold" charset="0"/>
+                      </a:endParaRPr>
+                    </a:p>
+                  </a:txBody>
+                  <a:tcPr marL="91440" marR="91440" marT="45720" marB="45720" anchor="ctr">
+                    <a:lnL w="6350" cap="flat" cmpd="sng" algn="ctr">
+                      <a:solidFill>
+                        <a:srgbClr val="E5E5E5"/>
+                      </a:solidFill>
+                      <a:prstDash val="solid"/>
+                      <a:round/>
+                      <a:headEnd type="none" w="med" len="med"/>
+                      <a:tailEnd type="none" w="med" len="med"/>
+                    </a:lnL>
+                    <a:lnR w="6350" cap="flat" cmpd="sng" algn="ctr">
+                      <a:solidFill>
+                        <a:srgbClr val="E5E5E5"/>
+                      </a:solidFill>
+                      <a:prstDash val="solid"/>
+                      <a:round/>
+                      <a:headEnd type="none" w="med" len="med"/>
+                      <a:tailEnd type="none" w="med" len="med"/>
+                    </a:lnR>
+                    <a:lnT w="6350" cap="flat" cmpd="sng" algn="ctr">
+                      <a:solidFill>
+                        <a:srgbClr val="E5E5E5"/>
+                      </a:solidFill>
+                      <a:prstDash val="solid"/>
+                      <a:round/>
+                      <a:headEnd type="none" w="med" len="med"/>
+                      <a:tailEnd type="none" w="med" len="med"/>
+                    </a:lnT>
+                    <a:lnB w="6350" cap="flat" cmpd="sng" algn="ctr">
+                      <a:solidFill>
+                        <a:srgbClr val="E5E5E5"/>
+                      </a:solidFill>
+                      <a:prstDash val="solid"/>
+                      <a:round/>
+                      <a:headEnd type="none" w="med" len="med"/>
+                      <a:tailEnd type="none" w="med" len="med"/>
+                    </a:lnB>
+                    <a:solidFill>
+                      <a:srgbClr val="F7F7F9"/>
+                    </a:solidFill>
+                  </a:tcPr>
+                </a:tc>
+                <a:tc>
+                  <a:txBody>
+                    <a:bodyPr/>
+                    <a:lstStyle/>
+                    <a:p>
+                      <a:pPr algn="ctr" indent="0" marL="0">
+                        <a:buNone/>
+                      </a:pPr>
+                      <a:r>
+                        <a:rPr lang="en-US" sz="950" dirty="0">
+                          <a:solidFill>
+                            <a:srgbClr val="888888"/>
+                          </a:solidFill>
+                          <a:latin typeface="Noto Sans TC Medium" pitchFamily="34" charset="0"/>
+                          <a:ea typeface="Noto Sans TC Medium" pitchFamily="34" charset="-122"/>
+                          <a:cs typeface="Noto Sans TC Medium" pitchFamily="34" charset="-120"/>
+                        </a:rPr>
+                        <a:t>－（首次記錄）</a:t>
+                      </a:r>
+                      <a:endParaRPr lang="en-US" sz="950" dirty="0">
+                        <a:latin typeface="Noto Sans TC Medium" charset="0"/>
+                        <a:ea typeface="Noto Sans TC Medium" charset="0"/>
+                        <a:cs typeface="Noto Sans TC Medium" charset="0"/>
+                      </a:endParaRPr>
+                    </a:p>
+                  </a:txBody>
+                  <a:tcPr marL="91440" marR="91440" marT="45720" marB="45720" anchor="ctr">
+                    <a:lnL w="6350" cap="flat" cmpd="sng" algn="ctr">
+                      <a:solidFill>
+                        <a:srgbClr val="E5E5E5"/>
+                      </a:solidFill>
+                      <a:prstDash val="solid"/>
+                      <a:round/>
+                      <a:headEnd type="none" w="med" len="med"/>
+                      <a:tailEnd type="none" w="med" len="med"/>
+                    </a:lnL>
+                    <a:lnR w="6350" cap="flat" cmpd="sng" algn="ctr">
+                      <a:solidFill>
+                        <a:srgbClr val="E5E5E5"/>
+                      </a:solidFill>
+                      <a:prstDash val="solid"/>
+                      <a:round/>
+                      <a:headEnd type="none" w="med" len="med"/>
+                      <a:tailEnd type="none" w="med" len="med"/>
+                    </a:lnR>
+                    <a:lnT w="6350" cap="flat" cmpd="sng" algn="ctr">
+                      <a:solidFill>
+                        <a:srgbClr val="E5E5E5"/>
+                      </a:solidFill>
+                      <a:prstDash val="solid"/>
+                      <a:round/>
+                      <a:headEnd type="none" w="med" len="med"/>
+                      <a:tailEnd type="none" w="med" len="med"/>
+                    </a:lnT>
+                    <a:lnB w="6350" cap="flat" cmpd="sng" algn="ctr">
+                      <a:solidFill>
+                        <a:srgbClr val="E5E5E5"/>
+                      </a:solidFill>
+                      <a:prstDash val="solid"/>
+                      <a:round/>
+                      <a:headEnd type="none" w="med" len="med"/>
+                      <a:tailEnd type="none" w="med" len="med"/>
+                    </a:lnB>
+                    <a:solidFill>
+                      <a:srgbClr val="F7F7F9"/>
+                    </a:solidFill>
+                  </a:tcPr>
+                </a:tc>
+              </a:tr>
+              <a:tr h="384048">
+                <a:tc>
+                  <a:txBody>
+                    <a:bodyPr/>
+                    <a:lstStyle/>
+                    <a:p>
+                      <a:pPr algn="ctr" indent="0" marL="0">
+                        <a:buNone/>
+                      </a:pPr>
+                      <a:r>
+                        <a:rPr lang="en-US" sz="1300" b="1" dirty="0">
+                          <a:solidFill>
+                            <a:srgbClr val="888888"/>
+                          </a:solidFill>
+                          <a:latin typeface="Noto Sans TC Black" pitchFamily="34" charset="0"/>
+                          <a:ea typeface="Noto Sans TC Black" pitchFamily="34" charset="-122"/>
+                          <a:cs typeface="Noto Sans TC Black" pitchFamily="34" charset="-120"/>
+                        </a:rPr>
+                        <a:t>E</a:t>
+                      </a:r>
+                      <a:endParaRPr lang="en-US" sz="1300" dirty="0">
+                        <a:latin typeface="Noto Sans TC Black" charset="0"/>
+                        <a:ea typeface="Noto Sans TC Black" charset="0"/>
+                        <a:cs typeface="Noto Sans TC Black" charset="0"/>
+                      </a:endParaRPr>
+                    </a:p>
+                  </a:txBody>
+                  <a:tcPr marL="91440" marR="91440" marT="45720" marB="45720" anchor="ctr">
+                    <a:lnL w="6350" cap="flat" cmpd="sng" algn="ctr">
+                      <a:solidFill>
+                        <a:srgbClr val="E5E5E5"/>
+                      </a:solidFill>
+                      <a:prstDash val="solid"/>
+                      <a:round/>
+                      <a:headEnd type="none" w="med" len="med"/>
+                      <a:tailEnd type="none" w="med" len="med"/>
+                    </a:lnL>
+                    <a:lnR w="6350" cap="flat" cmpd="sng" algn="ctr">
+                      <a:solidFill>
+                        <a:srgbClr val="E5E5E5"/>
+                      </a:solidFill>
+                      <a:prstDash val="solid"/>
+                      <a:round/>
+                      <a:headEnd type="none" w="med" len="med"/>
+                      <a:tailEnd type="none" w="med" len="med"/>
+                    </a:lnR>
+                    <a:lnT w="6350" cap="flat" cmpd="sng" algn="ctr">
+                      <a:solidFill>
+                        <a:srgbClr val="E5E5E5"/>
+                      </a:solidFill>
+                      <a:prstDash val="solid"/>
+                      <a:round/>
+                      <a:headEnd type="none" w="med" len="med"/>
+                      <a:tailEnd type="none" w="med" len="med"/>
+                    </a:lnT>
+                    <a:lnB w="6350" cap="flat" cmpd="sng" algn="ctr">
+                      <a:solidFill>
+                        <a:srgbClr val="E5E5E5"/>
+                      </a:solidFill>
+                      <a:prstDash val="solid"/>
+                      <a:round/>
+                      <a:headEnd type="none" w="med" len="med"/>
+                      <a:tailEnd type="none" w="med" len="med"/>
+                    </a:lnB>
+                    <a:solidFill>
+                      <a:srgbClr val="FFFFFF"/>
+                    </a:solidFill>
+                  </a:tcPr>
+                </a:tc>
+                <a:tc>
+                  <a:txBody>
+                    <a:bodyPr/>
+                    <a:lstStyle/>
+                    <a:p>
+                      <a:pPr algn="ctr" indent="0" marL="0">
+                        <a:buNone/>
+                      </a:pPr>
+                      <a:r>
+                        <a:rPr lang="en-US" sz="1050" dirty="0">
+                          <a:solidFill>
+                            <a:srgbClr val="888888"/>
+                          </a:solidFill>
+                          <a:latin typeface="Noto Sans TC Medium" pitchFamily="34" charset="0"/>
+                          <a:ea typeface="Noto Sans TC Medium" pitchFamily="34" charset="-122"/>
+                          <a:cs typeface="Noto Sans TC Medium" pitchFamily="34" charset="-120"/>
+                        </a:rPr>
+                        <a:t>第 466 名</a:t>
                       </a:r>
                       <a:endParaRPr lang="en-US" sz="1050" dirty="0">
                         <a:latin typeface="Noto Sans TC Medium" charset="0"/>
@@ -10359,7 +11391,7 @@
                           <a:ea typeface="Noto Sans TC Bold" pitchFamily="34" charset="-122"/>
                           <a:cs typeface="Noto Sans TC Bold" pitchFamily="34" charset="-120"/>
                         </a:rPr>
-                        <a:t>全聯福利中心三民十全三店站</a:t>
+                        <a:t>久昌好日和站</a:t>
                       </a:r>
                       <a:endParaRPr lang="en-US" sz="1100" dirty="0">
                         <a:latin typeface="Noto Sans TC Bold" charset="0"/>
@@ -10533,7 +11565,7 @@
                           <a:ea typeface="Noto Sans TC Bold" pitchFamily="34" charset="-122"/>
                           <a:cs typeface="Noto Sans TC Bold" pitchFamily="34" charset="-120"/>
                         </a:rPr>
-                        <a:t>112</a:t>
+                        <a:t>1,100</a:t>
                       </a:r>
                       <a:endParaRPr lang="en-US" sz="1200" dirty="0">
                         <a:latin typeface="Noto Sans TC Bold" charset="0"/>
@@ -10671,7 +11703,7 @@
                           <a:ea typeface="Noto Sans TC Black" pitchFamily="34" charset="-122"/>
                           <a:cs typeface="Noto Sans TC Black" pitchFamily="34" charset="-120"/>
                         </a:rPr>
-                        <a:t>F</a:t>
+                        <a:t>E</a:t>
                       </a:r>
                       <a:endParaRPr lang="en-US" sz="1300" dirty="0">
                         <a:latin typeface="Noto Sans TC Black" charset="0"/>
@@ -10739,7 +11771,7 @@
                           <a:ea typeface="Noto Sans TC Medium" pitchFamily="34" charset="-122"/>
                           <a:cs typeface="Noto Sans TC Medium" pitchFamily="34" charset="-120"/>
                         </a:rPr>
-                        <a:t>第 512 名</a:t>
+                        <a:t>第 450 名</a:t>
                       </a:r>
                       <a:endParaRPr lang="en-US" sz="1050" dirty="0">
                         <a:latin typeface="Noto Sans TC Medium" charset="0"/>
@@ -10807,7 +11839,7 @@
                           <a:ea typeface="Noto Sans TC Medium" pitchFamily="34" charset="-122"/>
                           <a:cs typeface="Noto Sans TC Medium" pitchFamily="34" charset="-120"/>
                         </a:rPr>
-                        <a:t>高雄</a:t>
+                        <a:t>嘉義</a:t>
                       </a:r>
                       <a:endParaRPr lang="en-US" sz="1100" dirty="0">
                         <a:latin typeface="Noto Sans TC Medium" charset="0"/>
@@ -10875,7 +11907,7 @@
                           <a:ea typeface="Noto Sans TC Bold" pitchFamily="34" charset="-122"/>
                           <a:cs typeface="Noto Sans TC Bold" pitchFamily="34" charset="-120"/>
                         </a:rPr>
-                        <a:t>全聯福利中心小港宏平店站</a:t>
+                        <a:t>嘉義新港圖書館站</a:t>
                       </a:r>
                       <a:endParaRPr lang="en-US" sz="1100" dirty="0">
                         <a:latin typeface="Noto Sans TC Bold" charset="0"/>
@@ -11049,7 +12081,7 @@
                           <a:ea typeface="Noto Sans TC Bold" pitchFamily="34" charset="-122"/>
                           <a:cs typeface="Noto Sans TC Bold" pitchFamily="34" charset="-120"/>
                         </a:rPr>
-                        <a:t>823</a:t>
+                        <a:t>1,100</a:t>
                       </a:r>
                       <a:endParaRPr lang="en-US" sz="1200" dirty="0">
                         <a:latin typeface="Noto Sans TC Bold" charset="0"/>
@@ -11255,7 +12287,7 @@
                           <a:ea typeface="Noto Sans TC Medium" pitchFamily="34" charset="-122"/>
                           <a:cs typeface="Noto Sans TC Medium" pitchFamily="34" charset="-120"/>
                         </a:rPr>
-                        <a:t>第 516 名</a:t>
+                        <a:t>第 509 名</a:t>
                       </a:r>
                       <a:endParaRPr lang="en-US" sz="1050" dirty="0">
                         <a:latin typeface="Noto Sans TC Medium" charset="0"/>
@@ -11391,7 +12423,7 @@
                           <a:ea typeface="Noto Sans TC Bold" pitchFamily="34" charset="-122"/>
                           <a:cs typeface="Noto Sans TC Bold" pitchFamily="34" charset="-120"/>
                         </a:rPr>
-                        <a:t>成功大學光復第二宿舍站</a:t>
+                        <a:t>豐譽億載安居站</a:t>
                       </a:r>
                       <a:endParaRPr lang="en-US" sz="1100" dirty="0">
                         <a:latin typeface="Noto Sans TC Bold" charset="0"/>
@@ -11565,7 +12597,7 @@
                           <a:ea typeface="Noto Sans TC Bold" pitchFamily="34" charset="-122"/>
                           <a:cs typeface="Noto Sans TC Bold" pitchFamily="34" charset="-120"/>
                         </a:rPr>
-                        <a:t>934</a:t>
+                        <a:t>1,162</a:t>
                       </a:r>
                       <a:endParaRPr lang="en-US" sz="1200" dirty="0">
                         <a:latin typeface="Noto Sans TC Bold" charset="0"/>
@@ -11771,7 +12803,7 @@
                           <a:ea typeface="Noto Sans TC Medium" pitchFamily="34" charset="-122"/>
                           <a:cs typeface="Noto Sans TC Medium" pitchFamily="34" charset="-120"/>
                         </a:rPr>
-                        <a:t>第 515 名</a:t>
+                        <a:t>第 508 名</a:t>
                       </a:r>
                       <a:endParaRPr lang="en-US" sz="1050" dirty="0">
                         <a:latin typeface="Noto Sans TC Medium" charset="0"/>
@@ -11839,7 +12871,7 @@
                           <a:ea typeface="Noto Sans TC Medium" pitchFamily="34" charset="-122"/>
                           <a:cs typeface="Noto Sans TC Medium" pitchFamily="34" charset="-120"/>
                         </a:rPr>
-                        <a:t>屏東</a:t>
+                        <a:t>臺南</a:t>
                       </a:r>
                       <a:endParaRPr lang="en-US" sz="1100" dirty="0">
                         <a:latin typeface="Noto Sans TC Medium" charset="0"/>
@@ -11907,7 +12939,7 @@
                           <a:ea typeface="Noto Sans TC Bold" pitchFamily="34" charset="-122"/>
                           <a:cs typeface="Noto Sans TC Bold" pitchFamily="34" charset="-120"/>
                         </a:rPr>
-                        <a:t>全聯福利中心屏東瑞民店站</a:t>
+                        <a:t>健美洋行南一中體育館站</a:t>
                       </a:r>
                       <a:endParaRPr lang="en-US" sz="1100" dirty="0">
                         <a:latin typeface="Noto Sans TC Bold" charset="0"/>
@@ -12081,1039 +13113,7 @@
                           <a:ea typeface="Noto Sans TC Bold" pitchFamily="34" charset="-122"/>
                           <a:cs typeface="Noto Sans TC Bold" pitchFamily="34" charset="-120"/>
                         </a:rPr>
-                        <a:t>1,075</a:t>
-                      </a:r>
-                      <a:endParaRPr lang="en-US" sz="1200" dirty="0">
-                        <a:latin typeface="Noto Sans TC Bold" charset="0"/>
-                        <a:ea typeface="Noto Sans TC Bold" charset="0"/>
-                        <a:cs typeface="Noto Sans TC Bold" charset="0"/>
-                      </a:endParaRPr>
-                    </a:p>
-                  </a:txBody>
-                  <a:tcPr marL="91440" marR="91440" marT="45720" marB="45720" anchor="ctr">
-                    <a:lnL w="6350" cap="flat" cmpd="sng" algn="ctr">
-                      <a:solidFill>
-                        <a:srgbClr val="E5E5E5"/>
-                      </a:solidFill>
-                      <a:prstDash val="solid"/>
-                      <a:round/>
-                      <a:headEnd type="none" w="med" len="med"/>
-                      <a:tailEnd type="none" w="med" len="med"/>
-                    </a:lnL>
-                    <a:lnR w="6350" cap="flat" cmpd="sng" algn="ctr">
-                      <a:solidFill>
-                        <a:srgbClr val="E5E5E5"/>
-                      </a:solidFill>
-                      <a:prstDash val="solid"/>
-                      <a:round/>
-                      <a:headEnd type="none" w="med" len="med"/>
-                      <a:tailEnd type="none" w="med" len="med"/>
-                    </a:lnR>
-                    <a:lnT w="6350" cap="flat" cmpd="sng" algn="ctr">
-                      <a:solidFill>
-                        <a:srgbClr val="E5E5E5"/>
-                      </a:solidFill>
-                      <a:prstDash val="solid"/>
-                      <a:round/>
-                      <a:headEnd type="none" w="med" len="med"/>
-                      <a:tailEnd type="none" w="med" len="med"/>
-                    </a:lnT>
-                    <a:lnB w="6350" cap="flat" cmpd="sng" algn="ctr">
-                      <a:solidFill>
-                        <a:srgbClr val="E5E5E5"/>
-                      </a:solidFill>
-                      <a:prstDash val="solid"/>
-                      <a:round/>
-                      <a:headEnd type="none" w="med" len="med"/>
-                      <a:tailEnd type="none" w="med" len="med"/>
-                    </a:lnB>
-                    <a:solidFill>
-                      <a:srgbClr val="F7F7F9"/>
-                    </a:solidFill>
-                  </a:tcPr>
-                </a:tc>
-                <a:tc>
-                  <a:txBody>
-                    <a:bodyPr/>
-                    <a:lstStyle/>
-                    <a:p>
-                      <a:pPr algn="ctr" indent="0" marL="0">
-                        <a:buNone/>
-                      </a:pPr>
-                      <a:r>
-                        <a:rPr lang="en-US" sz="950" dirty="0">
-                          <a:solidFill>
-                            <a:srgbClr val="888888"/>
-                          </a:solidFill>
-                          <a:latin typeface="Noto Sans TC Medium" pitchFamily="34" charset="0"/>
-                          <a:ea typeface="Noto Sans TC Medium" pitchFamily="34" charset="-122"/>
-                          <a:cs typeface="Noto Sans TC Medium" pitchFamily="34" charset="-120"/>
-                        </a:rPr>
-                        <a:t>－（首次記錄）</a:t>
-                      </a:r>
-                      <a:endParaRPr lang="en-US" sz="950" dirty="0">
-                        <a:latin typeface="Noto Sans TC Medium" charset="0"/>
-                        <a:ea typeface="Noto Sans TC Medium" charset="0"/>
-                        <a:cs typeface="Noto Sans TC Medium" charset="0"/>
-                      </a:endParaRPr>
-                    </a:p>
-                  </a:txBody>
-                  <a:tcPr marL="91440" marR="91440" marT="45720" marB="45720" anchor="ctr">
-                    <a:lnL w="6350" cap="flat" cmpd="sng" algn="ctr">
-                      <a:solidFill>
-                        <a:srgbClr val="E5E5E5"/>
-                      </a:solidFill>
-                      <a:prstDash val="solid"/>
-                      <a:round/>
-                      <a:headEnd type="none" w="med" len="med"/>
-                      <a:tailEnd type="none" w="med" len="med"/>
-                    </a:lnL>
-                    <a:lnR w="6350" cap="flat" cmpd="sng" algn="ctr">
-                      <a:solidFill>
-                        <a:srgbClr val="E5E5E5"/>
-                      </a:solidFill>
-                      <a:prstDash val="solid"/>
-                      <a:round/>
-                      <a:headEnd type="none" w="med" len="med"/>
-                      <a:tailEnd type="none" w="med" len="med"/>
-                    </a:lnR>
-                    <a:lnT w="6350" cap="flat" cmpd="sng" algn="ctr">
-                      <a:solidFill>
-                        <a:srgbClr val="E5E5E5"/>
-                      </a:solidFill>
-                      <a:prstDash val="solid"/>
-                      <a:round/>
-                      <a:headEnd type="none" w="med" len="med"/>
-                      <a:tailEnd type="none" w="med" len="med"/>
-                    </a:lnT>
-                    <a:lnB w="6350" cap="flat" cmpd="sng" algn="ctr">
-                      <a:solidFill>
-                        <a:srgbClr val="E5E5E5"/>
-                      </a:solidFill>
-                      <a:prstDash val="solid"/>
-                      <a:round/>
-                      <a:headEnd type="none" w="med" len="med"/>
-                      <a:tailEnd type="none" w="med" len="med"/>
-                    </a:lnB>
-                    <a:solidFill>
-                      <a:srgbClr val="F7F7F9"/>
-                    </a:solidFill>
-                  </a:tcPr>
-                </a:tc>
-              </a:tr>
-              <a:tr h="384048">
-                <a:tc>
-                  <a:txBody>
-                    <a:bodyPr/>
-                    <a:lstStyle/>
-                    <a:p>
-                      <a:pPr algn="ctr" indent="0" marL="0">
-                        <a:buNone/>
-                      </a:pPr>
-                      <a:r>
-                        <a:rPr lang="en-US" sz="1300" b="1" dirty="0">
-                          <a:solidFill>
-                            <a:srgbClr val="888888"/>
-                          </a:solidFill>
-                          <a:latin typeface="Noto Sans TC Black" pitchFamily="34" charset="0"/>
-                          <a:ea typeface="Noto Sans TC Black" pitchFamily="34" charset="-122"/>
-                          <a:cs typeface="Noto Sans TC Black" pitchFamily="34" charset="-120"/>
-                        </a:rPr>
-                        <a:t>F</a:t>
-                      </a:r>
-                      <a:endParaRPr lang="en-US" sz="1300" dirty="0">
-                        <a:latin typeface="Noto Sans TC Black" charset="0"/>
-                        <a:ea typeface="Noto Sans TC Black" charset="0"/>
-                        <a:cs typeface="Noto Sans TC Black" charset="0"/>
-                      </a:endParaRPr>
-                    </a:p>
-                  </a:txBody>
-                  <a:tcPr marL="91440" marR="91440" marT="45720" marB="45720" anchor="ctr">
-                    <a:lnL w="6350" cap="flat" cmpd="sng" algn="ctr">
-                      <a:solidFill>
-                        <a:srgbClr val="E5E5E5"/>
-                      </a:solidFill>
-                      <a:prstDash val="solid"/>
-                      <a:round/>
-                      <a:headEnd type="none" w="med" len="med"/>
-                      <a:tailEnd type="none" w="med" len="med"/>
-                    </a:lnL>
-                    <a:lnR w="6350" cap="flat" cmpd="sng" algn="ctr">
-                      <a:solidFill>
-                        <a:srgbClr val="E5E5E5"/>
-                      </a:solidFill>
-                      <a:prstDash val="solid"/>
-                      <a:round/>
-                      <a:headEnd type="none" w="med" len="med"/>
-                      <a:tailEnd type="none" w="med" len="med"/>
-                    </a:lnR>
-                    <a:lnT w="6350" cap="flat" cmpd="sng" algn="ctr">
-                      <a:solidFill>
-                        <a:srgbClr val="E5E5E5"/>
-                      </a:solidFill>
-                      <a:prstDash val="solid"/>
-                      <a:round/>
-                      <a:headEnd type="none" w="med" len="med"/>
-                      <a:tailEnd type="none" w="med" len="med"/>
-                    </a:lnT>
-                    <a:lnB w="6350" cap="flat" cmpd="sng" algn="ctr">
-                      <a:solidFill>
-                        <a:srgbClr val="E5E5E5"/>
-                      </a:solidFill>
-                      <a:prstDash val="solid"/>
-                      <a:round/>
-                      <a:headEnd type="none" w="med" len="med"/>
-                      <a:tailEnd type="none" w="med" len="med"/>
-                    </a:lnB>
-                    <a:solidFill>
-                      <a:srgbClr val="FFFFFF"/>
-                    </a:solidFill>
-                  </a:tcPr>
-                </a:tc>
-                <a:tc>
-                  <a:txBody>
-                    <a:bodyPr/>
-                    <a:lstStyle/>
-                    <a:p>
-                      <a:pPr algn="ctr" indent="0" marL="0">
-                        <a:buNone/>
-                      </a:pPr>
-                      <a:r>
-                        <a:rPr lang="en-US" sz="1050" dirty="0">
-                          <a:solidFill>
-                            <a:srgbClr val="888888"/>
-                          </a:solidFill>
-                          <a:latin typeface="Noto Sans TC Medium" pitchFamily="34" charset="0"/>
-                          <a:ea typeface="Noto Sans TC Medium" pitchFamily="34" charset="-122"/>
-                          <a:cs typeface="Noto Sans TC Medium" pitchFamily="34" charset="-120"/>
-                        </a:rPr>
-                        <a:t>第 511 名</a:t>
-                      </a:r>
-                      <a:endParaRPr lang="en-US" sz="1050" dirty="0">
-                        <a:latin typeface="Noto Sans TC Medium" charset="0"/>
-                        <a:ea typeface="Noto Sans TC Medium" charset="0"/>
-                        <a:cs typeface="Noto Sans TC Medium" charset="0"/>
-                      </a:endParaRPr>
-                    </a:p>
-                  </a:txBody>
-                  <a:tcPr marL="91440" marR="91440" marT="45720" marB="45720" anchor="ctr">
-                    <a:lnL w="6350" cap="flat" cmpd="sng" algn="ctr">
-                      <a:solidFill>
-                        <a:srgbClr val="E5E5E5"/>
-                      </a:solidFill>
-                      <a:prstDash val="solid"/>
-                      <a:round/>
-                      <a:headEnd type="none" w="med" len="med"/>
-                      <a:tailEnd type="none" w="med" len="med"/>
-                    </a:lnL>
-                    <a:lnR w="6350" cap="flat" cmpd="sng" algn="ctr">
-                      <a:solidFill>
-                        <a:srgbClr val="E5E5E5"/>
-                      </a:solidFill>
-                      <a:prstDash val="solid"/>
-                      <a:round/>
-                      <a:headEnd type="none" w="med" len="med"/>
-                      <a:tailEnd type="none" w="med" len="med"/>
-                    </a:lnR>
-                    <a:lnT w="6350" cap="flat" cmpd="sng" algn="ctr">
-                      <a:solidFill>
-                        <a:srgbClr val="E5E5E5"/>
-                      </a:solidFill>
-                      <a:prstDash val="solid"/>
-                      <a:round/>
-                      <a:headEnd type="none" w="med" len="med"/>
-                      <a:tailEnd type="none" w="med" len="med"/>
-                    </a:lnT>
-                    <a:lnB w="6350" cap="flat" cmpd="sng" algn="ctr">
-                      <a:solidFill>
-                        <a:srgbClr val="E5E5E5"/>
-                      </a:solidFill>
-                      <a:prstDash val="solid"/>
-                      <a:round/>
-                      <a:headEnd type="none" w="med" len="med"/>
-                      <a:tailEnd type="none" w="med" len="med"/>
-                    </a:lnB>
-                    <a:solidFill>
-                      <a:srgbClr val="FFFFFF"/>
-                    </a:solidFill>
-                  </a:tcPr>
-                </a:tc>
-                <a:tc>
-                  <a:txBody>
-                    <a:bodyPr/>
-                    <a:lstStyle/>
-                    <a:p>
-                      <a:pPr algn="ctr" indent="0" marL="0">
-                        <a:buNone/>
-                      </a:pPr>
-                      <a:r>
-                        <a:rPr lang="en-US" sz="1100" dirty="0">
-                          <a:solidFill>
-                            <a:srgbClr val="333333"/>
-                          </a:solidFill>
-                          <a:latin typeface="Noto Sans TC Medium" pitchFamily="34" charset="0"/>
-                          <a:ea typeface="Noto Sans TC Medium" pitchFamily="34" charset="-122"/>
-                          <a:cs typeface="Noto Sans TC Medium" pitchFamily="34" charset="-120"/>
-                        </a:rPr>
-                        <a:t>屏東</a:t>
-                      </a:r>
-                      <a:endParaRPr lang="en-US" sz="1100" dirty="0">
-                        <a:latin typeface="Noto Sans TC Medium" charset="0"/>
-                        <a:ea typeface="Noto Sans TC Medium" charset="0"/>
-                        <a:cs typeface="Noto Sans TC Medium" charset="0"/>
-                      </a:endParaRPr>
-                    </a:p>
-                  </a:txBody>
-                  <a:tcPr marL="91440" marR="91440" marT="45720" marB="45720" anchor="ctr">
-                    <a:lnL w="6350" cap="flat" cmpd="sng" algn="ctr">
-                      <a:solidFill>
-                        <a:srgbClr val="E5E5E5"/>
-                      </a:solidFill>
-                      <a:prstDash val="solid"/>
-                      <a:round/>
-                      <a:headEnd type="none" w="med" len="med"/>
-                      <a:tailEnd type="none" w="med" len="med"/>
-                    </a:lnL>
-                    <a:lnR w="6350" cap="flat" cmpd="sng" algn="ctr">
-                      <a:solidFill>
-                        <a:srgbClr val="E5E5E5"/>
-                      </a:solidFill>
-                      <a:prstDash val="solid"/>
-                      <a:round/>
-                      <a:headEnd type="none" w="med" len="med"/>
-                      <a:tailEnd type="none" w="med" len="med"/>
-                    </a:lnR>
-                    <a:lnT w="6350" cap="flat" cmpd="sng" algn="ctr">
-                      <a:solidFill>
-                        <a:srgbClr val="E5E5E5"/>
-                      </a:solidFill>
-                      <a:prstDash val="solid"/>
-                      <a:round/>
-                      <a:headEnd type="none" w="med" len="med"/>
-                      <a:tailEnd type="none" w="med" len="med"/>
-                    </a:lnT>
-                    <a:lnB w="6350" cap="flat" cmpd="sng" algn="ctr">
-                      <a:solidFill>
-                        <a:srgbClr val="E5E5E5"/>
-                      </a:solidFill>
-                      <a:prstDash val="solid"/>
-                      <a:round/>
-                      <a:headEnd type="none" w="med" len="med"/>
-                      <a:tailEnd type="none" w="med" len="med"/>
-                    </a:lnB>
-                    <a:solidFill>
-                      <a:srgbClr val="FFFFFF"/>
-                    </a:solidFill>
-                  </a:tcPr>
-                </a:tc>
-                <a:tc>
-                  <a:txBody>
-                    <a:bodyPr/>
-                    <a:lstStyle/>
-                    <a:p>
-                      <a:pPr algn="l" indent="0" marL="0">
-                        <a:buNone/>
-                      </a:pPr>
-                      <a:r>
-                        <a:rPr lang="en-US" sz="1100" b="1" dirty="0">
-                          <a:solidFill>
-                            <a:srgbClr val="333333"/>
-                          </a:solidFill>
-                          <a:latin typeface="Noto Sans TC Bold" pitchFamily="34" charset="0"/>
-                          <a:ea typeface="Noto Sans TC Bold" pitchFamily="34" charset="-122"/>
-                          <a:cs typeface="Noto Sans TC Bold" pitchFamily="34" charset="-120"/>
-                        </a:rPr>
-                        <a:t>全聯福利中心屏東瑞民店站</a:t>
-                      </a:r>
-                      <a:endParaRPr lang="en-US" sz="1100" dirty="0">
-                        <a:latin typeface="Noto Sans TC Bold" charset="0"/>
-                        <a:ea typeface="Noto Sans TC Bold" charset="0"/>
-                        <a:cs typeface="Noto Sans TC Bold" charset="0"/>
-                      </a:endParaRPr>
-                    </a:p>
-                  </a:txBody>
-                  <a:tcPr marL="91440" marR="91440" marT="45720" marB="45720" anchor="ctr">
-                    <a:lnL w="6350" cap="flat" cmpd="sng" algn="ctr">
-                      <a:solidFill>
-                        <a:srgbClr val="E5E5E5"/>
-                      </a:solidFill>
-                      <a:prstDash val="solid"/>
-                      <a:round/>
-                      <a:headEnd type="none" w="med" len="med"/>
-                      <a:tailEnd type="none" w="med" len="med"/>
-                    </a:lnL>
-                    <a:lnR w="6350" cap="flat" cmpd="sng" algn="ctr">
-                      <a:solidFill>
-                        <a:srgbClr val="E5E5E5"/>
-                      </a:solidFill>
-                      <a:prstDash val="solid"/>
-                      <a:round/>
-                      <a:headEnd type="none" w="med" len="med"/>
-                      <a:tailEnd type="none" w="med" len="med"/>
-                    </a:lnR>
-                    <a:lnT w="6350" cap="flat" cmpd="sng" algn="ctr">
-                      <a:solidFill>
-                        <a:srgbClr val="E5E5E5"/>
-                      </a:solidFill>
-                      <a:prstDash val="solid"/>
-                      <a:round/>
-                      <a:headEnd type="none" w="med" len="med"/>
-                      <a:tailEnd type="none" w="med" len="med"/>
-                    </a:lnT>
-                    <a:lnB w="6350" cap="flat" cmpd="sng" algn="ctr">
-                      <a:solidFill>
-                        <a:srgbClr val="E5E5E5"/>
-                      </a:solidFill>
-                      <a:prstDash val="solid"/>
-                      <a:round/>
-                      <a:headEnd type="none" w="med" len="med"/>
-                      <a:tailEnd type="none" w="med" len="med"/>
-                    </a:lnB>
-                    <a:solidFill>
-                      <a:srgbClr val="FFFFFF"/>
-                    </a:solidFill>
-                  </a:tcPr>
-                </a:tc>
-                <a:tc>
-                  <a:txBody>
-                    <a:bodyPr/>
-                    <a:lstStyle/>
-                    <a:p>
-                      <a:pPr indent="0" marL="0">
-                        <a:buNone/>
-                      </a:pPr>
-                      <a:endParaRPr lang="en-US" sz="1200" dirty="0"/>
-                    </a:p>
-                  </a:txBody>
-                  <a:tcPr marL="91440" marR="91440" marT="45720" marB="45720">
-                    <a:lnL w="6350" cap="flat" cmpd="sng" algn="ctr">
-                      <a:solidFill>
-                        <a:srgbClr val="E5E5E5"/>
-                      </a:solidFill>
-                      <a:prstDash val="solid"/>
-                      <a:round/>
-                      <a:headEnd type="none" w="med" len="med"/>
-                      <a:tailEnd type="none" w="med" len="med"/>
-                    </a:lnL>
-                    <a:lnR w="6350" cap="flat" cmpd="sng" algn="ctr">
-                      <a:solidFill>
-                        <a:srgbClr val="E5E5E5"/>
-                      </a:solidFill>
-                      <a:prstDash val="solid"/>
-                      <a:round/>
-                      <a:headEnd type="none" w="med" len="med"/>
-                      <a:tailEnd type="none" w="med" len="med"/>
-                    </a:lnR>
-                    <a:lnT w="6350" cap="flat" cmpd="sng" algn="ctr">
-                      <a:solidFill>
-                        <a:srgbClr val="E5E5E5"/>
-                      </a:solidFill>
-                      <a:prstDash val="solid"/>
-                      <a:round/>
-                      <a:headEnd type="none" w="med" len="med"/>
-                      <a:tailEnd type="none" w="med" len="med"/>
-                    </a:lnT>
-                    <a:lnB w="6350" cap="flat" cmpd="sng" algn="ctr">
-                      <a:solidFill>
-                        <a:srgbClr val="E5E5E5"/>
-                      </a:solidFill>
-                      <a:prstDash val="solid"/>
-                      <a:round/>
-                      <a:headEnd type="none" w="med" len="med"/>
-                      <a:tailEnd type="none" w="med" len="med"/>
-                    </a:lnB>
-                    <a:solidFill>
-                      <a:srgbClr val="FFFFFF"/>
-                    </a:solidFill>
-                  </a:tcPr>
-                </a:tc>
-                <a:tc>
-                  <a:txBody>
-                    <a:bodyPr/>
-                    <a:lstStyle/>
-                    <a:p>
-                      <a:pPr indent="0" marL="0">
-                        <a:buNone/>
-                      </a:pPr>
-                      <a:endParaRPr lang="en-US" sz="1200" dirty="0"/>
-                    </a:p>
-                  </a:txBody>
-                  <a:tcPr marL="91440" marR="91440" marT="45720" marB="45720">
-                    <a:lnL w="6350" cap="flat" cmpd="sng" algn="ctr">
-                      <a:solidFill>
-                        <a:srgbClr val="E5E5E5"/>
-                      </a:solidFill>
-                      <a:prstDash val="solid"/>
-                      <a:round/>
-                      <a:headEnd type="none" w="med" len="med"/>
-                      <a:tailEnd type="none" w="med" len="med"/>
-                    </a:lnL>
-                    <a:lnR w="6350" cap="flat" cmpd="sng" algn="ctr">
-                      <a:solidFill>
-                        <a:srgbClr val="E5E5E5"/>
-                      </a:solidFill>
-                      <a:prstDash val="solid"/>
-                      <a:round/>
-                      <a:headEnd type="none" w="med" len="med"/>
-                      <a:tailEnd type="none" w="med" len="med"/>
-                    </a:lnR>
-                    <a:lnT w="6350" cap="flat" cmpd="sng" algn="ctr">
-                      <a:solidFill>
-                        <a:srgbClr val="E5E5E5"/>
-                      </a:solidFill>
-                      <a:prstDash val="solid"/>
-                      <a:round/>
-                      <a:headEnd type="none" w="med" len="med"/>
-                      <a:tailEnd type="none" w="med" len="med"/>
-                    </a:lnT>
-                    <a:lnB w="6350" cap="flat" cmpd="sng" algn="ctr">
-                      <a:solidFill>
-                        <a:srgbClr val="E5E5E5"/>
-                      </a:solidFill>
-                      <a:prstDash val="solid"/>
-                      <a:round/>
-                      <a:headEnd type="none" w="med" len="med"/>
-                      <a:tailEnd type="none" w="med" len="med"/>
-                    </a:lnB>
-                    <a:solidFill>
-                      <a:srgbClr val="FFFFFF"/>
-                    </a:solidFill>
-                  </a:tcPr>
-                </a:tc>
-                <a:tc>
-                  <a:txBody>
-                    <a:bodyPr/>
-                    <a:lstStyle/>
-                    <a:p>
-                      <a:pPr algn="ctr" indent="0" marL="0">
-                        <a:buNone/>
-                      </a:pPr>
-                      <a:r>
-                        <a:rPr lang="en-US" sz="1200" b="1" dirty="0">
-                          <a:solidFill>
-                            <a:srgbClr val="0076A9"/>
-                          </a:solidFill>
-                          <a:latin typeface="Noto Sans TC Bold" pitchFamily="34" charset="0"/>
-                          <a:ea typeface="Noto Sans TC Bold" pitchFamily="34" charset="-122"/>
-                          <a:cs typeface="Noto Sans TC Bold" pitchFamily="34" charset="-120"/>
-                        </a:rPr>
-                        <a:t>1,075</a:t>
-                      </a:r>
-                      <a:endParaRPr lang="en-US" sz="1200" dirty="0">
-                        <a:latin typeface="Noto Sans TC Bold" charset="0"/>
-                        <a:ea typeface="Noto Sans TC Bold" charset="0"/>
-                        <a:cs typeface="Noto Sans TC Bold" charset="0"/>
-                      </a:endParaRPr>
-                    </a:p>
-                  </a:txBody>
-                  <a:tcPr marL="91440" marR="91440" marT="45720" marB="45720" anchor="ctr">
-                    <a:lnL w="6350" cap="flat" cmpd="sng" algn="ctr">
-                      <a:solidFill>
-                        <a:srgbClr val="E5E5E5"/>
-                      </a:solidFill>
-                      <a:prstDash val="solid"/>
-                      <a:round/>
-                      <a:headEnd type="none" w="med" len="med"/>
-                      <a:tailEnd type="none" w="med" len="med"/>
-                    </a:lnL>
-                    <a:lnR w="6350" cap="flat" cmpd="sng" algn="ctr">
-                      <a:solidFill>
-                        <a:srgbClr val="E5E5E5"/>
-                      </a:solidFill>
-                      <a:prstDash val="solid"/>
-                      <a:round/>
-                      <a:headEnd type="none" w="med" len="med"/>
-                      <a:tailEnd type="none" w="med" len="med"/>
-                    </a:lnR>
-                    <a:lnT w="6350" cap="flat" cmpd="sng" algn="ctr">
-                      <a:solidFill>
-                        <a:srgbClr val="E5E5E5"/>
-                      </a:solidFill>
-                      <a:prstDash val="solid"/>
-                      <a:round/>
-                      <a:headEnd type="none" w="med" len="med"/>
-                      <a:tailEnd type="none" w="med" len="med"/>
-                    </a:lnT>
-                    <a:lnB w="6350" cap="flat" cmpd="sng" algn="ctr">
-                      <a:solidFill>
-                        <a:srgbClr val="E5E5E5"/>
-                      </a:solidFill>
-                      <a:prstDash val="solid"/>
-                      <a:round/>
-                      <a:headEnd type="none" w="med" len="med"/>
-                      <a:tailEnd type="none" w="med" len="med"/>
-                    </a:lnB>
-                    <a:solidFill>
-                      <a:srgbClr val="FFFFFF"/>
-                    </a:solidFill>
-                  </a:tcPr>
-                </a:tc>
-                <a:tc>
-                  <a:txBody>
-                    <a:bodyPr/>
-                    <a:lstStyle/>
-                    <a:p>
-                      <a:pPr algn="ctr" indent="0" marL="0">
-                        <a:buNone/>
-                      </a:pPr>
-                      <a:r>
-                        <a:rPr lang="en-US" sz="950" dirty="0">
-                          <a:solidFill>
-                            <a:srgbClr val="888888"/>
-                          </a:solidFill>
-                          <a:latin typeface="Noto Sans TC Medium" pitchFamily="34" charset="0"/>
-                          <a:ea typeface="Noto Sans TC Medium" pitchFamily="34" charset="-122"/>
-                          <a:cs typeface="Noto Sans TC Medium" pitchFamily="34" charset="-120"/>
-                        </a:rPr>
-                        <a:t>－（首次記錄）</a:t>
-                      </a:r>
-                      <a:endParaRPr lang="en-US" sz="950" dirty="0">
-                        <a:latin typeface="Noto Sans TC Medium" charset="0"/>
-                        <a:ea typeface="Noto Sans TC Medium" charset="0"/>
-                        <a:cs typeface="Noto Sans TC Medium" charset="0"/>
-                      </a:endParaRPr>
-                    </a:p>
-                  </a:txBody>
-                  <a:tcPr marL="91440" marR="91440" marT="45720" marB="45720" anchor="ctr">
-                    <a:lnL w="6350" cap="flat" cmpd="sng" algn="ctr">
-                      <a:solidFill>
-                        <a:srgbClr val="E5E5E5"/>
-                      </a:solidFill>
-                      <a:prstDash val="solid"/>
-                      <a:round/>
-                      <a:headEnd type="none" w="med" len="med"/>
-                      <a:tailEnd type="none" w="med" len="med"/>
-                    </a:lnL>
-                    <a:lnR w="6350" cap="flat" cmpd="sng" algn="ctr">
-                      <a:solidFill>
-                        <a:srgbClr val="E5E5E5"/>
-                      </a:solidFill>
-                      <a:prstDash val="solid"/>
-                      <a:round/>
-                      <a:headEnd type="none" w="med" len="med"/>
-                      <a:tailEnd type="none" w="med" len="med"/>
-                    </a:lnR>
-                    <a:lnT w="6350" cap="flat" cmpd="sng" algn="ctr">
-                      <a:solidFill>
-                        <a:srgbClr val="E5E5E5"/>
-                      </a:solidFill>
-                      <a:prstDash val="solid"/>
-                      <a:round/>
-                      <a:headEnd type="none" w="med" len="med"/>
-                      <a:tailEnd type="none" w="med" len="med"/>
-                    </a:lnT>
-                    <a:lnB w="6350" cap="flat" cmpd="sng" algn="ctr">
-                      <a:solidFill>
-                        <a:srgbClr val="E5E5E5"/>
-                      </a:solidFill>
-                      <a:prstDash val="solid"/>
-                      <a:round/>
-                      <a:headEnd type="none" w="med" len="med"/>
-                      <a:tailEnd type="none" w="med" len="med"/>
-                    </a:lnB>
-                    <a:solidFill>
-                      <a:srgbClr val="FFFFFF"/>
-                    </a:solidFill>
-                  </a:tcPr>
-                </a:tc>
-              </a:tr>
-              <a:tr h="384048">
-                <a:tc>
-                  <a:txBody>
-                    <a:bodyPr/>
-                    <a:lstStyle/>
-                    <a:p>
-                      <a:pPr algn="ctr" indent="0" marL="0">
-                        <a:buNone/>
-                      </a:pPr>
-                      <a:r>
-                        <a:rPr lang="en-US" sz="1300" b="1" dirty="0">
-                          <a:solidFill>
-                            <a:srgbClr val="888888"/>
-                          </a:solidFill>
-                          <a:latin typeface="Noto Sans TC Black" pitchFamily="34" charset="0"/>
-                          <a:ea typeface="Noto Sans TC Black" pitchFamily="34" charset="-122"/>
-                          <a:cs typeface="Noto Sans TC Black" pitchFamily="34" charset="-120"/>
-                        </a:rPr>
-                        <a:t>F</a:t>
-                      </a:r>
-                      <a:endParaRPr lang="en-US" sz="1300" dirty="0">
-                        <a:latin typeface="Noto Sans TC Black" charset="0"/>
-                        <a:ea typeface="Noto Sans TC Black" charset="0"/>
-                        <a:cs typeface="Noto Sans TC Black" charset="0"/>
-                      </a:endParaRPr>
-                    </a:p>
-                  </a:txBody>
-                  <a:tcPr marL="91440" marR="91440" marT="45720" marB="45720" anchor="ctr">
-                    <a:lnL w="6350" cap="flat" cmpd="sng" algn="ctr">
-                      <a:solidFill>
-                        <a:srgbClr val="E5E5E5"/>
-                      </a:solidFill>
-                      <a:prstDash val="solid"/>
-                      <a:round/>
-                      <a:headEnd type="none" w="med" len="med"/>
-                      <a:tailEnd type="none" w="med" len="med"/>
-                    </a:lnL>
-                    <a:lnR w="6350" cap="flat" cmpd="sng" algn="ctr">
-                      <a:solidFill>
-                        <a:srgbClr val="E5E5E5"/>
-                      </a:solidFill>
-                      <a:prstDash val="solid"/>
-                      <a:round/>
-                      <a:headEnd type="none" w="med" len="med"/>
-                      <a:tailEnd type="none" w="med" len="med"/>
-                    </a:lnR>
-                    <a:lnT w="6350" cap="flat" cmpd="sng" algn="ctr">
-                      <a:solidFill>
-                        <a:srgbClr val="E5E5E5"/>
-                      </a:solidFill>
-                      <a:prstDash val="solid"/>
-                      <a:round/>
-                      <a:headEnd type="none" w="med" len="med"/>
-                      <a:tailEnd type="none" w="med" len="med"/>
-                    </a:lnT>
-                    <a:lnB w="6350" cap="flat" cmpd="sng" algn="ctr">
-                      <a:solidFill>
-                        <a:srgbClr val="E5E5E5"/>
-                      </a:solidFill>
-                      <a:prstDash val="solid"/>
-                      <a:round/>
-                      <a:headEnd type="none" w="med" len="med"/>
-                      <a:tailEnd type="none" w="med" len="med"/>
-                    </a:lnB>
-                    <a:solidFill>
-                      <a:srgbClr val="F7F7F9"/>
-                    </a:solidFill>
-                  </a:tcPr>
-                </a:tc>
-                <a:tc>
-                  <a:txBody>
-                    <a:bodyPr/>
-                    <a:lstStyle/>
-                    <a:p>
-                      <a:pPr algn="ctr" indent="0" marL="0">
-                        <a:buNone/>
-                      </a:pPr>
-                      <a:r>
-                        <a:rPr lang="en-US" sz="1050" dirty="0">
-                          <a:solidFill>
-                            <a:srgbClr val="888888"/>
-                          </a:solidFill>
-                          <a:latin typeface="Noto Sans TC Medium" pitchFamily="34" charset="0"/>
-                          <a:ea typeface="Noto Sans TC Medium" pitchFamily="34" charset="-122"/>
-                          <a:cs typeface="Noto Sans TC Medium" pitchFamily="34" charset="-120"/>
-                        </a:rPr>
-                        <a:t>第 510 名</a:t>
-                      </a:r>
-                      <a:endParaRPr lang="en-US" sz="1050" dirty="0">
-                        <a:latin typeface="Noto Sans TC Medium" charset="0"/>
-                        <a:ea typeface="Noto Sans TC Medium" charset="0"/>
-                        <a:cs typeface="Noto Sans TC Medium" charset="0"/>
-                      </a:endParaRPr>
-                    </a:p>
-                  </a:txBody>
-                  <a:tcPr marL="91440" marR="91440" marT="45720" marB="45720" anchor="ctr">
-                    <a:lnL w="6350" cap="flat" cmpd="sng" algn="ctr">
-                      <a:solidFill>
-                        <a:srgbClr val="E5E5E5"/>
-                      </a:solidFill>
-                      <a:prstDash val="solid"/>
-                      <a:round/>
-                      <a:headEnd type="none" w="med" len="med"/>
-                      <a:tailEnd type="none" w="med" len="med"/>
-                    </a:lnL>
-                    <a:lnR w="6350" cap="flat" cmpd="sng" algn="ctr">
-                      <a:solidFill>
-                        <a:srgbClr val="E5E5E5"/>
-                      </a:solidFill>
-                      <a:prstDash val="solid"/>
-                      <a:round/>
-                      <a:headEnd type="none" w="med" len="med"/>
-                      <a:tailEnd type="none" w="med" len="med"/>
-                    </a:lnR>
-                    <a:lnT w="6350" cap="flat" cmpd="sng" algn="ctr">
-                      <a:solidFill>
-                        <a:srgbClr val="E5E5E5"/>
-                      </a:solidFill>
-                      <a:prstDash val="solid"/>
-                      <a:round/>
-                      <a:headEnd type="none" w="med" len="med"/>
-                      <a:tailEnd type="none" w="med" len="med"/>
-                    </a:lnT>
-                    <a:lnB w="6350" cap="flat" cmpd="sng" algn="ctr">
-                      <a:solidFill>
-                        <a:srgbClr val="E5E5E5"/>
-                      </a:solidFill>
-                      <a:prstDash val="solid"/>
-                      <a:round/>
-                      <a:headEnd type="none" w="med" len="med"/>
-                      <a:tailEnd type="none" w="med" len="med"/>
-                    </a:lnB>
-                    <a:solidFill>
-                      <a:srgbClr val="F7F7F9"/>
-                    </a:solidFill>
-                  </a:tcPr>
-                </a:tc>
-                <a:tc>
-                  <a:txBody>
-                    <a:bodyPr/>
-                    <a:lstStyle/>
-                    <a:p>
-                      <a:pPr algn="ctr" indent="0" marL="0">
-                        <a:buNone/>
-                      </a:pPr>
-                      <a:r>
-                        <a:rPr lang="en-US" sz="1100" dirty="0">
-                          <a:solidFill>
-                            <a:srgbClr val="333333"/>
-                          </a:solidFill>
-                          <a:latin typeface="Noto Sans TC Medium" pitchFamily="34" charset="0"/>
-                          <a:ea typeface="Noto Sans TC Medium" pitchFamily="34" charset="-122"/>
-                          <a:cs typeface="Noto Sans TC Medium" pitchFamily="34" charset="-120"/>
-                        </a:rPr>
-                        <a:t>雲林</a:t>
-                      </a:r>
-                      <a:endParaRPr lang="en-US" sz="1100" dirty="0">
-                        <a:latin typeface="Noto Sans TC Medium" charset="0"/>
-                        <a:ea typeface="Noto Sans TC Medium" charset="0"/>
-                        <a:cs typeface="Noto Sans TC Medium" charset="0"/>
-                      </a:endParaRPr>
-                    </a:p>
-                  </a:txBody>
-                  <a:tcPr marL="91440" marR="91440" marT="45720" marB="45720" anchor="ctr">
-                    <a:lnL w="6350" cap="flat" cmpd="sng" algn="ctr">
-                      <a:solidFill>
-                        <a:srgbClr val="E5E5E5"/>
-                      </a:solidFill>
-                      <a:prstDash val="solid"/>
-                      <a:round/>
-                      <a:headEnd type="none" w="med" len="med"/>
-                      <a:tailEnd type="none" w="med" len="med"/>
-                    </a:lnL>
-                    <a:lnR w="6350" cap="flat" cmpd="sng" algn="ctr">
-                      <a:solidFill>
-                        <a:srgbClr val="E5E5E5"/>
-                      </a:solidFill>
-                      <a:prstDash val="solid"/>
-                      <a:round/>
-                      <a:headEnd type="none" w="med" len="med"/>
-                      <a:tailEnd type="none" w="med" len="med"/>
-                    </a:lnR>
-                    <a:lnT w="6350" cap="flat" cmpd="sng" algn="ctr">
-                      <a:solidFill>
-                        <a:srgbClr val="E5E5E5"/>
-                      </a:solidFill>
-                      <a:prstDash val="solid"/>
-                      <a:round/>
-                      <a:headEnd type="none" w="med" len="med"/>
-                      <a:tailEnd type="none" w="med" len="med"/>
-                    </a:lnT>
-                    <a:lnB w="6350" cap="flat" cmpd="sng" algn="ctr">
-                      <a:solidFill>
-                        <a:srgbClr val="E5E5E5"/>
-                      </a:solidFill>
-                      <a:prstDash val="solid"/>
-                      <a:round/>
-                      <a:headEnd type="none" w="med" len="med"/>
-                      <a:tailEnd type="none" w="med" len="med"/>
-                    </a:lnB>
-                    <a:solidFill>
-                      <a:srgbClr val="F7F7F9"/>
-                    </a:solidFill>
-                  </a:tcPr>
-                </a:tc>
-                <a:tc>
-                  <a:txBody>
-                    <a:bodyPr/>
-                    <a:lstStyle/>
-                    <a:p>
-                      <a:pPr algn="l" indent="0" marL="0">
-                        <a:buNone/>
-                      </a:pPr>
-                      <a:r>
-                        <a:rPr lang="en-US" sz="1100" b="1" dirty="0">
-                          <a:solidFill>
-                            <a:srgbClr val="333333"/>
-                          </a:solidFill>
-                          <a:latin typeface="Noto Sans TC Bold" pitchFamily="34" charset="0"/>
-                          <a:ea typeface="Noto Sans TC Bold" pitchFamily="34" charset="-122"/>
-                          <a:cs typeface="Noto Sans TC Bold" pitchFamily="34" charset="-120"/>
-                        </a:rPr>
-                        <a:t>全聯福利中心林內中正店站</a:t>
-                      </a:r>
-                      <a:endParaRPr lang="en-US" sz="1100" dirty="0">
-                        <a:latin typeface="Noto Sans TC Bold" charset="0"/>
-                        <a:ea typeface="Noto Sans TC Bold" charset="0"/>
-                        <a:cs typeface="Noto Sans TC Bold" charset="0"/>
-                      </a:endParaRPr>
-                    </a:p>
-                  </a:txBody>
-                  <a:tcPr marL="91440" marR="91440" marT="45720" marB="45720" anchor="ctr">
-                    <a:lnL w="6350" cap="flat" cmpd="sng" algn="ctr">
-                      <a:solidFill>
-                        <a:srgbClr val="E5E5E5"/>
-                      </a:solidFill>
-                      <a:prstDash val="solid"/>
-                      <a:round/>
-                      <a:headEnd type="none" w="med" len="med"/>
-                      <a:tailEnd type="none" w="med" len="med"/>
-                    </a:lnL>
-                    <a:lnR w="6350" cap="flat" cmpd="sng" algn="ctr">
-                      <a:solidFill>
-                        <a:srgbClr val="E5E5E5"/>
-                      </a:solidFill>
-                      <a:prstDash val="solid"/>
-                      <a:round/>
-                      <a:headEnd type="none" w="med" len="med"/>
-                      <a:tailEnd type="none" w="med" len="med"/>
-                    </a:lnR>
-                    <a:lnT w="6350" cap="flat" cmpd="sng" algn="ctr">
-                      <a:solidFill>
-                        <a:srgbClr val="E5E5E5"/>
-                      </a:solidFill>
-                      <a:prstDash val="solid"/>
-                      <a:round/>
-                      <a:headEnd type="none" w="med" len="med"/>
-                      <a:tailEnd type="none" w="med" len="med"/>
-                    </a:lnT>
-                    <a:lnB w="6350" cap="flat" cmpd="sng" algn="ctr">
-                      <a:solidFill>
-                        <a:srgbClr val="E5E5E5"/>
-                      </a:solidFill>
-                      <a:prstDash val="solid"/>
-                      <a:round/>
-                      <a:headEnd type="none" w="med" len="med"/>
-                      <a:tailEnd type="none" w="med" len="med"/>
-                    </a:lnB>
-                    <a:solidFill>
-                      <a:srgbClr val="F7F7F9"/>
-                    </a:solidFill>
-                  </a:tcPr>
-                </a:tc>
-                <a:tc>
-                  <a:txBody>
-                    <a:bodyPr/>
-                    <a:lstStyle/>
-                    <a:p>
-                      <a:pPr indent="0" marL="0">
-                        <a:buNone/>
-                      </a:pPr>
-                      <a:endParaRPr lang="en-US" sz="1200" dirty="0"/>
-                    </a:p>
-                  </a:txBody>
-                  <a:tcPr marL="91440" marR="91440" marT="45720" marB="45720">
-                    <a:lnL w="6350" cap="flat" cmpd="sng" algn="ctr">
-                      <a:solidFill>
-                        <a:srgbClr val="E5E5E5"/>
-                      </a:solidFill>
-                      <a:prstDash val="solid"/>
-                      <a:round/>
-                      <a:headEnd type="none" w="med" len="med"/>
-                      <a:tailEnd type="none" w="med" len="med"/>
-                    </a:lnL>
-                    <a:lnR w="6350" cap="flat" cmpd="sng" algn="ctr">
-                      <a:solidFill>
-                        <a:srgbClr val="E5E5E5"/>
-                      </a:solidFill>
-                      <a:prstDash val="solid"/>
-                      <a:round/>
-                      <a:headEnd type="none" w="med" len="med"/>
-                      <a:tailEnd type="none" w="med" len="med"/>
-                    </a:lnR>
-                    <a:lnT w="6350" cap="flat" cmpd="sng" algn="ctr">
-                      <a:solidFill>
-                        <a:srgbClr val="E5E5E5"/>
-                      </a:solidFill>
-                      <a:prstDash val="solid"/>
-                      <a:round/>
-                      <a:headEnd type="none" w="med" len="med"/>
-                      <a:tailEnd type="none" w="med" len="med"/>
-                    </a:lnT>
-                    <a:lnB w="6350" cap="flat" cmpd="sng" algn="ctr">
-                      <a:solidFill>
-                        <a:srgbClr val="E5E5E5"/>
-                      </a:solidFill>
-                      <a:prstDash val="solid"/>
-                      <a:round/>
-                      <a:headEnd type="none" w="med" len="med"/>
-                      <a:tailEnd type="none" w="med" len="med"/>
-                    </a:lnB>
-                    <a:solidFill>
-                      <a:srgbClr val="F7F7F9"/>
-                    </a:solidFill>
-                  </a:tcPr>
-                </a:tc>
-                <a:tc>
-                  <a:txBody>
-                    <a:bodyPr/>
-                    <a:lstStyle/>
-                    <a:p>
-                      <a:pPr indent="0" marL="0">
-                        <a:buNone/>
-                      </a:pPr>
-                      <a:endParaRPr lang="en-US" sz="1200" dirty="0"/>
-                    </a:p>
-                  </a:txBody>
-                  <a:tcPr marL="91440" marR="91440" marT="45720" marB="45720">
-                    <a:lnL w="6350" cap="flat" cmpd="sng" algn="ctr">
-                      <a:solidFill>
-                        <a:srgbClr val="E5E5E5"/>
-                      </a:solidFill>
-                      <a:prstDash val="solid"/>
-                      <a:round/>
-                      <a:headEnd type="none" w="med" len="med"/>
-                      <a:tailEnd type="none" w="med" len="med"/>
-                    </a:lnL>
-                    <a:lnR w="6350" cap="flat" cmpd="sng" algn="ctr">
-                      <a:solidFill>
-                        <a:srgbClr val="E5E5E5"/>
-                      </a:solidFill>
-                      <a:prstDash val="solid"/>
-                      <a:round/>
-                      <a:headEnd type="none" w="med" len="med"/>
-                      <a:tailEnd type="none" w="med" len="med"/>
-                    </a:lnR>
-                    <a:lnT w="6350" cap="flat" cmpd="sng" algn="ctr">
-                      <a:solidFill>
-                        <a:srgbClr val="E5E5E5"/>
-                      </a:solidFill>
-                      <a:prstDash val="solid"/>
-                      <a:round/>
-                      <a:headEnd type="none" w="med" len="med"/>
-                      <a:tailEnd type="none" w="med" len="med"/>
-                    </a:lnT>
-                    <a:lnB w="6350" cap="flat" cmpd="sng" algn="ctr">
-                      <a:solidFill>
-                        <a:srgbClr val="E5E5E5"/>
-                      </a:solidFill>
-                      <a:prstDash val="solid"/>
-                      <a:round/>
-                      <a:headEnd type="none" w="med" len="med"/>
-                      <a:tailEnd type="none" w="med" len="med"/>
-                    </a:lnB>
-                    <a:solidFill>
-                      <a:srgbClr val="F7F7F9"/>
-                    </a:solidFill>
-                  </a:tcPr>
-                </a:tc>
-                <a:tc>
-                  <a:txBody>
-                    <a:bodyPr/>
-                    <a:lstStyle/>
-                    <a:p>
-                      <a:pPr algn="ctr" indent="0" marL="0">
-                        <a:buNone/>
-                      </a:pPr>
-                      <a:r>
-                        <a:rPr lang="en-US" sz="1200" b="1" dirty="0">
-                          <a:solidFill>
-                            <a:srgbClr val="0076A9"/>
-                          </a:solidFill>
-                          <a:latin typeface="Noto Sans TC Bold" pitchFamily="34" charset="0"/>
-                          <a:ea typeface="Noto Sans TC Bold" pitchFamily="34" charset="-122"/>
-                          <a:cs typeface="Noto Sans TC Bold" pitchFamily="34" charset="-120"/>
-                        </a:rPr>
-                        <a:t>1,100</a:t>
+                        <a:t>1,392</a:t>
                       </a:r>
                       <a:endParaRPr lang="en-US" sz="1200" dirty="0">
                         <a:latin typeface="Noto Sans TC Bold" charset="0"/>
@@ -13480,13 +13480,13 @@
             </a:avLst>
           </a:prstGeom>
           <a:solidFill>
-            <a:srgbClr val="FF5000">
+            <a:srgbClr val="0076A9">
               <a:alpha val="15000"/>
             </a:srgbClr>
           </a:solidFill>
           <a:ln w="12700">
             <a:solidFill>
-              <a:srgbClr val="FF5000"/>
+              <a:srgbClr val="0076A9"/>
             </a:solidFill>
             <a:prstDash val="solid"/>
           </a:ln>
@@ -13519,13 +13519,13 @@
             <a:r>
               <a:rPr lang="en-US" sz="1000" b="1" dirty="0">
                 <a:solidFill>
-                  <a:srgbClr val="FF5000"/>
+                  <a:srgbClr val="0076A9"/>
                 </a:solidFill>
                 <a:latin typeface="Noto Sans TC Bold" pitchFamily="34" charset="0"/>
                 <a:ea typeface="Noto Sans TC Bold" pitchFamily="34" charset="-122"/>
                 <a:cs typeface="Noto Sans TC Bold" pitchFamily="34" charset="-120"/>
               </a:rPr>
-              <a:t>H30</a:t>
+              <a:t>AI-HD</a:t>
             </a:r>
             <a:endParaRPr lang="en-US" sz="1000" dirty="0"/>
           </a:p>
@@ -13548,13 +13548,13 @@
             </a:avLst>
           </a:prstGeom>
           <a:solidFill>
-            <a:srgbClr val="FF5000">
+            <a:srgbClr val="060E9F">
               <a:alpha val="15000"/>
             </a:srgbClr>
           </a:solidFill>
           <a:ln w="12700">
             <a:solidFill>
-              <a:srgbClr val="FF5000"/>
+              <a:srgbClr val="060E9F"/>
             </a:solidFill>
             <a:prstDash val="solid"/>
           </a:ln>
@@ -13587,13 +13587,13 @@
             <a:r>
               <a:rPr lang="en-US" sz="1000" b="1" dirty="0">
                 <a:solidFill>
-                  <a:srgbClr val="FF5000"/>
+                  <a:srgbClr val="060E9F"/>
                 </a:solidFill>
                 <a:latin typeface="Noto Sans TC Bold" pitchFamily="34" charset="0"/>
                 <a:ea typeface="Noto Sans TC Bold" pitchFamily="34" charset="-122"/>
                 <a:cs typeface="Noto Sans TC Bold" pitchFamily="34" charset="-120"/>
               </a:rPr>
-              <a:t>H30</a:t>
+              <a:t>AI-4</a:t>
             </a:r>
             <a:endParaRPr lang="en-US" sz="1000" dirty="0"/>
           </a:p>
@@ -13607,7 +13607,347 @@
         </p:nvSpPr>
         <p:spPr>
           <a:xfrm>
-            <a:off x="7315200" y="2450592"/>
+            <a:off x="5966460" y="2834640"/>
+            <a:ext cx="960120" cy="256032"/>
+          </a:xfrm>
+          <a:prstGeom prst="roundRect">
+            <a:avLst>
+              <a:gd name="adj" fmla="val 50000"/>
+            </a:avLst>
+          </a:prstGeom>
+          <a:solidFill>
+            <a:srgbClr val="060E9F">
+              <a:alpha val="15000"/>
+            </a:srgbClr>
+          </a:solidFill>
+          <a:ln w="12700">
+            <a:solidFill>
+              <a:srgbClr val="060E9F"/>
+            </a:solidFill>
+            <a:prstDash val="solid"/>
+          </a:ln>
+        </p:spPr>
+      </p:sp>
+      <p:sp>
+        <p:nvSpPr>
+          <p:cNvPr id="18" name="Text 14"/>
+          <p:cNvSpPr/>
+          <p:nvPr/>
+        </p:nvSpPr>
+        <p:spPr>
+          <a:xfrm>
+            <a:off x="5966460" y="2834640"/>
+            <a:ext cx="960120" cy="256032"/>
+          </a:xfrm>
+          <a:prstGeom prst="rect">
+            <a:avLst/>
+          </a:prstGeom>
+          <a:noFill/>
+          <a:ln/>
+        </p:spPr>
+        <p:txBody>
+          <a:bodyPr wrap="square" lIns="0" tIns="0" rIns="0" bIns="0" rtlCol="0" anchor="ctr"/>
+          <a:lstStyle/>
+          <a:p>
+            <a:pPr algn="ctr" indent="0" marL="0">
+              <a:buNone/>
+            </a:pPr>
+            <a:r>
+              <a:rPr lang="en-US" sz="1000" b="1" dirty="0">
+                <a:solidFill>
+                  <a:srgbClr val="060E9F"/>
+                </a:solidFill>
+                <a:latin typeface="Noto Sans TC Bold" pitchFamily="34" charset="0"/>
+                <a:ea typeface="Noto Sans TC Bold" pitchFamily="34" charset="-122"/>
+                <a:cs typeface="Noto Sans TC Bold" pitchFamily="34" charset="-120"/>
+              </a:rPr>
+              <a:t>AI-4</a:t>
+            </a:r>
+            <a:endParaRPr lang="en-US" sz="1000" dirty="0"/>
+          </a:p>
+        </p:txBody>
+      </p:sp>
+      <p:sp>
+        <p:nvSpPr>
+          <p:cNvPr id="19" name="Shape 15"/>
+          <p:cNvSpPr/>
+          <p:nvPr/>
+        </p:nvSpPr>
+        <p:spPr>
+          <a:xfrm>
+            <a:off x="5966460" y="3218688"/>
+            <a:ext cx="960120" cy="256032"/>
+          </a:xfrm>
+          <a:prstGeom prst="roundRect">
+            <a:avLst>
+              <a:gd name="adj" fmla="val 50000"/>
+            </a:avLst>
+          </a:prstGeom>
+          <a:solidFill>
+            <a:srgbClr val="0076A9">
+              <a:alpha val="15000"/>
+            </a:srgbClr>
+          </a:solidFill>
+          <a:ln w="12700">
+            <a:solidFill>
+              <a:srgbClr val="0076A9"/>
+            </a:solidFill>
+            <a:prstDash val="solid"/>
+          </a:ln>
+        </p:spPr>
+      </p:sp>
+      <p:sp>
+        <p:nvSpPr>
+          <p:cNvPr id="20" name="Text 16"/>
+          <p:cNvSpPr/>
+          <p:nvPr/>
+        </p:nvSpPr>
+        <p:spPr>
+          <a:xfrm>
+            <a:off x="5966460" y="3218688"/>
+            <a:ext cx="960120" cy="256032"/>
+          </a:xfrm>
+          <a:prstGeom prst="rect">
+            <a:avLst/>
+          </a:prstGeom>
+          <a:noFill/>
+          <a:ln/>
+        </p:spPr>
+        <p:txBody>
+          <a:bodyPr wrap="square" lIns="0" tIns="0" rIns="0" bIns="0" rtlCol="0" anchor="ctr"/>
+          <a:lstStyle/>
+          <a:p>
+            <a:pPr algn="ctr" indent="0" marL="0">
+              <a:buNone/>
+            </a:pPr>
+            <a:r>
+              <a:rPr lang="en-US" sz="1000" b="1" dirty="0">
+                <a:solidFill>
+                  <a:srgbClr val="0076A9"/>
+                </a:solidFill>
+                <a:latin typeface="Noto Sans TC Bold" pitchFamily="34" charset="0"/>
+                <a:ea typeface="Noto Sans TC Bold" pitchFamily="34" charset="-122"/>
+                <a:cs typeface="Noto Sans TC Bold" pitchFamily="34" charset="-120"/>
+              </a:rPr>
+              <a:t>AI-HD</a:t>
+            </a:r>
+            <a:endParaRPr lang="en-US" sz="1000" dirty="0"/>
+          </a:p>
+        </p:txBody>
+      </p:sp>
+      <p:sp>
+        <p:nvSpPr>
+          <p:cNvPr id="21" name="Shape 17"/>
+          <p:cNvSpPr/>
+          <p:nvPr/>
+        </p:nvSpPr>
+        <p:spPr>
+          <a:xfrm>
+            <a:off x="5966460" y="3602736"/>
+            <a:ext cx="960120" cy="256032"/>
+          </a:xfrm>
+          <a:prstGeom prst="roundRect">
+            <a:avLst>
+              <a:gd name="adj" fmla="val 50000"/>
+            </a:avLst>
+          </a:prstGeom>
+          <a:solidFill>
+            <a:srgbClr val="060E9F">
+              <a:alpha val="15000"/>
+            </a:srgbClr>
+          </a:solidFill>
+          <a:ln w="12700">
+            <a:solidFill>
+              <a:srgbClr val="060E9F"/>
+            </a:solidFill>
+            <a:prstDash val="solid"/>
+          </a:ln>
+        </p:spPr>
+      </p:sp>
+      <p:sp>
+        <p:nvSpPr>
+          <p:cNvPr id="22" name="Text 18"/>
+          <p:cNvSpPr/>
+          <p:nvPr/>
+        </p:nvSpPr>
+        <p:spPr>
+          <a:xfrm>
+            <a:off x="5966460" y="3602736"/>
+            <a:ext cx="960120" cy="256032"/>
+          </a:xfrm>
+          <a:prstGeom prst="rect">
+            <a:avLst/>
+          </a:prstGeom>
+          <a:noFill/>
+          <a:ln/>
+        </p:spPr>
+        <p:txBody>
+          <a:bodyPr wrap="square" lIns="0" tIns="0" rIns="0" bIns="0" rtlCol="0" anchor="ctr"/>
+          <a:lstStyle/>
+          <a:p>
+            <a:pPr algn="ctr" indent="0" marL="0">
+              <a:buNone/>
+            </a:pPr>
+            <a:r>
+              <a:rPr lang="en-US" sz="1000" b="1" dirty="0">
+                <a:solidFill>
+                  <a:srgbClr val="060E9F"/>
+                </a:solidFill>
+                <a:latin typeface="Noto Sans TC Bold" pitchFamily="34" charset="0"/>
+                <a:ea typeface="Noto Sans TC Bold" pitchFamily="34" charset="-122"/>
+                <a:cs typeface="Noto Sans TC Bold" pitchFamily="34" charset="-120"/>
+              </a:rPr>
+              <a:t>AI-4</a:t>
+            </a:r>
+            <a:endParaRPr lang="en-US" sz="1000" dirty="0"/>
+          </a:p>
+        </p:txBody>
+      </p:sp>
+      <p:sp>
+        <p:nvSpPr>
+          <p:cNvPr id="23" name="Shape 19"/>
+          <p:cNvSpPr/>
+          <p:nvPr/>
+        </p:nvSpPr>
+        <p:spPr>
+          <a:xfrm>
+            <a:off x="5966460" y="3986784"/>
+            <a:ext cx="960120" cy="256032"/>
+          </a:xfrm>
+          <a:prstGeom prst="roundRect">
+            <a:avLst>
+              <a:gd name="adj" fmla="val 50000"/>
+            </a:avLst>
+          </a:prstGeom>
+          <a:solidFill>
+            <a:srgbClr val="060E9F">
+              <a:alpha val="15000"/>
+            </a:srgbClr>
+          </a:solidFill>
+          <a:ln w="12700">
+            <a:solidFill>
+              <a:srgbClr val="060E9F"/>
+            </a:solidFill>
+            <a:prstDash val="solid"/>
+          </a:ln>
+        </p:spPr>
+      </p:sp>
+      <p:sp>
+        <p:nvSpPr>
+          <p:cNvPr id="24" name="Text 20"/>
+          <p:cNvSpPr/>
+          <p:nvPr/>
+        </p:nvSpPr>
+        <p:spPr>
+          <a:xfrm>
+            <a:off x="5966460" y="3986784"/>
+            <a:ext cx="960120" cy="256032"/>
+          </a:xfrm>
+          <a:prstGeom prst="rect">
+            <a:avLst/>
+          </a:prstGeom>
+          <a:noFill/>
+          <a:ln/>
+        </p:spPr>
+        <p:txBody>
+          <a:bodyPr wrap="square" lIns="0" tIns="0" rIns="0" bIns="0" rtlCol="0" anchor="ctr"/>
+          <a:lstStyle/>
+          <a:p>
+            <a:pPr algn="ctr" indent="0" marL="0">
+              <a:buNone/>
+            </a:pPr>
+            <a:r>
+              <a:rPr lang="en-US" sz="1000" b="1" dirty="0">
+                <a:solidFill>
+                  <a:srgbClr val="060E9F"/>
+                </a:solidFill>
+                <a:latin typeface="Noto Sans TC Bold" pitchFamily="34" charset="0"/>
+                <a:ea typeface="Noto Sans TC Bold" pitchFamily="34" charset="-122"/>
+                <a:cs typeface="Noto Sans TC Bold" pitchFamily="34" charset="-120"/>
+              </a:rPr>
+              <a:t>AI-4</a:t>
+            </a:r>
+            <a:endParaRPr lang="en-US" sz="1000" dirty="0"/>
+          </a:p>
+        </p:txBody>
+      </p:sp>
+      <p:sp>
+        <p:nvSpPr>
+          <p:cNvPr id="25" name="Shape 21"/>
+          <p:cNvSpPr/>
+          <p:nvPr/>
+        </p:nvSpPr>
+        <p:spPr>
+          <a:xfrm>
+            <a:off x="5966460" y="4370832"/>
+            <a:ext cx="960120" cy="256032"/>
+          </a:xfrm>
+          <a:prstGeom prst="roundRect">
+            <a:avLst>
+              <a:gd name="adj" fmla="val 50000"/>
+            </a:avLst>
+          </a:prstGeom>
+          <a:solidFill>
+            <a:srgbClr val="060E9F">
+              <a:alpha val="15000"/>
+            </a:srgbClr>
+          </a:solidFill>
+          <a:ln w="12700">
+            <a:solidFill>
+              <a:srgbClr val="060E9F"/>
+            </a:solidFill>
+            <a:prstDash val="solid"/>
+          </a:ln>
+        </p:spPr>
+      </p:sp>
+      <p:sp>
+        <p:nvSpPr>
+          <p:cNvPr id="26" name="Text 22"/>
+          <p:cNvSpPr/>
+          <p:nvPr/>
+        </p:nvSpPr>
+        <p:spPr>
+          <a:xfrm>
+            <a:off x="5966460" y="4370832"/>
+            <a:ext cx="960120" cy="256032"/>
+          </a:xfrm>
+          <a:prstGeom prst="rect">
+            <a:avLst/>
+          </a:prstGeom>
+          <a:noFill/>
+          <a:ln/>
+        </p:spPr>
+        <p:txBody>
+          <a:bodyPr wrap="square" lIns="0" tIns="0" rIns="0" bIns="0" rtlCol="0" anchor="ctr"/>
+          <a:lstStyle/>
+          <a:p>
+            <a:pPr algn="ctr" indent="0" marL="0">
+              <a:buNone/>
+            </a:pPr>
+            <a:r>
+              <a:rPr lang="en-US" sz="1000" b="1" dirty="0">
+                <a:solidFill>
+                  <a:srgbClr val="060E9F"/>
+                </a:solidFill>
+                <a:latin typeface="Noto Sans TC Bold" pitchFamily="34" charset="0"/>
+                <a:ea typeface="Noto Sans TC Bold" pitchFamily="34" charset="-122"/>
+                <a:cs typeface="Noto Sans TC Bold" pitchFamily="34" charset="-120"/>
+              </a:rPr>
+              <a:t>AI-4</a:t>
+            </a:r>
+            <a:endParaRPr lang="en-US" sz="1000" dirty="0"/>
+          </a:p>
+        </p:txBody>
+      </p:sp>
+      <p:sp>
+        <p:nvSpPr>
+          <p:cNvPr id="27" name="Shape 23"/>
+          <p:cNvSpPr/>
+          <p:nvPr/>
+        </p:nvSpPr>
+        <p:spPr>
+          <a:xfrm>
+            <a:off x="7315200" y="4370832"/>
             <a:ext cx="1188720" cy="256032"/>
           </a:xfrm>
           <a:prstGeom prst="roundRect">
@@ -13628,7 +13968,7 @@
       </p:sp>
       <p:pic>
         <p:nvPicPr>
-          <p:cNvPr id="18" name="Image 1" descr="D:\info\0507_Weekly-Report\Operations-Weekly-Report\automation\icons\key_blue.png">    </p:cNvPr>
+          <p:cNvPr id="28" name="Image 1" descr="D:\info\0507_Weekly-Report\Operations-Weekly-Report\automation\icons\key_blue.png">    </p:cNvPr>
           <p:cNvPicPr>
             <a:picLocks noChangeAspect="1"/>
           </p:cNvPicPr>
@@ -13642,7 +13982,7 @@
         </p:blipFill>
         <p:spPr>
           <a:xfrm>
-            <a:off x="7443216" y="2505456"/>
+            <a:off x="7443216" y="4425696"/>
             <a:ext cx="146304" cy="146304"/>
           </a:xfrm>
           <a:prstGeom prst="rect">
@@ -13652,13 +13992,13 @@
       </p:pic>
       <p:sp>
         <p:nvSpPr>
-          <p:cNvPr id="19" name="Text 14"/>
+          <p:cNvPr id="29" name="Text 24"/>
           <p:cNvSpPr/>
           <p:nvPr/>
         </p:nvSpPr>
         <p:spPr>
           <a:xfrm>
-            <a:off x="7607808" y="2450592"/>
+            <a:off x="7607808" y="4370832"/>
             <a:ext cx="822960" cy="256032"/>
           </a:xfrm>
           <a:prstGeom prst="rect">
@@ -13691,13 +14031,13 @@
       </p:sp>
       <p:sp>
         <p:nvSpPr>
-          <p:cNvPr id="20" name="Shape 15"/>
+          <p:cNvPr id="30" name="Shape 25"/>
           <p:cNvSpPr/>
           <p:nvPr/>
         </p:nvSpPr>
         <p:spPr>
           <a:xfrm>
-            <a:off x="5966460" y="2834640"/>
+            <a:off x="5966460" y="4754880"/>
             <a:ext cx="960120" cy="256032"/>
           </a:xfrm>
           <a:prstGeom prst="roundRect">
@@ -13720,13 +14060,13 @@
       </p:sp>
       <p:sp>
         <p:nvSpPr>
-          <p:cNvPr id="21" name="Text 16"/>
+          <p:cNvPr id="31" name="Text 26"/>
           <p:cNvSpPr/>
           <p:nvPr/>
         </p:nvSpPr>
         <p:spPr>
           <a:xfrm>
-            <a:off x="5966460" y="2834640"/>
+            <a:off x="5966460" y="4754880"/>
             <a:ext cx="960120" cy="256032"/>
           </a:xfrm>
           <a:prstGeom prst="rect">
@@ -13759,437 +14099,7 @@
       </p:sp>
       <p:sp>
         <p:nvSpPr>
-          <p:cNvPr id="22" name="Shape 17"/>
-          <p:cNvSpPr/>
-          <p:nvPr/>
-        </p:nvSpPr>
-        <p:spPr>
-          <a:xfrm>
-            <a:off x="5966460" y="3218688"/>
-            <a:ext cx="960120" cy="256032"/>
-          </a:xfrm>
-          <a:prstGeom prst="roundRect">
-            <a:avLst>
-              <a:gd name="adj" fmla="val 50000"/>
-            </a:avLst>
-          </a:prstGeom>
-          <a:solidFill>
-            <a:srgbClr val="060E9F">
-              <a:alpha val="15000"/>
-            </a:srgbClr>
-          </a:solidFill>
-          <a:ln w="12700">
-            <a:solidFill>
-              <a:srgbClr val="060E9F"/>
-            </a:solidFill>
-            <a:prstDash val="solid"/>
-          </a:ln>
-        </p:spPr>
-      </p:sp>
-      <p:sp>
-        <p:nvSpPr>
-          <p:cNvPr id="23" name="Text 18"/>
-          <p:cNvSpPr/>
-          <p:nvPr/>
-        </p:nvSpPr>
-        <p:spPr>
-          <a:xfrm>
-            <a:off x="5966460" y="3218688"/>
-            <a:ext cx="960120" cy="256032"/>
-          </a:xfrm>
-          <a:prstGeom prst="rect">
-            <a:avLst/>
-          </a:prstGeom>
-          <a:noFill/>
-          <a:ln/>
-        </p:spPr>
-        <p:txBody>
-          <a:bodyPr wrap="square" lIns="0" tIns="0" rIns="0" bIns="0" rtlCol="0" anchor="ctr"/>
-          <a:lstStyle/>
-          <a:p>
-            <a:pPr algn="ctr" indent="0" marL="0">
-              <a:buNone/>
-            </a:pPr>
-            <a:r>
-              <a:rPr lang="en-US" sz="1000" b="1" dirty="0">
-                <a:solidFill>
-                  <a:srgbClr val="060E9F"/>
-                </a:solidFill>
-                <a:latin typeface="Noto Sans TC Bold" pitchFamily="34" charset="0"/>
-                <a:ea typeface="Noto Sans TC Bold" pitchFamily="34" charset="-122"/>
-                <a:cs typeface="Noto Sans TC Bold" pitchFamily="34" charset="-120"/>
-              </a:rPr>
-              <a:t>AI-4</a:t>
-            </a:r>
-            <a:endParaRPr lang="en-US" sz="1000" dirty="0"/>
-          </a:p>
-        </p:txBody>
-      </p:sp>
-      <p:sp>
-        <p:nvSpPr>
-          <p:cNvPr id="24" name="Shape 19"/>
-          <p:cNvSpPr/>
-          <p:nvPr/>
-        </p:nvSpPr>
-        <p:spPr>
-          <a:xfrm>
-            <a:off x="5966460" y="3602736"/>
-            <a:ext cx="960120" cy="256032"/>
-          </a:xfrm>
-          <a:prstGeom prst="roundRect">
-            <a:avLst>
-              <a:gd name="adj" fmla="val 50000"/>
-            </a:avLst>
-          </a:prstGeom>
-          <a:solidFill>
-            <a:srgbClr val="060E9F">
-              <a:alpha val="15000"/>
-            </a:srgbClr>
-          </a:solidFill>
-          <a:ln w="12700">
-            <a:solidFill>
-              <a:srgbClr val="060E9F"/>
-            </a:solidFill>
-            <a:prstDash val="solid"/>
-          </a:ln>
-        </p:spPr>
-      </p:sp>
-      <p:sp>
-        <p:nvSpPr>
-          <p:cNvPr id="25" name="Text 20"/>
-          <p:cNvSpPr/>
-          <p:nvPr/>
-        </p:nvSpPr>
-        <p:spPr>
-          <a:xfrm>
-            <a:off x="5966460" y="3602736"/>
-            <a:ext cx="960120" cy="256032"/>
-          </a:xfrm>
-          <a:prstGeom prst="rect">
-            <a:avLst/>
-          </a:prstGeom>
-          <a:noFill/>
-          <a:ln/>
-        </p:spPr>
-        <p:txBody>
-          <a:bodyPr wrap="square" lIns="0" tIns="0" rIns="0" bIns="0" rtlCol="0" anchor="ctr"/>
-          <a:lstStyle/>
-          <a:p>
-            <a:pPr algn="ctr" indent="0" marL="0">
-              <a:buNone/>
-            </a:pPr>
-            <a:r>
-              <a:rPr lang="en-US" sz="1000" b="1" dirty="0">
-                <a:solidFill>
-                  <a:srgbClr val="060E9F"/>
-                </a:solidFill>
-                <a:latin typeface="Noto Sans TC Bold" pitchFamily="34" charset="0"/>
-                <a:ea typeface="Noto Sans TC Bold" pitchFamily="34" charset="-122"/>
-                <a:cs typeface="Noto Sans TC Bold" pitchFamily="34" charset="-120"/>
-              </a:rPr>
-              <a:t>AI-4</a:t>
-            </a:r>
-            <a:endParaRPr lang="en-US" sz="1000" dirty="0"/>
-          </a:p>
-        </p:txBody>
-      </p:sp>
-      <p:sp>
-        <p:nvSpPr>
-          <p:cNvPr id="26" name="Shape 21"/>
-          <p:cNvSpPr/>
-          <p:nvPr/>
-        </p:nvSpPr>
-        <p:spPr>
-          <a:xfrm>
-            <a:off x="7315200" y="3602736"/>
-            <a:ext cx="1188720" cy="256032"/>
-          </a:xfrm>
-          <a:prstGeom prst="roundRect">
-            <a:avLst>
-              <a:gd name="adj" fmla="val 50000"/>
-            </a:avLst>
-          </a:prstGeom>
-          <a:solidFill>
-            <a:srgbClr val="FFFFFF"/>
-          </a:solidFill>
-          <a:ln w="12700">
-            <a:solidFill>
-              <a:srgbClr val="060E9F"/>
-            </a:solidFill>
-            <a:prstDash val="solid"/>
-          </a:ln>
-        </p:spPr>
-      </p:sp>
-      <p:pic>
-        <p:nvPicPr>
-          <p:cNvPr id="27" name="Image 2" descr="D:\info\0507_Weekly-Report\Operations-Weekly-Report\automation\icons\key_blue.png">    </p:cNvPr>
-          <p:cNvPicPr>
-            <a:picLocks noChangeAspect="1"/>
-          </p:cNvPicPr>
-          <p:nvPr/>
-        </p:nvPicPr>
-        <p:blipFill>
-          <a:blip r:embed="rId3"/>
-          <a:stretch>
-            <a:fillRect/>
-          </a:stretch>
-        </p:blipFill>
-        <p:spPr>
-          <a:xfrm>
-            <a:off x="7443216" y="3657600"/>
-            <a:ext cx="146304" cy="146304"/>
-          </a:xfrm>
-          <a:prstGeom prst="rect">
-            <a:avLst/>
-          </a:prstGeom>
-        </p:spPr>
-      </p:pic>
-      <p:sp>
-        <p:nvSpPr>
-          <p:cNvPr id="28" name="Text 22"/>
-          <p:cNvSpPr/>
-          <p:nvPr/>
-        </p:nvSpPr>
-        <p:spPr>
-          <a:xfrm>
-            <a:off x="7607808" y="3602736"/>
-            <a:ext cx="822960" cy="256032"/>
-          </a:xfrm>
-          <a:prstGeom prst="rect">
-            <a:avLst/>
-          </a:prstGeom>
-          <a:noFill/>
-          <a:ln/>
-        </p:spPr>
-        <p:txBody>
-          <a:bodyPr wrap="square" lIns="0" tIns="0" rIns="0" bIns="0" rtlCol="0" anchor="ctr"/>
-          <a:lstStyle/>
-          <a:p>
-            <a:pPr algn="l" indent="0" marL="0">
-              <a:buNone/>
-            </a:pPr>
-            <a:r>
-              <a:rPr lang="en-US" sz="1000" b="1" dirty="0">
-                <a:solidFill>
-                  <a:srgbClr val="060E9F"/>
-                </a:solidFill>
-                <a:latin typeface="Noto Sans TC Bold" pitchFamily="34" charset="0"/>
-                <a:ea typeface="Noto Sans TC Bold" pitchFamily="34" charset="-122"/>
-                <a:cs typeface="Noto Sans TC Bold" pitchFamily="34" charset="-120"/>
-              </a:rPr>
-              <a:t>租賃</a:t>
-            </a:r>
-            <a:endParaRPr lang="en-US" sz="1000" dirty="0"/>
-          </a:p>
-        </p:txBody>
-      </p:sp>
-      <p:sp>
-        <p:nvSpPr>
-          <p:cNvPr id="29" name="Shape 23"/>
-          <p:cNvSpPr/>
-          <p:nvPr/>
-        </p:nvSpPr>
-        <p:spPr>
-          <a:xfrm>
-            <a:off x="5966460" y="3986784"/>
-            <a:ext cx="960120" cy="256032"/>
-          </a:xfrm>
-          <a:prstGeom prst="roundRect">
-            <a:avLst>
-              <a:gd name="adj" fmla="val 50000"/>
-            </a:avLst>
-          </a:prstGeom>
-          <a:solidFill>
-            <a:srgbClr val="060E9F">
-              <a:alpha val="15000"/>
-            </a:srgbClr>
-          </a:solidFill>
-          <a:ln w="12700">
-            <a:solidFill>
-              <a:srgbClr val="060E9F"/>
-            </a:solidFill>
-            <a:prstDash val="solid"/>
-          </a:ln>
-        </p:spPr>
-      </p:sp>
-      <p:sp>
-        <p:nvSpPr>
-          <p:cNvPr id="30" name="Text 24"/>
-          <p:cNvSpPr/>
-          <p:nvPr/>
-        </p:nvSpPr>
-        <p:spPr>
-          <a:xfrm>
-            <a:off x="5966460" y="3986784"/>
-            <a:ext cx="960120" cy="256032"/>
-          </a:xfrm>
-          <a:prstGeom prst="rect">
-            <a:avLst/>
-          </a:prstGeom>
-          <a:noFill/>
-          <a:ln/>
-        </p:spPr>
-        <p:txBody>
-          <a:bodyPr wrap="square" lIns="0" tIns="0" rIns="0" bIns="0" rtlCol="0" anchor="ctr"/>
-          <a:lstStyle/>
-          <a:p>
-            <a:pPr algn="ctr" indent="0" marL="0">
-              <a:buNone/>
-            </a:pPr>
-            <a:r>
-              <a:rPr lang="en-US" sz="1000" b="1" dirty="0">
-                <a:solidFill>
-                  <a:srgbClr val="060E9F"/>
-                </a:solidFill>
-                <a:latin typeface="Noto Sans TC Bold" pitchFamily="34" charset="0"/>
-                <a:ea typeface="Noto Sans TC Bold" pitchFamily="34" charset="-122"/>
-                <a:cs typeface="Noto Sans TC Bold" pitchFamily="34" charset="-120"/>
-              </a:rPr>
-              <a:t>AI-4</a:t>
-            </a:r>
-            <a:endParaRPr lang="en-US" sz="1000" dirty="0"/>
-          </a:p>
-        </p:txBody>
-      </p:sp>
-      <p:sp>
-        <p:nvSpPr>
-          <p:cNvPr id="31" name="Shape 25"/>
-          <p:cNvSpPr/>
-          <p:nvPr/>
-        </p:nvSpPr>
-        <p:spPr>
-          <a:xfrm>
-            <a:off x="5966460" y="4370832"/>
-            <a:ext cx="960120" cy="256032"/>
-          </a:xfrm>
-          <a:prstGeom prst="roundRect">
-            <a:avLst>
-              <a:gd name="adj" fmla="val 50000"/>
-            </a:avLst>
-          </a:prstGeom>
-          <a:solidFill>
-            <a:srgbClr val="060E9F">
-              <a:alpha val="15000"/>
-            </a:srgbClr>
-          </a:solidFill>
-          <a:ln w="12700">
-            <a:solidFill>
-              <a:srgbClr val="060E9F"/>
-            </a:solidFill>
-            <a:prstDash val="solid"/>
-          </a:ln>
-        </p:spPr>
-      </p:sp>
-      <p:sp>
-        <p:nvSpPr>
-          <p:cNvPr id="32" name="Text 26"/>
-          <p:cNvSpPr/>
-          <p:nvPr/>
-        </p:nvSpPr>
-        <p:spPr>
-          <a:xfrm>
-            <a:off x="5966460" y="4370832"/>
-            <a:ext cx="960120" cy="256032"/>
-          </a:xfrm>
-          <a:prstGeom prst="rect">
-            <a:avLst/>
-          </a:prstGeom>
-          <a:noFill/>
-          <a:ln/>
-        </p:spPr>
-        <p:txBody>
-          <a:bodyPr wrap="square" lIns="0" tIns="0" rIns="0" bIns="0" rtlCol="0" anchor="ctr"/>
-          <a:lstStyle/>
-          <a:p>
-            <a:pPr algn="ctr" indent="0" marL="0">
-              <a:buNone/>
-            </a:pPr>
-            <a:r>
-              <a:rPr lang="en-US" sz="1000" b="1" dirty="0">
-                <a:solidFill>
-                  <a:srgbClr val="060E9F"/>
-                </a:solidFill>
-                <a:latin typeface="Noto Sans TC Bold" pitchFamily="34" charset="0"/>
-                <a:ea typeface="Noto Sans TC Bold" pitchFamily="34" charset="-122"/>
-                <a:cs typeface="Noto Sans TC Bold" pitchFamily="34" charset="-120"/>
-              </a:rPr>
-              <a:t>AI-4</a:t>
-            </a:r>
-            <a:endParaRPr lang="en-US" sz="1000" dirty="0"/>
-          </a:p>
-        </p:txBody>
-      </p:sp>
-      <p:sp>
-        <p:nvSpPr>
-          <p:cNvPr id="33" name="Shape 27"/>
-          <p:cNvSpPr/>
-          <p:nvPr/>
-        </p:nvSpPr>
-        <p:spPr>
-          <a:xfrm>
-            <a:off x="5966460" y="4754880"/>
-            <a:ext cx="960120" cy="256032"/>
-          </a:xfrm>
-          <a:prstGeom prst="roundRect">
-            <a:avLst>
-              <a:gd name="adj" fmla="val 50000"/>
-            </a:avLst>
-          </a:prstGeom>
-          <a:solidFill>
-            <a:srgbClr val="0076A9">
-              <a:alpha val="15000"/>
-            </a:srgbClr>
-          </a:solidFill>
-          <a:ln w="12700">
-            <a:solidFill>
-              <a:srgbClr val="0076A9"/>
-            </a:solidFill>
-            <a:prstDash val="solid"/>
-          </a:ln>
-        </p:spPr>
-      </p:sp>
-      <p:sp>
-        <p:nvSpPr>
-          <p:cNvPr id="34" name="Text 28"/>
-          <p:cNvSpPr/>
-          <p:nvPr/>
-        </p:nvSpPr>
-        <p:spPr>
-          <a:xfrm>
-            <a:off x="5966460" y="4754880"/>
-            <a:ext cx="960120" cy="256032"/>
-          </a:xfrm>
-          <a:prstGeom prst="rect">
-            <a:avLst/>
-          </a:prstGeom>
-          <a:noFill/>
-          <a:ln/>
-        </p:spPr>
-        <p:txBody>
-          <a:bodyPr wrap="square" lIns="0" tIns="0" rIns="0" bIns="0" rtlCol="0" anchor="ctr"/>
-          <a:lstStyle/>
-          <a:p>
-            <a:pPr algn="ctr" indent="0" marL="0">
-              <a:buNone/>
-            </a:pPr>
-            <a:r>
-              <a:rPr lang="en-US" sz="1000" b="1" dirty="0">
-                <a:solidFill>
-                  <a:srgbClr val="0076A9"/>
-                </a:solidFill>
-                <a:latin typeface="Noto Sans TC Bold" pitchFamily="34" charset="0"/>
-                <a:ea typeface="Noto Sans TC Bold" pitchFamily="34" charset="-122"/>
-                <a:cs typeface="Noto Sans TC Bold" pitchFamily="34" charset="-120"/>
-              </a:rPr>
-              <a:t>AI-HD</a:t>
-            </a:r>
-            <a:endParaRPr lang="en-US" sz="1000" dirty="0"/>
-          </a:p>
-        </p:txBody>
-      </p:sp>
-      <p:sp>
-        <p:nvSpPr>
-          <p:cNvPr id="35" name="Shape 29"/>
+          <p:cNvPr id="32" name="Shape 27"/>
           <p:cNvSpPr/>
           <p:nvPr/>
         </p:nvSpPr>
@@ -14216,7 +14126,7 @@
       </p:sp>
       <p:sp>
         <p:nvSpPr>
-          <p:cNvPr id="36" name="Text 30"/>
+          <p:cNvPr id="33" name="Text 28"/>
           <p:cNvSpPr/>
           <p:nvPr/>
         </p:nvSpPr>
@@ -14255,7 +14165,7 @@
       </p:sp>
       <p:sp>
         <p:nvSpPr>
-          <p:cNvPr id="37" name="Text 31"/>
+          <p:cNvPr id="34" name="Text 29"/>
           <p:cNvSpPr/>
           <p:nvPr/>
         </p:nvSpPr>
@@ -14294,7 +14204,7 @@
       </p:sp>
       <p:sp>
         <p:nvSpPr>
-          <p:cNvPr id="38" name="Shape 32"/>
+          <p:cNvPr id="35" name="Shape 30"/>
           <p:cNvSpPr/>
           <p:nvPr/>
         </p:nvSpPr>
@@ -14323,7 +14233,7 @@
       </p:sp>
       <p:sp>
         <p:nvSpPr>
-          <p:cNvPr id="39" name="Text 33"/>
+          <p:cNvPr id="36" name="Text 31"/>
           <p:cNvSpPr/>
           <p:nvPr/>
         </p:nvSpPr>
@@ -14362,7 +14272,7 @@
       </p:sp>
       <p:sp>
         <p:nvSpPr>
-          <p:cNvPr id="40" name="Text 34"/>
+          <p:cNvPr id="37" name="Text 32"/>
           <p:cNvSpPr/>
           <p:nvPr/>
         </p:nvSpPr>
@@ -14401,7 +14311,7 @@
       </p:sp>
       <p:sp>
         <p:nvSpPr>
-          <p:cNvPr id="41" name="Shape 35"/>
+          <p:cNvPr id="38" name="Shape 33"/>
           <p:cNvSpPr/>
           <p:nvPr/>
         </p:nvSpPr>
@@ -14430,7 +14340,7 @@
       </p:sp>
       <p:sp>
         <p:nvSpPr>
-          <p:cNvPr id="42" name="Text 36"/>
+          <p:cNvPr id="39" name="Text 34"/>
           <p:cNvSpPr/>
           <p:nvPr/>
         </p:nvSpPr>
@@ -14469,7 +14379,7 @@
       </p:sp>
       <p:sp>
         <p:nvSpPr>
-          <p:cNvPr id="43" name="Text 37"/>
+          <p:cNvPr id="40" name="Text 35"/>
           <p:cNvSpPr/>
           <p:nvPr/>
         </p:nvSpPr>
@@ -14508,7 +14418,7 @@
       </p:sp>
       <p:sp>
         <p:nvSpPr>
-          <p:cNvPr id="44" name="Shape 38"/>
+          <p:cNvPr id="41" name="Shape 36"/>
           <p:cNvSpPr/>
           <p:nvPr/>
         </p:nvSpPr>
@@ -14537,7 +14447,7 @@
       </p:sp>
       <p:sp>
         <p:nvSpPr>
-          <p:cNvPr id="45" name="Text 39"/>
+          <p:cNvPr id="42" name="Text 37"/>
           <p:cNvSpPr/>
           <p:nvPr/>
         </p:nvSpPr>
@@ -14576,7 +14486,7 @@
       </p:sp>
       <p:sp>
         <p:nvSpPr>
-          <p:cNvPr id="46" name="Text 40"/>
+          <p:cNvPr id="43" name="Text 38"/>
           <p:cNvSpPr/>
           <p:nvPr/>
         </p:nvSpPr>
@@ -14615,7 +14525,7 @@
       </p:sp>
       <p:sp>
         <p:nvSpPr>
-          <p:cNvPr id="47" name="Shape 41"/>
+          <p:cNvPr id="44" name="Shape 39"/>
           <p:cNvSpPr/>
           <p:nvPr/>
         </p:nvSpPr>
@@ -14644,7 +14554,7 @@
       </p:sp>
       <p:sp>
         <p:nvSpPr>
-          <p:cNvPr id="48" name="Text 42"/>
+          <p:cNvPr id="45" name="Text 40"/>
           <p:cNvSpPr/>
           <p:nvPr/>
         </p:nvSpPr>
@@ -14683,7 +14593,7 @@
       </p:sp>
       <p:sp>
         <p:nvSpPr>
-          <p:cNvPr id="49" name="Text 43"/>
+          <p:cNvPr id="46" name="Text 41"/>
           <p:cNvSpPr/>
           <p:nvPr/>
         </p:nvSpPr>
@@ -14722,7 +14632,7 @@
       </p:sp>
       <p:sp>
         <p:nvSpPr>
-          <p:cNvPr id="50" name="Shape 44"/>
+          <p:cNvPr id="47" name="Shape 42"/>
           <p:cNvSpPr/>
           <p:nvPr/>
         </p:nvSpPr>
@@ -14751,7 +14661,7 @@
       </p:sp>
       <p:sp>
         <p:nvSpPr>
-          <p:cNvPr id="51" name="Text 45"/>
+          <p:cNvPr id="48" name="Text 43"/>
           <p:cNvSpPr/>
           <p:nvPr/>
         </p:nvSpPr>
@@ -14790,7 +14700,7 @@
       </p:sp>
       <p:sp>
         <p:nvSpPr>
-          <p:cNvPr id="52" name="Text 46"/>
+          <p:cNvPr id="49" name="Text 44"/>
           <p:cNvSpPr/>
           <p:nvPr/>
         </p:nvSpPr>
@@ -14829,7 +14739,7 @@
       </p:sp>
       <p:sp>
         <p:nvSpPr>
-          <p:cNvPr id="53" name="Shape 47"/>
+          <p:cNvPr id="50" name="Shape 45"/>
           <p:cNvSpPr/>
           <p:nvPr/>
         </p:nvSpPr>
@@ -14858,7 +14768,7 @@
       </p:sp>
       <p:sp>
         <p:nvSpPr>
-          <p:cNvPr id="54" name="Text 48"/>
+          <p:cNvPr id="51" name="Text 46"/>
           <p:cNvSpPr/>
           <p:nvPr/>
         </p:nvSpPr>
@@ -14897,7 +14807,7 @@
       </p:sp>
       <p:sp>
         <p:nvSpPr>
-          <p:cNvPr id="55" name="Text 49"/>
+          <p:cNvPr id="52" name="Text 47"/>
           <p:cNvSpPr/>
           <p:nvPr/>
         </p:nvSpPr>
@@ -14936,7 +14846,7 @@
       </p:sp>
       <p:sp>
         <p:nvSpPr>
-          <p:cNvPr id="56" name="Shape 50"/>
+          <p:cNvPr id="53" name="Shape 48"/>
           <p:cNvSpPr/>
           <p:nvPr/>
         </p:nvSpPr>
@@ -14965,7 +14875,7 @@
       </p:sp>
       <p:sp>
         <p:nvSpPr>
-          <p:cNvPr id="57" name="Text 51"/>
+          <p:cNvPr id="54" name="Text 49"/>
           <p:cNvSpPr/>
           <p:nvPr/>
         </p:nvSpPr>
@@ -15004,7 +14914,7 @@
       </p:sp>
       <p:sp>
         <p:nvSpPr>
-          <p:cNvPr id="58" name="Text 52"/>
+          <p:cNvPr id="55" name="Text 50"/>
           <p:cNvSpPr/>
           <p:nvPr/>
         </p:nvSpPr>
@@ -15043,7 +14953,7 @@
       </p:sp>
       <p:sp>
         <p:nvSpPr>
-          <p:cNvPr id="59" name="Shape 53"/>
+          <p:cNvPr id="56" name="Shape 51"/>
           <p:cNvSpPr/>
           <p:nvPr/>
         </p:nvSpPr>
@@ -15072,7 +14982,7 @@
       </p:sp>
       <p:sp>
         <p:nvSpPr>
-          <p:cNvPr id="60" name="Text 54"/>
+          <p:cNvPr id="57" name="Text 52"/>
           <p:cNvSpPr/>
           <p:nvPr/>
         </p:nvSpPr>
@@ -15111,7 +15021,7 @@
       </p:sp>
       <p:sp>
         <p:nvSpPr>
-          <p:cNvPr id="61" name="Text 55"/>
+          <p:cNvPr id="58" name="Text 53"/>
           <p:cNvSpPr/>
           <p:nvPr/>
         </p:nvSpPr>
